--- a/presentation/image_captioning_presentation.pptx
+++ b/presentation/image_captioning_presentation.pptx
@@ -18,8 +18,10 @@
     <p:sldId id="266" r:id="rId17"/>
     <p:sldId id="267" r:id="rId18"/>
     <p:sldId id="268" r:id="rId19"/>
+    <p:sldId id="269" r:id="rId20"/>
+    <p:sldId id="270" r:id="rId21"/>
   </p:sldIdLst>
-  <p:sldSz cx="9144000" cy="6858000" type="screen4x3"/>
+  <p:sldSz cx="12192000" cy="6858000" type="screen4x3"/>
   <p:notesSz cx="6858000" cy="9144000"/>
   <p:defaultTextStyle>
     <a:defPPr>
@@ -3102,42 +3104,256 @@
       <p:grpSpPr/>
       <p:sp>
         <p:nvSpPr>
-          <p:cNvPr id="2" name="Title 1"/>
-          <p:cNvSpPr>
-            <a:spLocks noGrp="1"/>
-          </p:cNvSpPr>
-          <p:nvPr>
-            <p:ph type="ctrTitle"/>
-          </p:nvPr>
-        </p:nvSpPr>
-        <p:spPr/>
-        <p:txBody>
-          <a:bodyPr/>
-          <a:lstStyle/>
-          <a:p>
-            <a:r>
-              <a:t>Слайд 1: Тема и цел</a:t>
-            </a:r>
-          </a:p>
-        </p:txBody>
-      </p:sp>
-      <p:sp>
-        <p:nvSpPr>
-          <p:cNvPr id="3" name="Subtitle 2"/>
-          <p:cNvSpPr>
-            <a:spLocks noGrp="1"/>
-          </p:cNvSpPr>
-          <p:nvPr>
-            <p:ph type="subTitle" idx="1"/>
-          </p:nvPr>
-        </p:nvSpPr>
-        <p:spPr/>
-        <p:txBody>
-          <a:bodyPr/>
-          <a:lstStyle/>
-          <a:p>
-            <a:r>
-              <a:t>Flickr8k image captioning project</a:t>
+          <p:cNvPr id="2" name="TextBox 1"/>
+          <p:cNvSpPr txBox="1"/>
+          <p:nvPr/>
+        </p:nvSpPr>
+        <p:spPr>
+          <a:xfrm>
+            <a:off x="594360" y="320040"/>
+            <a:ext cx="10972800" cy="365760"/>
+          </a:xfrm>
+          <a:prstGeom prst="rect">
+            <a:avLst/>
+          </a:prstGeom>
+          <a:noFill/>
+        </p:spPr>
+        <p:txBody>
+          <a:bodyPr wrap="none">
+            <a:spAutoFit/>
+          </a:bodyPr>
+          <a:lstStyle/>
+          <a:p>
+            <a:pPr algn="ctr"/>
+            <a:r>
+              <a:rPr sz="2100" b="0" i="0">
+                <a:latin typeface="Calibri"/>
+              </a:rPr>
+              <a:t>Софийски университет „Св. Климент Охридски“</a:t>
+            </a:r>
+          </a:p>
+        </p:txBody>
+      </p:sp>
+      <p:sp>
+        <p:nvSpPr>
+          <p:cNvPr id="3" name="TextBox 2"/>
+          <p:cNvSpPr txBox="1"/>
+          <p:nvPr/>
+        </p:nvSpPr>
+        <p:spPr>
+          <a:xfrm>
+            <a:off x="1097280" y="1508760"/>
+            <a:ext cx="10058400" cy="960120"/>
+          </a:xfrm>
+          <a:prstGeom prst="rect">
+            <a:avLst/>
+          </a:prstGeom>
+          <a:noFill/>
+        </p:spPr>
+        <p:txBody>
+          <a:bodyPr wrap="none">
+            <a:spAutoFit/>
+          </a:bodyPr>
+          <a:lstStyle/>
+          <a:p>
+            <a:pPr algn="ctr"/>
+            <a:r>
+              <a:rPr sz="3600" b="1" i="0">
+                <a:latin typeface="Calibri"/>
+              </a:rPr>
+              <a:t>Генериране на описание за изображение</a:t>
+            </a:r>
+          </a:p>
+        </p:txBody>
+      </p:sp>
+      <p:sp>
+        <p:nvSpPr>
+          <p:cNvPr id="4" name="TextBox 3"/>
+          <p:cNvSpPr txBox="1"/>
+          <p:nvPr/>
+        </p:nvSpPr>
+        <p:spPr>
+          <a:xfrm>
+            <a:off x="3566160" y="2743200"/>
+            <a:ext cx="5029200" cy="502920"/>
+          </a:xfrm>
+          <a:prstGeom prst="rect">
+            <a:avLst/>
+          </a:prstGeom>
+          <a:noFill/>
+        </p:spPr>
+        <p:txBody>
+          <a:bodyPr wrap="none">
+            <a:spAutoFit/>
+          </a:bodyPr>
+          <a:lstStyle/>
+          <a:p>
+            <a:pPr algn="ctr"/>
+            <a:r>
+              <a:rPr sz="3000" b="1" i="0">
+                <a:latin typeface="Calibri"/>
+              </a:rPr>
+              <a:t>Курсов проект</a:t>
+            </a:r>
+          </a:p>
+        </p:txBody>
+      </p:sp>
+      <p:sp>
+        <p:nvSpPr>
+          <p:cNvPr id="5" name="TextBox 4"/>
+          <p:cNvSpPr txBox="1"/>
+          <p:nvPr/>
+        </p:nvSpPr>
+        <p:spPr>
+          <a:xfrm>
+            <a:off x="2743200" y="4343400"/>
+            <a:ext cx="6766560" cy="274320"/>
+          </a:xfrm>
+          <a:prstGeom prst="rect">
+            <a:avLst/>
+          </a:prstGeom>
+          <a:noFill/>
+        </p:spPr>
+        <p:txBody>
+          <a:bodyPr wrap="none">
+            <a:spAutoFit/>
+          </a:bodyPr>
+          <a:lstStyle/>
+          <a:p>
+            <a:pPr algn="ctr"/>
+            <a:r>
+              <a:rPr sz="1600" b="0" i="1">
+                <a:latin typeface="Calibri"/>
+              </a:rPr>
+              <a:t>Факултет по математика и информатика</a:t>
+            </a:r>
+          </a:p>
+        </p:txBody>
+      </p:sp>
+      <p:sp>
+        <p:nvSpPr>
+          <p:cNvPr id="6" name="TextBox 5"/>
+          <p:cNvSpPr txBox="1"/>
+          <p:nvPr/>
+        </p:nvSpPr>
+        <p:spPr>
+          <a:xfrm>
+            <a:off x="2743200" y="4663440"/>
+            <a:ext cx="6766560" cy="274320"/>
+          </a:xfrm>
+          <a:prstGeom prst="rect">
+            <a:avLst/>
+          </a:prstGeom>
+          <a:noFill/>
+        </p:spPr>
+        <p:txBody>
+          <a:bodyPr wrap="none">
+            <a:spAutoFit/>
+          </a:bodyPr>
+          <a:lstStyle/>
+          <a:p>
+            <a:pPr algn="ctr"/>
+            <a:r>
+              <a:rPr sz="1600" b="0" i="1">
+                <a:latin typeface="Calibri"/>
+              </a:rPr>
+              <a:t>Студент: Никола</a:t>
+            </a:r>
+          </a:p>
+        </p:txBody>
+      </p:sp>
+      <p:sp>
+        <p:nvSpPr>
+          <p:cNvPr id="7" name="TextBox 6"/>
+          <p:cNvSpPr txBox="1"/>
+          <p:nvPr/>
+        </p:nvSpPr>
+        <p:spPr>
+          <a:xfrm>
+            <a:off x="2743200" y="4983480"/>
+            <a:ext cx="6766560" cy="274320"/>
+          </a:xfrm>
+          <a:prstGeom prst="rect">
+            <a:avLst/>
+          </a:prstGeom>
+          <a:noFill/>
+        </p:spPr>
+        <p:txBody>
+          <a:bodyPr wrap="none">
+            <a:spAutoFit/>
+          </a:bodyPr>
+          <a:lstStyle/>
+          <a:p>
+            <a:pPr algn="ctr"/>
+            <a:r>
+              <a:rPr sz="1600" b="0" i="1">
+                <a:latin typeface="Calibri"/>
+              </a:rPr>
+              <a:t>Факултетен номер: [попълва се]</a:t>
+            </a:r>
+          </a:p>
+        </p:txBody>
+      </p:sp>
+      <p:sp>
+        <p:nvSpPr>
+          <p:cNvPr id="8" name="TextBox 7"/>
+          <p:cNvSpPr txBox="1"/>
+          <p:nvPr/>
+        </p:nvSpPr>
+        <p:spPr>
+          <a:xfrm>
+            <a:off x="2743200" y="5303520"/>
+            <a:ext cx="6766560" cy="274320"/>
+          </a:xfrm>
+          <a:prstGeom prst="rect">
+            <a:avLst/>
+          </a:prstGeom>
+          <a:noFill/>
+        </p:spPr>
+        <p:txBody>
+          <a:bodyPr wrap="none">
+            <a:spAutoFit/>
+          </a:bodyPr>
+          <a:lstStyle/>
+          <a:p>
+            <a:pPr algn="ctr"/>
+            <a:r>
+              <a:rPr sz="1600" b="0" i="1">
+                <a:latin typeface="Calibri"/>
+              </a:rPr>
+              <a:t>Учебен план: Изкуствен интелект</a:t>
+            </a:r>
+          </a:p>
+        </p:txBody>
+      </p:sp>
+      <p:sp>
+        <p:nvSpPr>
+          <p:cNvPr id="9" name="TextBox 8"/>
+          <p:cNvSpPr txBox="1"/>
+          <p:nvPr/>
+        </p:nvSpPr>
+        <p:spPr>
+          <a:xfrm>
+            <a:off x="2743200" y="5623560"/>
+            <a:ext cx="6766560" cy="274320"/>
+          </a:xfrm>
+          <a:prstGeom prst="rect">
+            <a:avLst/>
+          </a:prstGeom>
+          <a:noFill/>
+        </p:spPr>
+        <p:txBody>
+          <a:bodyPr wrap="none">
+            <a:spAutoFit/>
+          </a:bodyPr>
+          <a:lstStyle/>
+          <a:p>
+            <a:pPr algn="ctr"/>
+            <a:r>
+              <a:rPr sz="1600" b="0" i="1">
+                <a:latin typeface="Calibri"/>
+              </a:rPr>
+              <a:t>Дисциплина: Дълбоко обучение</a:t>
             </a:r>
           </a:p>
         </p:txBody>
@@ -3162,77 +3378,216 @@
       <p:grpSpPr/>
       <p:sp>
         <p:nvSpPr>
-          <p:cNvPr id="2" name="Title 1"/>
-          <p:cNvSpPr>
-            <a:spLocks noGrp="1"/>
-          </p:cNvSpPr>
-          <p:nvPr>
-            <p:ph type="title"/>
-          </p:nvPr>
-        </p:nvSpPr>
-        <p:spPr/>
-        <p:txBody>
-          <a:bodyPr/>
-          <a:lstStyle/>
-          <a:p>
-            <a:r>
-              <a:t>Слайд 10: Streamlit приложение</a:t>
-            </a:r>
-          </a:p>
-        </p:txBody>
-      </p:sp>
-      <p:sp>
-        <p:nvSpPr>
-          <p:cNvPr id="3" name="Content Placeholder 2"/>
-          <p:cNvSpPr>
-            <a:spLocks noGrp="1"/>
-          </p:cNvSpPr>
-          <p:nvPr>
-            <p:ph idx="1"/>
-          </p:nvPr>
-        </p:nvSpPr>
-        <p:spPr/>
-        <p:txBody>
-          <a:bodyPr/>
+          <p:cNvPr id="2" name="TextBox 1"/>
+          <p:cNvSpPr txBox="1"/>
+          <p:nvPr/>
+        </p:nvSpPr>
+        <p:spPr>
+          <a:xfrm>
+            <a:off x="640080" y="411480"/>
+            <a:ext cx="10972800" cy="502920"/>
+          </a:xfrm>
+          <a:prstGeom prst="rect">
+            <a:avLst/>
+          </a:prstGeom>
+          <a:noFill/>
+        </p:spPr>
+        <p:txBody>
+          <a:bodyPr wrap="none">
+            <a:spAutoFit/>
+          </a:bodyPr>
+          <a:lstStyle/>
+          <a:p>
+            <a:pPr algn="l"/>
+            <a:r>
+              <a:rPr sz="2600" b="1" i="0">
+                <a:latin typeface="Calibri"/>
+              </a:rPr>
+              <a:t>Експерименти</a:t>
+            </a:r>
+          </a:p>
+        </p:txBody>
+      </p:sp>
+      <p:sp>
+        <p:nvSpPr>
+          <p:cNvPr id="3" name="Rectangle 2"/>
+          <p:cNvSpPr/>
+          <p:nvPr/>
+        </p:nvSpPr>
+        <p:spPr>
+          <a:xfrm>
+            <a:off x="640080" y="1005840"/>
+            <a:ext cx="10881360" cy="9144"/>
+          </a:xfrm>
+          <a:prstGeom prst="rect">
+            <a:avLst/>
+          </a:prstGeom>
+          <a:solidFill>
+            <a:srgbClr val="000000"/>
+          </a:solidFill>
+          <a:ln>
+            <a:solidFill>
+              <a:srgbClr val="000000"/>
+            </a:solidFill>
+          </a:ln>
+        </p:spPr>
+        <p:style>
+          <a:lnRef idx="1">
+            <a:schemeClr val="accent1"/>
+          </a:lnRef>
+          <a:fillRef idx="3">
+            <a:schemeClr val="accent1"/>
+          </a:fillRef>
+          <a:effectRef idx="2">
+            <a:schemeClr val="accent1"/>
+          </a:effectRef>
+          <a:fontRef idx="minor">
+            <a:schemeClr val="lt1"/>
+          </a:fontRef>
+        </p:style>
+        <p:txBody>
+          <a:bodyPr rtlCol="0" anchor="ctr"/>
+          <a:lstStyle/>
+          <a:p>
+            <a:pPr algn="ctr"/>
+          </a:p>
+        </p:txBody>
+      </p:sp>
+      <p:sp>
+        <p:nvSpPr>
+          <p:cNvPr id="4" name="TextBox 3"/>
+          <p:cNvSpPr txBox="1"/>
+          <p:nvPr/>
+        </p:nvSpPr>
+        <p:spPr>
+          <a:xfrm>
+            <a:off x="868680" y="1325880"/>
+            <a:ext cx="10424160" cy="4754880"/>
+          </a:xfrm>
+          <a:prstGeom prst="rect">
+            <a:avLst/>
+          </a:prstGeom>
+          <a:noFill/>
+        </p:spPr>
+        <p:txBody>
+          <a:bodyPr wrap="square">
+            <a:spAutoFit/>
+          </a:bodyPr>
           <a:lstStyle/>
           <a:p>
             <a:pPr>
-              <a:defRPr sz="2400"/>
+              <a:spcAft>
+                <a:spcPts val="1000"/>
+              </a:spcAft>
+              <a:defRPr sz="2100">
+                <a:latin typeface="Calibri"/>
+              </a:defRPr>
             </a:pPr>
             <a:r>
-              <a:t>Потребителят качва изображение.</a:t>
+              <a:t>Тествани са различни настройки на LSTM hidden size и dropout.</a:t>
             </a:r>
           </a:p>
           <a:p>
             <a:pPr>
-              <a:defRPr sz="2400"/>
+              <a:spcAft>
+                <a:spcPts val="1000"/>
+              </a:spcAft>
+              <a:defRPr sz="2100">
+                <a:latin typeface="Calibri"/>
+              </a:defRPr>
             </a:pPr>
             <a:r>
-              <a:t>Моделът генерира caption.</a:t>
+              <a:t>Направен е TF-IDF експеримент върху captions за анализ на важните думи.</a:t>
             </a:r>
           </a:p>
           <a:p>
             <a:pPr>
-              <a:defRPr sz="2400"/>
+              <a:spcAft>
+                <a:spcPts val="1000"/>
+              </a:spcAft>
+              <a:defRPr sz="2100">
+                <a:latin typeface="Calibri"/>
+              </a:defRPr>
             </a:pPr>
             <a:r>
-              <a:t>Има три режима: VGG retrieval, VGG16 + LSTM и pretrained BLIP.</a:t>
+              <a:t>Добавен е VGG retrieval подход, който избира описание от визуално близки training изображения.</a:t>
             </a:r>
           </a:p>
           <a:p>
             <a:pPr>
-              <a:defRPr sz="2400"/>
+              <a:spcAft>
+                <a:spcPts val="1000"/>
+              </a:spcAft>
+              <a:defRPr sz="2100">
+                <a:latin typeface="Calibri"/>
+              </a:defRPr>
             </a:pPr>
             <a:r>
-              <a:t>Project baseline зарежда checkpoint от `checkpoints/best_model.pt`.</a:t>
-            </a:r>
-          </a:p>
-          <a:p>
-            <a:pPr>
-              <a:defRPr sz="2400"/>
-            </a:pPr>
-            <a:r>
-              <a:t>Използвам greedy и beam search режим за VGG16 + LSTM модела.</a:t>
+              <a:t>Сравнен е и режим с предварително обучен BLIP модел като по-силен ориентир.</a:t>
+            </a:r>
+          </a:p>
+        </p:txBody>
+      </p:sp>
+      <p:sp>
+        <p:nvSpPr>
+          <p:cNvPr id="5" name="TextBox 4"/>
+          <p:cNvSpPr txBox="1"/>
+          <p:nvPr/>
+        </p:nvSpPr>
+        <p:spPr>
+          <a:xfrm>
+            <a:off x="548640" y="6473952"/>
+            <a:ext cx="5486400" cy="228600"/>
+          </a:xfrm>
+          <a:prstGeom prst="rect">
+            <a:avLst/>
+          </a:prstGeom>
+          <a:noFill/>
+        </p:spPr>
+        <p:txBody>
+          <a:bodyPr wrap="none">
+            <a:spAutoFit/>
+          </a:bodyPr>
+          <a:lstStyle/>
+          <a:p>
+            <a:pPr algn="l"/>
+            <a:r>
+              <a:rPr sz="800" b="0" i="1">
+                <a:latin typeface="Calibri"/>
+              </a:rPr>
+              <a:t>Генериране на описание за изображение</a:t>
+            </a:r>
+          </a:p>
+        </p:txBody>
+      </p:sp>
+      <p:sp>
+        <p:nvSpPr>
+          <p:cNvPr id="6" name="TextBox 5"/>
+          <p:cNvSpPr txBox="1"/>
+          <p:nvPr/>
+        </p:nvSpPr>
+        <p:spPr>
+          <a:xfrm>
+            <a:off x="10972800" y="6473952"/>
+            <a:ext cx="640080" cy="228600"/>
+          </a:xfrm>
+          <a:prstGeom prst="rect">
+            <a:avLst/>
+          </a:prstGeom>
+          <a:noFill/>
+        </p:spPr>
+        <p:txBody>
+          <a:bodyPr wrap="none">
+            <a:spAutoFit/>
+          </a:bodyPr>
+          <a:lstStyle/>
+          <a:p>
+            <a:pPr algn="r"/>
+            <a:r>
+              <a:rPr sz="800" b="0" i="0">
+                <a:latin typeface="Calibri"/>
+              </a:rPr>
+              <a:t>10/15</a:t>
             </a:r>
           </a:p>
         </p:txBody>
@@ -3257,61 +3612,242 @@
       <p:grpSpPr/>
       <p:sp>
         <p:nvSpPr>
-          <p:cNvPr id="2" name="Title 1"/>
-          <p:cNvSpPr>
-            <a:spLocks noGrp="1"/>
-          </p:cNvSpPr>
-          <p:nvPr>
-            <p:ph type="title"/>
-          </p:nvPr>
-        </p:nvSpPr>
-        <p:spPr/>
-        <p:txBody>
-          <a:bodyPr/>
-          <a:lstStyle/>
-          <a:p>
-            <a:r>
-              <a:t>Слайд 11: Тестове</a:t>
-            </a:r>
-          </a:p>
-        </p:txBody>
-      </p:sp>
-      <p:sp>
-        <p:nvSpPr>
-          <p:cNvPr id="3" name="Content Placeholder 2"/>
-          <p:cNvSpPr>
-            <a:spLocks noGrp="1"/>
-          </p:cNvSpPr>
-          <p:nvPr>
-            <p:ph idx="1"/>
-          </p:nvPr>
-        </p:nvSpPr>
-        <p:spPr/>
-        <p:txBody>
-          <a:bodyPr/>
+          <p:cNvPr id="2" name="TextBox 1"/>
+          <p:cNvSpPr txBox="1"/>
+          <p:nvPr/>
+        </p:nvSpPr>
+        <p:spPr>
+          <a:xfrm>
+            <a:off x="640080" y="411480"/>
+            <a:ext cx="10972800" cy="502920"/>
+          </a:xfrm>
+          <a:prstGeom prst="rect">
+            <a:avLst/>
+          </a:prstGeom>
+          <a:noFill/>
+        </p:spPr>
+        <p:txBody>
+          <a:bodyPr wrap="none">
+            <a:spAutoFit/>
+          </a:bodyPr>
+          <a:lstStyle/>
+          <a:p>
+            <a:pPr algn="l"/>
+            <a:r>
+              <a:rPr sz="2600" b="1" i="0">
+                <a:latin typeface="Calibri"/>
+              </a:rPr>
+              <a:t>Резултати от основния модел</a:t>
+            </a:r>
+          </a:p>
+        </p:txBody>
+      </p:sp>
+      <p:sp>
+        <p:nvSpPr>
+          <p:cNvPr id="3" name="Rectangle 2"/>
+          <p:cNvSpPr/>
+          <p:nvPr/>
+        </p:nvSpPr>
+        <p:spPr>
+          <a:xfrm>
+            <a:off x="640080" y="1005840"/>
+            <a:ext cx="10881360" cy="9144"/>
+          </a:xfrm>
+          <a:prstGeom prst="rect">
+            <a:avLst/>
+          </a:prstGeom>
+          <a:solidFill>
+            <a:srgbClr val="000000"/>
+          </a:solidFill>
+          <a:ln>
+            <a:solidFill>
+              <a:srgbClr val="000000"/>
+            </a:solidFill>
+          </a:ln>
+        </p:spPr>
+        <p:style>
+          <a:lnRef idx="1">
+            <a:schemeClr val="accent1"/>
+          </a:lnRef>
+          <a:fillRef idx="3">
+            <a:schemeClr val="accent1"/>
+          </a:fillRef>
+          <a:effectRef idx="2">
+            <a:schemeClr val="accent1"/>
+          </a:effectRef>
+          <a:fontRef idx="minor">
+            <a:schemeClr val="lt1"/>
+          </a:fontRef>
+        </p:style>
+        <p:txBody>
+          <a:bodyPr rtlCol="0" anchor="ctr"/>
+          <a:lstStyle/>
+          <a:p>
+            <a:pPr algn="ctr"/>
+          </a:p>
+        </p:txBody>
+      </p:sp>
+      <p:sp>
+        <p:nvSpPr>
+          <p:cNvPr id="4" name="TextBox 3"/>
+          <p:cNvSpPr txBox="1"/>
+          <p:nvPr/>
+        </p:nvSpPr>
+        <p:spPr>
+          <a:xfrm>
+            <a:off x="868680" y="1325880"/>
+            <a:ext cx="10424160" cy="4754880"/>
+          </a:xfrm>
+          <a:prstGeom prst="rect">
+            <a:avLst/>
+          </a:prstGeom>
+          <a:noFill/>
+        </p:spPr>
+        <p:txBody>
+          <a:bodyPr wrap="square">
+            <a:spAutoFit/>
+          </a:bodyPr>
           <a:lstStyle/>
           <a:p>
             <a:pPr>
-              <a:defRPr sz="2400"/>
+              <a:spcAft>
+                <a:spcPts val="1000"/>
+              </a:spcAft>
+              <a:defRPr sz="2100">
+                <a:latin typeface="Calibri"/>
+              </a:defRPr>
             </a:pPr>
             <a:r>
-              <a:t>Написани са тестове за vocabulary, dataset, model, training и evaluation.</a:t>
+              <a:t>Validation loss: 2.7857.</a:t>
             </a:r>
           </a:p>
           <a:p>
             <a:pPr>
-              <a:defRPr sz="2400"/>
+              <a:spcAft>
+                <a:spcPts val="1000"/>
+              </a:spcAft>
+              <a:defRPr sz="2100">
+                <a:latin typeface="Calibri"/>
+              </a:defRPr>
             </a:pPr>
             <a:r>
-              <a:t>Има тестове за retrieval, TF-IDF, presentation builder и pretrained captioning wrapper.</a:t>
+              <a:t>Test loss: 2.7643.</a:t>
             </a:r>
           </a:p>
           <a:p>
             <a:pPr>
-              <a:defRPr sz="2400"/>
+              <a:spcAft>
+                <a:spcPts val="1000"/>
+              </a:spcAft>
+              <a:defRPr sz="2100">
+                <a:latin typeface="Calibri"/>
+              </a:defRPr>
             </a:pPr>
             <a:r>
-              <a:t>Последна проверка: `31 passed`.</a:t>
+              <a:t>BLEU-1: 0.5386.</a:t>
+            </a:r>
+          </a:p>
+          <a:p>
+            <a:pPr>
+              <a:spcAft>
+                <a:spcPts val="1000"/>
+              </a:spcAft>
+              <a:defRPr sz="2100">
+                <a:latin typeface="Calibri"/>
+              </a:defRPr>
+            </a:pPr>
+            <a:r>
+              <a:t>BLEU-4: 0.1392.</a:t>
+            </a:r>
+          </a:p>
+          <a:p>
+            <a:pPr>
+              <a:spcAft>
+                <a:spcPts val="1000"/>
+              </a:spcAft>
+              <a:defRPr sz="2100">
+                <a:latin typeface="Calibri"/>
+              </a:defRPr>
+            </a:pPr>
+            <a:r>
+              <a:t>ROUGE-L: 0.3918.</a:t>
+            </a:r>
+          </a:p>
+          <a:p>
+            <a:pPr>
+              <a:spcAft>
+                <a:spcPts val="1000"/>
+              </a:spcAft>
+              <a:defRPr sz="2100">
+                <a:latin typeface="Calibri"/>
+              </a:defRPr>
+            </a:pPr>
+            <a:r>
+              <a:t>Резултатите показват работещ baseline, но не и модел, който винаги описва точно произволни изображения.</a:t>
+            </a:r>
+          </a:p>
+        </p:txBody>
+      </p:sp>
+      <p:sp>
+        <p:nvSpPr>
+          <p:cNvPr id="5" name="TextBox 4"/>
+          <p:cNvSpPr txBox="1"/>
+          <p:nvPr/>
+        </p:nvSpPr>
+        <p:spPr>
+          <a:xfrm>
+            <a:off x="548640" y="6473952"/>
+            <a:ext cx="5486400" cy="228600"/>
+          </a:xfrm>
+          <a:prstGeom prst="rect">
+            <a:avLst/>
+          </a:prstGeom>
+          <a:noFill/>
+        </p:spPr>
+        <p:txBody>
+          <a:bodyPr wrap="none">
+            <a:spAutoFit/>
+          </a:bodyPr>
+          <a:lstStyle/>
+          <a:p>
+            <a:pPr algn="l"/>
+            <a:r>
+              <a:rPr sz="800" b="0" i="1">
+                <a:latin typeface="Calibri"/>
+              </a:rPr>
+              <a:t>Генериране на описание за изображение</a:t>
+            </a:r>
+          </a:p>
+        </p:txBody>
+      </p:sp>
+      <p:sp>
+        <p:nvSpPr>
+          <p:cNvPr id="6" name="TextBox 5"/>
+          <p:cNvSpPr txBox="1"/>
+          <p:nvPr/>
+        </p:nvSpPr>
+        <p:spPr>
+          <a:xfrm>
+            <a:off x="10972800" y="6473952"/>
+            <a:ext cx="640080" cy="228600"/>
+          </a:xfrm>
+          <a:prstGeom prst="rect">
+            <a:avLst/>
+          </a:prstGeom>
+          <a:noFill/>
+        </p:spPr>
+        <p:txBody>
+          <a:bodyPr wrap="none">
+            <a:spAutoFit/>
+          </a:bodyPr>
+          <a:lstStyle/>
+          <a:p>
+            <a:pPr algn="r"/>
+            <a:r>
+              <a:rPr sz="800" b="0" i="0">
+                <a:latin typeface="Calibri"/>
+              </a:rPr>
+              <a:t>11/15</a:t>
             </a:r>
           </a:p>
         </p:txBody>
@@ -3336,85 +3872,216 @@
       <p:grpSpPr/>
       <p:sp>
         <p:nvSpPr>
-          <p:cNvPr id="2" name="Title 1"/>
-          <p:cNvSpPr>
-            <a:spLocks noGrp="1"/>
-          </p:cNvSpPr>
-          <p:nvPr>
-            <p:ph type="title"/>
-          </p:nvPr>
-        </p:nvSpPr>
-        <p:spPr/>
-        <p:txBody>
-          <a:bodyPr/>
-          <a:lstStyle/>
-          <a:p>
-            <a:r>
-              <a:t>Слайд 12: Ограничения</a:t>
-            </a:r>
-          </a:p>
-        </p:txBody>
-      </p:sp>
-      <p:sp>
-        <p:nvSpPr>
-          <p:cNvPr id="3" name="Content Placeholder 2"/>
-          <p:cNvSpPr>
-            <a:spLocks noGrp="1"/>
-          </p:cNvSpPr>
-          <p:nvPr>
-            <p:ph idx="1"/>
-          </p:nvPr>
-        </p:nvSpPr>
-        <p:spPr/>
-        <p:txBody>
-          <a:bodyPr/>
+          <p:cNvPr id="2" name="TextBox 1"/>
+          <p:cNvSpPr txBox="1"/>
+          <p:nvPr/>
+        </p:nvSpPr>
+        <p:spPr>
+          <a:xfrm>
+            <a:off x="640080" y="411480"/>
+            <a:ext cx="10972800" cy="502920"/>
+          </a:xfrm>
+          <a:prstGeom prst="rect">
+            <a:avLst/>
+          </a:prstGeom>
+          <a:noFill/>
+        </p:spPr>
+        <p:txBody>
+          <a:bodyPr wrap="none">
+            <a:spAutoFit/>
+          </a:bodyPr>
+          <a:lstStyle/>
+          <a:p>
+            <a:pPr algn="l"/>
+            <a:r>
+              <a:rPr sz="2600" b="1" i="0">
+                <a:latin typeface="Calibri"/>
+              </a:rPr>
+              <a:t>Потребителски интерфейс</a:t>
+            </a:r>
+          </a:p>
+        </p:txBody>
+      </p:sp>
+      <p:sp>
+        <p:nvSpPr>
+          <p:cNvPr id="3" name="Rectangle 2"/>
+          <p:cNvSpPr/>
+          <p:nvPr/>
+        </p:nvSpPr>
+        <p:spPr>
+          <a:xfrm>
+            <a:off x="640080" y="1005840"/>
+            <a:ext cx="10881360" cy="9144"/>
+          </a:xfrm>
+          <a:prstGeom prst="rect">
+            <a:avLst/>
+          </a:prstGeom>
+          <a:solidFill>
+            <a:srgbClr val="000000"/>
+          </a:solidFill>
+          <a:ln>
+            <a:solidFill>
+              <a:srgbClr val="000000"/>
+            </a:solidFill>
+          </a:ln>
+        </p:spPr>
+        <p:style>
+          <a:lnRef idx="1">
+            <a:schemeClr val="accent1"/>
+          </a:lnRef>
+          <a:fillRef idx="3">
+            <a:schemeClr val="accent1"/>
+          </a:fillRef>
+          <a:effectRef idx="2">
+            <a:schemeClr val="accent1"/>
+          </a:effectRef>
+          <a:fontRef idx="minor">
+            <a:schemeClr val="lt1"/>
+          </a:fontRef>
+        </p:style>
+        <p:txBody>
+          <a:bodyPr rtlCol="0" anchor="ctr"/>
+          <a:lstStyle/>
+          <a:p>
+            <a:pPr algn="ctr"/>
+          </a:p>
+        </p:txBody>
+      </p:sp>
+      <p:sp>
+        <p:nvSpPr>
+          <p:cNvPr id="4" name="TextBox 3"/>
+          <p:cNvSpPr txBox="1"/>
+          <p:nvPr/>
+        </p:nvSpPr>
+        <p:spPr>
+          <a:xfrm>
+            <a:off x="868680" y="1325880"/>
+            <a:ext cx="10424160" cy="4754880"/>
+          </a:xfrm>
+          <a:prstGeom prst="rect">
+            <a:avLst/>
+          </a:prstGeom>
+          <a:noFill/>
+        </p:spPr>
+        <p:txBody>
+          <a:bodyPr wrap="square">
+            <a:spAutoFit/>
+          </a:bodyPr>
           <a:lstStyle/>
           <a:p>
             <a:pPr>
-              <a:defRPr sz="2400"/>
+              <a:spcAft>
+                <a:spcPts val="1000"/>
+              </a:spcAft>
+              <a:defRPr sz="2100">
+                <a:latin typeface="Calibri"/>
+              </a:defRPr>
             </a:pPr>
             <a:r>
-              <a:t>Flickr8k е малък dataset и не покрива всички ежедневни сцени.</a:t>
+              <a:t>Изградено е Streamlit приложение за качване на изображение и генериране на описание.</a:t>
             </a:r>
           </a:p>
           <a:p>
             <a:pPr>
-              <a:defRPr sz="2400"/>
+              <a:spcAft>
+                <a:spcPts val="1000"/>
+              </a:spcAft>
+              <a:defRPr sz="2100">
+                <a:latin typeface="Calibri"/>
+              </a:defRPr>
             </a:pPr>
             <a:r>
-              <a:t>VGG16 + LSTM е baseline модел без attention.</a:t>
+              <a:t>Интерфейсът показва входното изображение, генерирания текст и информация за използвания режим.</a:t>
             </a:r>
           </a:p>
           <a:p>
             <a:pPr>
-              <a:defRPr sz="2400"/>
+              <a:spcAft>
+                <a:spcPts val="1000"/>
+              </a:spcAft>
+              <a:defRPr sz="2100">
+                <a:latin typeface="Calibri"/>
+              </a:defRPr>
             </a:pPr>
             <a:r>
-              <a:t>При произволни снимки captions могат да бъдат generic или неточни.</a:t>
+              <a:t>Налични са три режима: VGG retrieval, VGG16 + LSTM и BLIP.</a:t>
             </a:r>
           </a:p>
           <a:p>
             <a:pPr>
-              <a:defRPr sz="2400"/>
+              <a:spcAft>
+                <a:spcPts val="1000"/>
+              </a:spcAft>
+              <a:defRPr sz="2100">
+                <a:latin typeface="Calibri"/>
+              </a:defRPr>
             </a:pPr>
             <a:r>
-              <a:t>Beam search подобрява decoding-а, но не решава напълно ограниченията на модела.</a:t>
-            </a:r>
-          </a:p>
-          <a:p>
-            <a:pPr>
-              <a:defRPr sz="2400"/>
-            </a:pPr>
-            <a:r>
-              <a:t>VGG retrieval намалява несвързаните captions чрез визуално подобни train примери.</a:t>
-            </a:r>
-          </a:p>
-          <a:p>
-            <a:pPr>
-              <a:defRPr sz="2400"/>
-            </a:pPr>
-            <a:r>
-              <a:t>Pretrained BLIP режимът служи като сравнение с по-силен модел.</a:t>
+              <a:t>Това позволява да се сравни собствената реализация с по-силен предварително обучен модел.</a:t>
+            </a:r>
+          </a:p>
+        </p:txBody>
+      </p:sp>
+      <p:sp>
+        <p:nvSpPr>
+          <p:cNvPr id="5" name="TextBox 4"/>
+          <p:cNvSpPr txBox="1"/>
+          <p:nvPr/>
+        </p:nvSpPr>
+        <p:spPr>
+          <a:xfrm>
+            <a:off x="548640" y="6473952"/>
+            <a:ext cx="5486400" cy="228600"/>
+          </a:xfrm>
+          <a:prstGeom prst="rect">
+            <a:avLst/>
+          </a:prstGeom>
+          <a:noFill/>
+        </p:spPr>
+        <p:txBody>
+          <a:bodyPr wrap="none">
+            <a:spAutoFit/>
+          </a:bodyPr>
+          <a:lstStyle/>
+          <a:p>
+            <a:pPr algn="l"/>
+            <a:r>
+              <a:rPr sz="800" b="0" i="1">
+                <a:latin typeface="Calibri"/>
+              </a:rPr>
+              <a:t>Генериране на описание за изображение</a:t>
+            </a:r>
+          </a:p>
+        </p:txBody>
+      </p:sp>
+      <p:sp>
+        <p:nvSpPr>
+          <p:cNvPr id="6" name="TextBox 5"/>
+          <p:cNvSpPr txBox="1"/>
+          <p:nvPr/>
+        </p:nvSpPr>
+        <p:spPr>
+          <a:xfrm>
+            <a:off x="10972800" y="6473952"/>
+            <a:ext cx="640080" cy="228600"/>
+          </a:xfrm>
+          <a:prstGeom prst="rect">
+            <a:avLst/>
+          </a:prstGeom>
+          <a:noFill/>
+        </p:spPr>
+        <p:txBody>
+          <a:bodyPr wrap="none">
+            <a:spAutoFit/>
+          </a:bodyPr>
+          <a:lstStyle/>
+          <a:p>
+            <a:pPr algn="r"/>
+            <a:r>
+              <a:rPr sz="800" b="0" i="0">
+                <a:latin typeface="Calibri"/>
+              </a:rPr>
+              <a:t>12/15</a:t>
             </a:r>
           </a:p>
         </p:txBody>
@@ -3439,69 +4106,684 @@
       <p:grpSpPr/>
       <p:sp>
         <p:nvSpPr>
-          <p:cNvPr id="2" name="Title 1"/>
-          <p:cNvSpPr>
-            <a:spLocks noGrp="1"/>
-          </p:cNvSpPr>
-          <p:nvPr>
-            <p:ph type="title"/>
-          </p:nvPr>
-        </p:nvSpPr>
-        <p:spPr/>
-        <p:txBody>
-          <a:bodyPr/>
-          <a:lstStyle/>
-          <a:p>
-            <a:r>
-              <a:t>Слайд 13: Изводи и бъдещи подобрения</a:t>
-            </a:r>
-          </a:p>
-        </p:txBody>
-      </p:sp>
-      <p:sp>
-        <p:nvSpPr>
-          <p:cNvPr id="3" name="Content Placeholder 2"/>
-          <p:cNvSpPr>
-            <a:spLocks noGrp="1"/>
-          </p:cNvSpPr>
-          <p:nvPr>
-            <p:ph idx="1"/>
-          </p:nvPr>
-        </p:nvSpPr>
-        <p:spPr/>
-        <p:txBody>
-          <a:bodyPr/>
+          <p:cNvPr id="2" name="TextBox 1"/>
+          <p:cNvSpPr txBox="1"/>
+          <p:nvPr/>
+        </p:nvSpPr>
+        <p:spPr>
+          <a:xfrm>
+            <a:off x="640080" y="411480"/>
+            <a:ext cx="10972800" cy="502920"/>
+          </a:xfrm>
+          <a:prstGeom prst="rect">
+            <a:avLst/>
+          </a:prstGeom>
+          <a:noFill/>
+        </p:spPr>
+        <p:txBody>
+          <a:bodyPr wrap="none">
+            <a:spAutoFit/>
+          </a:bodyPr>
+          <a:lstStyle/>
+          <a:p>
+            <a:pPr algn="l"/>
+            <a:r>
+              <a:rPr sz="2600" b="1" i="0">
+                <a:latin typeface="Calibri"/>
+              </a:rPr>
+              <a:t>Тестове</a:t>
+            </a:r>
+          </a:p>
+        </p:txBody>
+      </p:sp>
+      <p:sp>
+        <p:nvSpPr>
+          <p:cNvPr id="3" name="Rectangle 2"/>
+          <p:cNvSpPr/>
+          <p:nvPr/>
+        </p:nvSpPr>
+        <p:spPr>
+          <a:xfrm>
+            <a:off x="640080" y="1005840"/>
+            <a:ext cx="10881360" cy="9144"/>
+          </a:xfrm>
+          <a:prstGeom prst="rect">
+            <a:avLst/>
+          </a:prstGeom>
+          <a:solidFill>
+            <a:srgbClr val="000000"/>
+          </a:solidFill>
+          <a:ln>
+            <a:solidFill>
+              <a:srgbClr val="000000"/>
+            </a:solidFill>
+          </a:ln>
+        </p:spPr>
+        <p:style>
+          <a:lnRef idx="1">
+            <a:schemeClr val="accent1"/>
+          </a:lnRef>
+          <a:fillRef idx="3">
+            <a:schemeClr val="accent1"/>
+          </a:fillRef>
+          <a:effectRef idx="2">
+            <a:schemeClr val="accent1"/>
+          </a:effectRef>
+          <a:fontRef idx="minor">
+            <a:schemeClr val="lt1"/>
+          </a:fontRef>
+        </p:style>
+        <p:txBody>
+          <a:bodyPr rtlCol="0" anchor="ctr"/>
+          <a:lstStyle/>
+          <a:p>
+            <a:pPr algn="ctr"/>
+          </a:p>
+        </p:txBody>
+      </p:sp>
+      <p:sp>
+        <p:nvSpPr>
+          <p:cNvPr id="4" name="TextBox 3"/>
+          <p:cNvSpPr txBox="1"/>
+          <p:nvPr/>
+        </p:nvSpPr>
+        <p:spPr>
+          <a:xfrm>
+            <a:off x="868680" y="1325880"/>
+            <a:ext cx="10424160" cy="4754880"/>
+          </a:xfrm>
+          <a:prstGeom prst="rect">
+            <a:avLst/>
+          </a:prstGeom>
+          <a:noFill/>
+        </p:spPr>
+        <p:txBody>
+          <a:bodyPr wrap="square">
+            <a:spAutoFit/>
+          </a:bodyPr>
           <a:lstStyle/>
           <a:p>
             <a:pPr>
-              <a:defRPr sz="2400"/>
+              <a:spcAft>
+                <a:spcPts val="1000"/>
+              </a:spcAft>
+              <a:defRPr sz="2100">
+                <a:latin typeface="Calibri"/>
+              </a:defRPr>
             </a:pPr>
             <a:r>
-              <a:t>VGG16 + LSTM дава работещ baseline.</a:t>
+              <a:t>Написани са тестове за речника, зареждането на данните и split логиката.</a:t>
             </a:r>
           </a:p>
           <a:p>
             <a:pPr>
-              <a:defRPr sz="2400"/>
+              <a:spcAft>
+                <a:spcPts val="1000"/>
+              </a:spcAft>
+              <a:defRPr sz="2100">
+                <a:latin typeface="Calibri"/>
+              </a:defRPr>
             </a:pPr>
             <a:r>
-              <a:t>Attention или transformer модел вероятно би подобрил качеството.</a:t>
+              <a:t>Проверени са модулите за модел, обучение, оценка и inference.</a:t>
             </a:r>
           </a:p>
           <a:p>
             <a:pPr>
-              <a:defRPr sz="2400"/>
+              <a:spcAft>
+                <a:spcPts val="1000"/>
+              </a:spcAft>
+              <a:defRPr sz="2100">
+                <a:latin typeface="Calibri"/>
+              </a:defRPr>
             </a:pPr>
             <a:r>
-              <a:t>Beam search може да подобри inference-а.</a:t>
+              <a:t>Има тестове за retrieval baseline, TF-IDF експериментите и генерирането на презентацията.</a:t>
             </a:r>
           </a:p>
           <a:p>
             <a:pPr>
-              <a:defRPr sz="2400"/>
+              <a:spcAft>
+                <a:spcPts val="1000"/>
+              </a:spcAft>
+              <a:defRPr sz="2100">
+                <a:latin typeface="Calibri"/>
+              </a:defRPr>
             </a:pPr>
             <a:r>
-              <a:t>Могат да се добавят повече architecture и embedding експерименти.</a:t>
+              <a:t>Последната пълна проверка на проекта преминава с 31 успешни теста.</a:t>
+            </a:r>
+          </a:p>
+        </p:txBody>
+      </p:sp>
+      <p:sp>
+        <p:nvSpPr>
+          <p:cNvPr id="5" name="TextBox 4"/>
+          <p:cNvSpPr txBox="1"/>
+          <p:nvPr/>
+        </p:nvSpPr>
+        <p:spPr>
+          <a:xfrm>
+            <a:off x="548640" y="6473952"/>
+            <a:ext cx="5486400" cy="228600"/>
+          </a:xfrm>
+          <a:prstGeom prst="rect">
+            <a:avLst/>
+          </a:prstGeom>
+          <a:noFill/>
+        </p:spPr>
+        <p:txBody>
+          <a:bodyPr wrap="none">
+            <a:spAutoFit/>
+          </a:bodyPr>
+          <a:lstStyle/>
+          <a:p>
+            <a:pPr algn="l"/>
+            <a:r>
+              <a:rPr sz="800" b="0" i="1">
+                <a:latin typeface="Calibri"/>
+              </a:rPr>
+              <a:t>Генериране на описание за изображение</a:t>
+            </a:r>
+          </a:p>
+        </p:txBody>
+      </p:sp>
+      <p:sp>
+        <p:nvSpPr>
+          <p:cNvPr id="6" name="TextBox 5"/>
+          <p:cNvSpPr txBox="1"/>
+          <p:nvPr/>
+        </p:nvSpPr>
+        <p:spPr>
+          <a:xfrm>
+            <a:off x="10972800" y="6473952"/>
+            <a:ext cx="640080" cy="228600"/>
+          </a:xfrm>
+          <a:prstGeom prst="rect">
+            <a:avLst/>
+          </a:prstGeom>
+          <a:noFill/>
+        </p:spPr>
+        <p:txBody>
+          <a:bodyPr wrap="none">
+            <a:spAutoFit/>
+          </a:bodyPr>
+          <a:lstStyle/>
+          <a:p>
+            <a:pPr algn="r"/>
+            <a:r>
+              <a:rPr sz="800" b="0" i="0">
+                <a:latin typeface="Calibri"/>
+              </a:rPr>
+              <a:t>13/15</a:t>
+            </a:r>
+          </a:p>
+        </p:txBody>
+      </p:sp>
+    </p:spTree>
+  </p:cSld>
+  <p:clrMapOvr>
+    <a:masterClrMapping/>
+  </p:clrMapOvr>
+</p:sld>
+</file>
+
+<file path=ppt/slides/slide14.xml><?xml version="1.0" encoding="utf-8"?>
+<p:sld xmlns:a="http://schemas.openxmlformats.org/drawingml/2006/main" xmlns:p="http://schemas.openxmlformats.org/presentationml/2006/main" xmlns:r="http://schemas.openxmlformats.org/officeDocument/2006/relationships">
+  <p:cSld>
+    <p:spTree>
+      <p:nvGrpSpPr>
+        <p:cNvPr id="1" name=""/>
+        <p:cNvGrpSpPr/>
+        <p:nvPr/>
+      </p:nvGrpSpPr>
+      <p:grpSpPr/>
+      <p:sp>
+        <p:nvSpPr>
+          <p:cNvPr id="2" name="TextBox 1"/>
+          <p:cNvSpPr txBox="1"/>
+          <p:nvPr/>
+        </p:nvSpPr>
+        <p:spPr>
+          <a:xfrm>
+            <a:off x="640080" y="411480"/>
+            <a:ext cx="10972800" cy="502920"/>
+          </a:xfrm>
+          <a:prstGeom prst="rect">
+            <a:avLst/>
+          </a:prstGeom>
+          <a:noFill/>
+        </p:spPr>
+        <p:txBody>
+          <a:bodyPr wrap="none">
+            <a:spAutoFit/>
+          </a:bodyPr>
+          <a:lstStyle/>
+          <a:p>
+            <a:pPr algn="l"/>
+            <a:r>
+              <a:rPr sz="2600" b="1" i="0">
+                <a:latin typeface="Calibri"/>
+              </a:rPr>
+              <a:t>Ограничения</a:t>
+            </a:r>
+          </a:p>
+        </p:txBody>
+      </p:sp>
+      <p:sp>
+        <p:nvSpPr>
+          <p:cNvPr id="3" name="Rectangle 2"/>
+          <p:cNvSpPr/>
+          <p:nvPr/>
+        </p:nvSpPr>
+        <p:spPr>
+          <a:xfrm>
+            <a:off x="640080" y="1005840"/>
+            <a:ext cx="10881360" cy="9144"/>
+          </a:xfrm>
+          <a:prstGeom prst="rect">
+            <a:avLst/>
+          </a:prstGeom>
+          <a:solidFill>
+            <a:srgbClr val="000000"/>
+          </a:solidFill>
+          <a:ln>
+            <a:solidFill>
+              <a:srgbClr val="000000"/>
+            </a:solidFill>
+          </a:ln>
+        </p:spPr>
+        <p:style>
+          <a:lnRef idx="1">
+            <a:schemeClr val="accent1"/>
+          </a:lnRef>
+          <a:fillRef idx="3">
+            <a:schemeClr val="accent1"/>
+          </a:fillRef>
+          <a:effectRef idx="2">
+            <a:schemeClr val="accent1"/>
+          </a:effectRef>
+          <a:fontRef idx="minor">
+            <a:schemeClr val="lt1"/>
+          </a:fontRef>
+        </p:style>
+        <p:txBody>
+          <a:bodyPr rtlCol="0" anchor="ctr"/>
+          <a:lstStyle/>
+          <a:p>
+            <a:pPr algn="ctr"/>
+          </a:p>
+        </p:txBody>
+      </p:sp>
+      <p:sp>
+        <p:nvSpPr>
+          <p:cNvPr id="4" name="TextBox 3"/>
+          <p:cNvSpPr txBox="1"/>
+          <p:nvPr/>
+        </p:nvSpPr>
+        <p:spPr>
+          <a:xfrm>
+            <a:off x="868680" y="1325880"/>
+            <a:ext cx="10424160" cy="4754880"/>
+          </a:xfrm>
+          <a:prstGeom prst="rect">
+            <a:avLst/>
+          </a:prstGeom>
+          <a:noFill/>
+        </p:spPr>
+        <p:txBody>
+          <a:bodyPr wrap="square">
+            <a:spAutoFit/>
+          </a:bodyPr>
+          <a:lstStyle/>
+          <a:p>
+            <a:pPr>
+              <a:spcAft>
+                <a:spcPts val="1000"/>
+              </a:spcAft>
+              <a:defRPr sz="2100">
+                <a:latin typeface="Calibri"/>
+              </a:defRPr>
+            </a:pPr>
+            <a:r>
+              <a:t>Flickr8k е сравнително малък набор от данни и не покрива всички ситуации от реалния свят.</a:t>
+            </a:r>
+          </a:p>
+          <a:p>
+            <a:pPr>
+              <a:spcAft>
+                <a:spcPts val="1000"/>
+              </a:spcAft>
+              <a:defRPr sz="2100">
+                <a:latin typeface="Calibri"/>
+              </a:defRPr>
+            </a:pPr>
+            <a:r>
+              <a:t>VGG16 + LSTM без attention често генерира общи или неточни описания.</a:t>
+            </a:r>
+          </a:p>
+          <a:p>
+            <a:pPr>
+              <a:spcAft>
+                <a:spcPts val="1000"/>
+              </a:spcAft>
+              <a:defRPr sz="2100">
+                <a:latin typeface="Calibri"/>
+              </a:defRPr>
+            </a:pPr>
+            <a:r>
+              <a:t>Качеството е по-добро при изображения, подобни на тези в training частта.</a:t>
+            </a:r>
+          </a:p>
+          <a:p>
+            <a:pPr>
+              <a:spcAft>
+                <a:spcPts val="1000"/>
+              </a:spcAft>
+              <a:defRPr sz="2100">
+                <a:latin typeface="Calibri"/>
+              </a:defRPr>
+            </a:pPr>
+            <a:r>
+              <a:t>Retrieval режимът е по-стабилен за демонстрация, но не създава напълно нов текст.</a:t>
+            </a:r>
+          </a:p>
+        </p:txBody>
+      </p:sp>
+      <p:sp>
+        <p:nvSpPr>
+          <p:cNvPr id="5" name="TextBox 4"/>
+          <p:cNvSpPr txBox="1"/>
+          <p:nvPr/>
+        </p:nvSpPr>
+        <p:spPr>
+          <a:xfrm>
+            <a:off x="548640" y="6473952"/>
+            <a:ext cx="5486400" cy="228600"/>
+          </a:xfrm>
+          <a:prstGeom prst="rect">
+            <a:avLst/>
+          </a:prstGeom>
+          <a:noFill/>
+        </p:spPr>
+        <p:txBody>
+          <a:bodyPr wrap="none">
+            <a:spAutoFit/>
+          </a:bodyPr>
+          <a:lstStyle/>
+          <a:p>
+            <a:pPr algn="l"/>
+            <a:r>
+              <a:rPr sz="800" b="0" i="1">
+                <a:latin typeface="Calibri"/>
+              </a:rPr>
+              <a:t>Генериране на описание за изображение</a:t>
+            </a:r>
+          </a:p>
+        </p:txBody>
+      </p:sp>
+      <p:sp>
+        <p:nvSpPr>
+          <p:cNvPr id="6" name="TextBox 5"/>
+          <p:cNvSpPr txBox="1"/>
+          <p:nvPr/>
+        </p:nvSpPr>
+        <p:spPr>
+          <a:xfrm>
+            <a:off x="10972800" y="6473952"/>
+            <a:ext cx="640080" cy="228600"/>
+          </a:xfrm>
+          <a:prstGeom prst="rect">
+            <a:avLst/>
+          </a:prstGeom>
+          <a:noFill/>
+        </p:spPr>
+        <p:txBody>
+          <a:bodyPr wrap="none">
+            <a:spAutoFit/>
+          </a:bodyPr>
+          <a:lstStyle/>
+          <a:p>
+            <a:pPr algn="r"/>
+            <a:r>
+              <a:rPr sz="800" b="0" i="0">
+                <a:latin typeface="Calibri"/>
+              </a:rPr>
+              <a:t>14/15</a:t>
+            </a:r>
+          </a:p>
+        </p:txBody>
+      </p:sp>
+    </p:spTree>
+  </p:cSld>
+  <p:clrMapOvr>
+    <a:masterClrMapping/>
+  </p:clrMapOvr>
+</p:sld>
+</file>
+
+<file path=ppt/slides/slide15.xml><?xml version="1.0" encoding="utf-8"?>
+<p:sld xmlns:a="http://schemas.openxmlformats.org/drawingml/2006/main" xmlns:p="http://schemas.openxmlformats.org/presentationml/2006/main" xmlns:r="http://schemas.openxmlformats.org/officeDocument/2006/relationships">
+  <p:cSld>
+    <p:spTree>
+      <p:nvGrpSpPr>
+        <p:cNvPr id="1" name=""/>
+        <p:cNvGrpSpPr/>
+        <p:nvPr/>
+      </p:nvGrpSpPr>
+      <p:grpSpPr/>
+      <p:sp>
+        <p:nvSpPr>
+          <p:cNvPr id="2" name="TextBox 1"/>
+          <p:cNvSpPr txBox="1"/>
+          <p:nvPr/>
+        </p:nvSpPr>
+        <p:spPr>
+          <a:xfrm>
+            <a:off x="640080" y="411480"/>
+            <a:ext cx="10972800" cy="502920"/>
+          </a:xfrm>
+          <a:prstGeom prst="rect">
+            <a:avLst/>
+          </a:prstGeom>
+          <a:noFill/>
+        </p:spPr>
+        <p:txBody>
+          <a:bodyPr wrap="none">
+            <a:spAutoFit/>
+          </a:bodyPr>
+          <a:lstStyle/>
+          <a:p>
+            <a:pPr algn="l"/>
+            <a:r>
+              <a:rPr sz="2600" b="1" i="0">
+                <a:latin typeface="Calibri"/>
+              </a:rPr>
+              <a:t>Изводи и бъдещо развитие</a:t>
+            </a:r>
+          </a:p>
+        </p:txBody>
+      </p:sp>
+      <p:sp>
+        <p:nvSpPr>
+          <p:cNvPr id="3" name="Rectangle 2"/>
+          <p:cNvSpPr/>
+          <p:nvPr/>
+        </p:nvSpPr>
+        <p:spPr>
+          <a:xfrm>
+            <a:off x="640080" y="1005840"/>
+            <a:ext cx="10881360" cy="9144"/>
+          </a:xfrm>
+          <a:prstGeom prst="rect">
+            <a:avLst/>
+          </a:prstGeom>
+          <a:solidFill>
+            <a:srgbClr val="000000"/>
+          </a:solidFill>
+          <a:ln>
+            <a:solidFill>
+              <a:srgbClr val="000000"/>
+            </a:solidFill>
+          </a:ln>
+        </p:spPr>
+        <p:style>
+          <a:lnRef idx="1">
+            <a:schemeClr val="accent1"/>
+          </a:lnRef>
+          <a:fillRef idx="3">
+            <a:schemeClr val="accent1"/>
+          </a:fillRef>
+          <a:effectRef idx="2">
+            <a:schemeClr val="accent1"/>
+          </a:effectRef>
+          <a:fontRef idx="minor">
+            <a:schemeClr val="lt1"/>
+          </a:fontRef>
+        </p:style>
+        <p:txBody>
+          <a:bodyPr rtlCol="0" anchor="ctr"/>
+          <a:lstStyle/>
+          <a:p>
+            <a:pPr algn="ctr"/>
+          </a:p>
+        </p:txBody>
+      </p:sp>
+      <p:sp>
+        <p:nvSpPr>
+          <p:cNvPr id="4" name="TextBox 3"/>
+          <p:cNvSpPr txBox="1"/>
+          <p:nvPr/>
+        </p:nvSpPr>
+        <p:spPr>
+          <a:xfrm>
+            <a:off x="868680" y="1325880"/>
+            <a:ext cx="10424160" cy="4754880"/>
+          </a:xfrm>
+          <a:prstGeom prst="rect">
+            <a:avLst/>
+          </a:prstGeom>
+          <a:noFill/>
+        </p:spPr>
+        <p:txBody>
+          <a:bodyPr wrap="square">
+            <a:spAutoFit/>
+          </a:bodyPr>
+          <a:lstStyle/>
+          <a:p>
+            <a:pPr>
+              <a:spcAft>
+                <a:spcPts val="1000"/>
+              </a:spcAft>
+              <a:defRPr sz="2100">
+                <a:latin typeface="Calibri"/>
+              </a:defRPr>
+            </a:pPr>
+            <a:r>
+              <a:t>Проектът реализира пълен процес: данни, EDA, preprocessing, модел, оценка, тестове и уеб приложение.</a:t>
+            </a:r>
+          </a:p>
+          <a:p>
+            <a:pPr>
+              <a:spcAft>
+                <a:spcPts val="1000"/>
+              </a:spcAft>
+              <a:defRPr sz="2100">
+                <a:latin typeface="Calibri"/>
+              </a:defRPr>
+            </a:pPr>
+            <a:r>
+              <a:t>Основният модел показва как работи image captioning архитектура от тип CNN + LSTM.</a:t>
+            </a:r>
+          </a:p>
+          <a:p>
+            <a:pPr>
+              <a:spcAft>
+                <a:spcPts val="1000"/>
+              </a:spcAft>
+              <a:defRPr sz="2100">
+                <a:latin typeface="Calibri"/>
+              </a:defRPr>
+            </a:pPr>
+            <a:r>
+              <a:t>За по-високо качество следваща стъпка би била attention или transformer-базиран модел.</a:t>
+            </a:r>
+          </a:p>
+          <a:p>
+            <a:pPr>
+              <a:spcAft>
+                <a:spcPts val="1000"/>
+              </a:spcAft>
+              <a:defRPr sz="2100">
+                <a:latin typeface="Calibri"/>
+              </a:defRPr>
+            </a:pPr>
+            <a:r>
+              <a:t>Могат да се добавят повече данни, по-дълго обучение и по-подробна ръчна оценка на генерираните описания.</a:t>
+            </a:r>
+          </a:p>
+        </p:txBody>
+      </p:sp>
+      <p:sp>
+        <p:nvSpPr>
+          <p:cNvPr id="5" name="TextBox 4"/>
+          <p:cNvSpPr txBox="1"/>
+          <p:nvPr/>
+        </p:nvSpPr>
+        <p:spPr>
+          <a:xfrm>
+            <a:off x="548640" y="6473952"/>
+            <a:ext cx="5486400" cy="228600"/>
+          </a:xfrm>
+          <a:prstGeom prst="rect">
+            <a:avLst/>
+          </a:prstGeom>
+          <a:noFill/>
+        </p:spPr>
+        <p:txBody>
+          <a:bodyPr wrap="none">
+            <a:spAutoFit/>
+          </a:bodyPr>
+          <a:lstStyle/>
+          <a:p>
+            <a:pPr algn="l"/>
+            <a:r>
+              <a:rPr sz="800" b="0" i="1">
+                <a:latin typeface="Calibri"/>
+              </a:rPr>
+              <a:t>Генериране на описание за изображение</a:t>
+            </a:r>
+          </a:p>
+        </p:txBody>
+      </p:sp>
+      <p:sp>
+        <p:nvSpPr>
+          <p:cNvPr id="6" name="TextBox 5"/>
+          <p:cNvSpPr txBox="1"/>
+          <p:nvPr/>
+        </p:nvSpPr>
+        <p:spPr>
+          <a:xfrm>
+            <a:off x="10972800" y="6473952"/>
+            <a:ext cx="640080" cy="228600"/>
+          </a:xfrm>
+          <a:prstGeom prst="rect">
+            <a:avLst/>
+          </a:prstGeom>
+          <a:noFill/>
+        </p:spPr>
+        <p:txBody>
+          <a:bodyPr wrap="none">
+            <a:spAutoFit/>
+          </a:bodyPr>
+          <a:lstStyle/>
+          <a:p>
+            <a:pPr algn="r"/>
+            <a:r>
+              <a:rPr sz="800" b="0" i="0">
+                <a:latin typeface="Calibri"/>
+              </a:rPr>
+              <a:t>15/15</a:t>
             </a:r>
           </a:p>
         </p:txBody>
@@ -3526,61 +4808,229 @@
       <p:grpSpPr/>
       <p:sp>
         <p:nvSpPr>
-          <p:cNvPr id="2" name="Title 1"/>
-          <p:cNvSpPr>
-            <a:spLocks noGrp="1"/>
-          </p:cNvSpPr>
-          <p:nvPr>
-            <p:ph type="title"/>
-          </p:nvPr>
-        </p:nvSpPr>
-        <p:spPr/>
-        <p:txBody>
-          <a:bodyPr/>
-          <a:lstStyle/>
-          <a:p>
-            <a:r>
-              <a:t>Слайд 2: Какво представлява задачата</a:t>
-            </a:r>
-          </a:p>
-        </p:txBody>
-      </p:sp>
-      <p:sp>
-        <p:nvSpPr>
-          <p:cNvPr id="3" name="Content Placeholder 2"/>
-          <p:cNvSpPr>
-            <a:spLocks noGrp="1"/>
-          </p:cNvSpPr>
-          <p:nvPr>
-            <p:ph idx="1"/>
-          </p:nvPr>
-        </p:nvSpPr>
-        <p:spPr/>
-        <p:txBody>
-          <a:bodyPr/>
+          <p:cNvPr id="2" name="TextBox 1"/>
+          <p:cNvSpPr txBox="1"/>
+          <p:nvPr/>
+        </p:nvSpPr>
+        <p:spPr>
+          <a:xfrm>
+            <a:off x="640080" y="411480"/>
+            <a:ext cx="10972800" cy="502920"/>
+          </a:xfrm>
+          <a:prstGeom prst="rect">
+            <a:avLst/>
+          </a:prstGeom>
+          <a:noFill/>
+        </p:spPr>
+        <p:txBody>
+          <a:bodyPr wrap="none">
+            <a:spAutoFit/>
+          </a:bodyPr>
+          <a:lstStyle/>
+          <a:p>
+            <a:pPr algn="l"/>
+            <a:r>
+              <a:rPr sz="2600" b="1" i="0">
+                <a:latin typeface="Calibri"/>
+              </a:rPr>
+              <a:t>Съдържание</a:t>
+            </a:r>
+          </a:p>
+        </p:txBody>
+      </p:sp>
+      <p:sp>
+        <p:nvSpPr>
+          <p:cNvPr id="3" name="Rectangle 2"/>
+          <p:cNvSpPr/>
+          <p:nvPr/>
+        </p:nvSpPr>
+        <p:spPr>
+          <a:xfrm>
+            <a:off x="640080" y="1005840"/>
+            <a:ext cx="10881360" cy="9144"/>
+          </a:xfrm>
+          <a:prstGeom prst="rect">
+            <a:avLst/>
+          </a:prstGeom>
+          <a:solidFill>
+            <a:srgbClr val="000000"/>
+          </a:solidFill>
+          <a:ln>
+            <a:solidFill>
+              <a:srgbClr val="000000"/>
+            </a:solidFill>
+          </a:ln>
+        </p:spPr>
+        <p:style>
+          <a:lnRef idx="1">
+            <a:schemeClr val="accent1"/>
+          </a:lnRef>
+          <a:fillRef idx="3">
+            <a:schemeClr val="accent1"/>
+          </a:fillRef>
+          <a:effectRef idx="2">
+            <a:schemeClr val="accent1"/>
+          </a:effectRef>
+          <a:fontRef idx="minor">
+            <a:schemeClr val="lt1"/>
+          </a:fontRef>
+        </p:style>
+        <p:txBody>
+          <a:bodyPr rtlCol="0" anchor="ctr"/>
+          <a:lstStyle/>
+          <a:p>
+            <a:pPr algn="ctr"/>
+          </a:p>
+        </p:txBody>
+      </p:sp>
+      <p:sp>
+        <p:nvSpPr>
+          <p:cNvPr id="4" name="TextBox 3"/>
+          <p:cNvSpPr txBox="1"/>
+          <p:nvPr/>
+        </p:nvSpPr>
+        <p:spPr>
+          <a:xfrm>
+            <a:off x="868680" y="1325880"/>
+            <a:ext cx="10424160" cy="4754880"/>
+          </a:xfrm>
+          <a:prstGeom prst="rect">
+            <a:avLst/>
+          </a:prstGeom>
+          <a:noFill/>
+        </p:spPr>
+        <p:txBody>
+          <a:bodyPr wrap="square">
+            <a:spAutoFit/>
+          </a:bodyPr>
           <a:lstStyle/>
           <a:p>
             <a:pPr>
-              <a:defRPr sz="2400"/>
+              <a:spcAft>
+                <a:spcPts val="1000"/>
+              </a:spcAft>
+              <a:defRPr sz="2100">
+                <a:latin typeface="Calibri"/>
+              </a:defRPr>
             </a:pPr>
             <a:r>
-              <a:t>Image captioning комбинира computer vision и NLP.</a:t>
+              <a:t>Цел на проекта и описание на задачата</a:t>
             </a:r>
           </a:p>
           <a:p>
             <a:pPr>
-              <a:defRPr sz="2400"/>
+              <a:spcAft>
+                <a:spcPts val="1000"/>
+              </a:spcAft>
+              <a:defRPr sz="2100">
+                <a:latin typeface="Calibri"/>
+              </a:defRPr>
             </a:pPr>
             <a:r>
-              <a:t>Моделът трябва да разпознае визуалното съдържание и да го превърне в текст.</a:t>
+              <a:t>Използван набор от данни</a:t>
             </a:r>
           </a:p>
           <a:p>
             <a:pPr>
-              <a:defRPr sz="2400"/>
+              <a:spcAft>
+                <a:spcPts val="1000"/>
+              </a:spcAft>
+              <a:defRPr sz="2100">
+                <a:latin typeface="Calibri"/>
+              </a:defRPr>
             </a:pPr>
             <a:r>
-              <a:t>Изходът е последователност от думи, не единичен class label.</a:t>
+              <a:t>Разглеждане и предварителна обработка на данните</a:t>
+            </a:r>
+          </a:p>
+          <a:p>
+            <a:pPr>
+              <a:spcAft>
+                <a:spcPts val="1000"/>
+              </a:spcAft>
+              <a:defRPr sz="2100">
+                <a:latin typeface="Calibri"/>
+              </a:defRPr>
+            </a:pPr>
+            <a:r>
+              <a:t>Модел, обучение и експерименти</a:t>
+            </a:r>
+          </a:p>
+          <a:p>
+            <a:pPr>
+              <a:spcAft>
+                <a:spcPts val="1000"/>
+              </a:spcAft>
+              <a:defRPr sz="2100">
+                <a:latin typeface="Calibri"/>
+              </a:defRPr>
+            </a:pPr>
+            <a:r>
+              <a:t>Потребителски интерфейс, резултати и изводи</a:t>
+            </a:r>
+          </a:p>
+        </p:txBody>
+      </p:sp>
+      <p:sp>
+        <p:nvSpPr>
+          <p:cNvPr id="5" name="TextBox 4"/>
+          <p:cNvSpPr txBox="1"/>
+          <p:nvPr/>
+        </p:nvSpPr>
+        <p:spPr>
+          <a:xfrm>
+            <a:off x="548640" y="6473952"/>
+            <a:ext cx="5486400" cy="228600"/>
+          </a:xfrm>
+          <a:prstGeom prst="rect">
+            <a:avLst/>
+          </a:prstGeom>
+          <a:noFill/>
+        </p:spPr>
+        <p:txBody>
+          <a:bodyPr wrap="none">
+            <a:spAutoFit/>
+          </a:bodyPr>
+          <a:lstStyle/>
+          <a:p>
+            <a:pPr algn="l"/>
+            <a:r>
+              <a:rPr sz="800" b="0" i="1">
+                <a:latin typeface="Calibri"/>
+              </a:rPr>
+              <a:t>Генериране на описание за изображение</a:t>
+            </a:r>
+          </a:p>
+        </p:txBody>
+      </p:sp>
+      <p:sp>
+        <p:nvSpPr>
+          <p:cNvPr id="6" name="TextBox 5"/>
+          <p:cNvSpPr txBox="1"/>
+          <p:nvPr/>
+        </p:nvSpPr>
+        <p:spPr>
+          <a:xfrm>
+            <a:off x="10972800" y="6473952"/>
+            <a:ext cx="640080" cy="228600"/>
+          </a:xfrm>
+          <a:prstGeom prst="rect">
+            <a:avLst/>
+          </a:prstGeom>
+          <a:noFill/>
+        </p:spPr>
+        <p:txBody>
+          <a:bodyPr wrap="none">
+            <a:spAutoFit/>
+          </a:bodyPr>
+          <a:lstStyle/>
+          <a:p>
+            <a:pPr algn="r"/>
+            <a:r>
+              <a:rPr sz="800" b="0" i="0">
+                <a:latin typeface="Calibri"/>
+              </a:rPr>
+              <a:t>2/15</a:t>
             </a:r>
           </a:p>
         </p:txBody>
@@ -3605,69 +5055,216 @@
       <p:grpSpPr/>
       <p:sp>
         <p:nvSpPr>
-          <p:cNvPr id="2" name="Title 1"/>
-          <p:cNvSpPr>
-            <a:spLocks noGrp="1"/>
-          </p:cNvSpPr>
-          <p:nvPr>
-            <p:ph type="title"/>
-          </p:nvPr>
-        </p:nvSpPr>
-        <p:spPr/>
-        <p:txBody>
-          <a:bodyPr/>
-          <a:lstStyle/>
-          <a:p>
-            <a:r>
-              <a:t>Слайд 3: Разгледани техники</a:t>
-            </a:r>
-          </a:p>
-        </p:txBody>
-      </p:sp>
-      <p:sp>
-        <p:nvSpPr>
-          <p:cNvPr id="3" name="Content Placeholder 2"/>
-          <p:cNvSpPr>
-            <a:spLocks noGrp="1"/>
-          </p:cNvSpPr>
-          <p:nvPr>
-            <p:ph idx="1"/>
-          </p:nvPr>
-        </p:nvSpPr>
-        <p:spPr/>
-        <p:txBody>
-          <a:bodyPr/>
+          <p:cNvPr id="2" name="TextBox 1"/>
+          <p:cNvSpPr txBox="1"/>
+          <p:nvPr/>
+        </p:nvSpPr>
+        <p:spPr>
+          <a:xfrm>
+            <a:off x="640080" y="411480"/>
+            <a:ext cx="10972800" cy="502920"/>
+          </a:xfrm>
+          <a:prstGeom prst="rect">
+            <a:avLst/>
+          </a:prstGeom>
+          <a:noFill/>
+        </p:spPr>
+        <p:txBody>
+          <a:bodyPr wrap="none">
+            <a:spAutoFit/>
+          </a:bodyPr>
+          <a:lstStyle/>
+          <a:p>
+            <a:pPr algn="l"/>
+            <a:r>
+              <a:rPr sz="2600" b="1" i="0">
+                <a:latin typeface="Calibri"/>
+              </a:rPr>
+              <a:t>Цел на проекта</a:t>
+            </a:r>
+          </a:p>
+        </p:txBody>
+      </p:sp>
+      <p:sp>
+        <p:nvSpPr>
+          <p:cNvPr id="3" name="Rectangle 2"/>
+          <p:cNvSpPr/>
+          <p:nvPr/>
+        </p:nvSpPr>
+        <p:spPr>
+          <a:xfrm>
+            <a:off x="640080" y="1005840"/>
+            <a:ext cx="10881360" cy="9144"/>
+          </a:xfrm>
+          <a:prstGeom prst="rect">
+            <a:avLst/>
+          </a:prstGeom>
+          <a:solidFill>
+            <a:srgbClr val="000000"/>
+          </a:solidFill>
+          <a:ln>
+            <a:solidFill>
+              <a:srgbClr val="000000"/>
+            </a:solidFill>
+          </a:ln>
+        </p:spPr>
+        <p:style>
+          <a:lnRef idx="1">
+            <a:schemeClr val="accent1"/>
+          </a:lnRef>
+          <a:fillRef idx="3">
+            <a:schemeClr val="accent1"/>
+          </a:fillRef>
+          <a:effectRef idx="2">
+            <a:schemeClr val="accent1"/>
+          </a:effectRef>
+          <a:fontRef idx="minor">
+            <a:schemeClr val="lt1"/>
+          </a:fontRef>
+        </p:style>
+        <p:txBody>
+          <a:bodyPr rtlCol="0" anchor="ctr"/>
+          <a:lstStyle/>
+          <a:p>
+            <a:pPr algn="ctr"/>
+          </a:p>
+        </p:txBody>
+      </p:sp>
+      <p:sp>
+        <p:nvSpPr>
+          <p:cNvPr id="4" name="TextBox 3"/>
+          <p:cNvSpPr txBox="1"/>
+          <p:nvPr/>
+        </p:nvSpPr>
+        <p:spPr>
+          <a:xfrm>
+            <a:off x="868680" y="1325880"/>
+            <a:ext cx="10424160" cy="4754880"/>
+          </a:xfrm>
+          <a:prstGeom prst="rect">
+            <a:avLst/>
+          </a:prstGeom>
+          <a:noFill/>
+        </p:spPr>
+        <p:txBody>
+          <a:bodyPr wrap="square">
+            <a:spAutoFit/>
+          </a:bodyPr>
           <a:lstStyle/>
           <a:p>
             <a:pPr>
-              <a:defRPr sz="2400"/>
+              <a:spcAft>
+                <a:spcPts val="1000"/>
+              </a:spcAft>
+              <a:defRPr sz="2100">
+                <a:latin typeface="Calibri"/>
+              </a:defRPr>
             </a:pPr>
             <a:r>
-              <a:t>CNN + RNN/LSTM encoder-decoder.</a:t>
+              <a:t>Да се разработи уеб приложение, което приема изображение и генерира кратко текстово описание.</a:t>
             </a:r>
           </a:p>
           <a:p>
             <a:pPr>
-              <a:defRPr sz="2400"/>
+              <a:spcAft>
+                <a:spcPts val="1000"/>
+              </a:spcAft>
+              <a:defRPr sz="2100">
+                <a:latin typeface="Calibri"/>
+              </a:defRPr>
             </a:pPr>
             <a:r>
-              <a:t>Attention-based image captioning.</a:t>
+              <a:t>Проектът комбинира обработка на изображения и обработка на естествен език.</a:t>
             </a:r>
           </a:p>
           <a:p>
             <a:pPr>
-              <a:defRPr sz="2400"/>
+              <a:spcAft>
+                <a:spcPts val="1000"/>
+              </a:spcAft>
+              <a:defRPr sz="2100">
+                <a:latin typeface="Calibri"/>
+              </a:defRPr>
             </a:pPr>
             <a:r>
-              <a:t>Transformer-based vision-language модели.</a:t>
+              <a:t>Основният модел е реализиран като encoder-decoder архитектура с VGG16 и LSTM.</a:t>
             </a:r>
           </a:p>
           <a:p>
             <a:pPr>
-              <a:defRPr sz="2400"/>
+              <a:spcAft>
+                <a:spcPts val="1000"/>
+              </a:spcAft>
+              <a:defRPr sz="2100">
+                <a:latin typeface="Calibri"/>
+              </a:defRPr>
             </a:pPr>
             <a:r>
-              <a:t>BLEU и ROUGE-L за автоматична оценка.</a:t>
+              <a:t>Като допълнение са направени сравнения с retrieval подход и предварително обучен модел.</a:t>
+            </a:r>
+          </a:p>
+        </p:txBody>
+      </p:sp>
+      <p:sp>
+        <p:nvSpPr>
+          <p:cNvPr id="5" name="TextBox 4"/>
+          <p:cNvSpPr txBox="1"/>
+          <p:nvPr/>
+        </p:nvSpPr>
+        <p:spPr>
+          <a:xfrm>
+            <a:off x="548640" y="6473952"/>
+            <a:ext cx="5486400" cy="228600"/>
+          </a:xfrm>
+          <a:prstGeom prst="rect">
+            <a:avLst/>
+          </a:prstGeom>
+          <a:noFill/>
+        </p:spPr>
+        <p:txBody>
+          <a:bodyPr wrap="none">
+            <a:spAutoFit/>
+          </a:bodyPr>
+          <a:lstStyle/>
+          <a:p>
+            <a:pPr algn="l"/>
+            <a:r>
+              <a:rPr sz="800" b="0" i="1">
+                <a:latin typeface="Calibri"/>
+              </a:rPr>
+              <a:t>Генериране на описание за изображение</a:t>
+            </a:r>
+          </a:p>
+        </p:txBody>
+      </p:sp>
+      <p:sp>
+        <p:nvSpPr>
+          <p:cNvPr id="6" name="TextBox 5"/>
+          <p:cNvSpPr txBox="1"/>
+          <p:nvPr/>
+        </p:nvSpPr>
+        <p:spPr>
+          <a:xfrm>
+            <a:off x="10972800" y="6473952"/>
+            <a:ext cx="640080" cy="228600"/>
+          </a:xfrm>
+          <a:prstGeom prst="rect">
+            <a:avLst/>
+          </a:prstGeom>
+          <a:noFill/>
+        </p:spPr>
+        <p:txBody>
+          <a:bodyPr wrap="none">
+            <a:spAutoFit/>
+          </a:bodyPr>
+          <a:lstStyle/>
+          <a:p>
+            <a:pPr algn="r"/>
+            <a:r>
+              <a:rPr sz="800" b="0" i="0">
+                <a:latin typeface="Calibri"/>
+              </a:rPr>
+              <a:t>3/15</a:t>
             </a:r>
           </a:p>
         </p:txBody>
@@ -3692,77 +5289,216 @@
       <p:grpSpPr/>
       <p:sp>
         <p:nvSpPr>
-          <p:cNvPr id="2" name="Title 1"/>
-          <p:cNvSpPr>
-            <a:spLocks noGrp="1"/>
-          </p:cNvSpPr>
-          <p:nvPr>
-            <p:ph type="title"/>
-          </p:nvPr>
-        </p:nvSpPr>
-        <p:spPr/>
-        <p:txBody>
-          <a:bodyPr/>
-          <a:lstStyle/>
-          <a:p>
-            <a:r>
-              <a:t>Слайд 4: Данни</a:t>
-            </a:r>
-          </a:p>
-        </p:txBody>
-      </p:sp>
-      <p:sp>
-        <p:nvSpPr>
-          <p:cNvPr id="3" name="Content Placeholder 2"/>
-          <p:cNvSpPr>
-            <a:spLocks noGrp="1"/>
-          </p:cNvSpPr>
-          <p:nvPr>
-            <p:ph idx="1"/>
-          </p:nvPr>
-        </p:nvSpPr>
-        <p:spPr/>
-        <p:txBody>
-          <a:bodyPr/>
+          <p:cNvPr id="2" name="TextBox 1"/>
+          <p:cNvSpPr txBox="1"/>
+          <p:nvPr/>
+        </p:nvSpPr>
+        <p:spPr>
+          <a:xfrm>
+            <a:off x="640080" y="411480"/>
+            <a:ext cx="10972800" cy="502920"/>
+          </a:xfrm>
+          <a:prstGeom prst="rect">
+            <a:avLst/>
+          </a:prstGeom>
+          <a:noFill/>
+        </p:spPr>
+        <p:txBody>
+          <a:bodyPr wrap="none">
+            <a:spAutoFit/>
+          </a:bodyPr>
+          <a:lstStyle/>
+          <a:p>
+            <a:pPr algn="l"/>
+            <a:r>
+              <a:rPr sz="2600" b="1" i="0">
+                <a:latin typeface="Calibri"/>
+              </a:rPr>
+              <a:t>Разучени подходи</a:t>
+            </a:r>
+          </a:p>
+        </p:txBody>
+      </p:sp>
+      <p:sp>
+        <p:nvSpPr>
+          <p:cNvPr id="3" name="Rectangle 2"/>
+          <p:cNvSpPr/>
+          <p:nvPr/>
+        </p:nvSpPr>
+        <p:spPr>
+          <a:xfrm>
+            <a:off x="640080" y="1005840"/>
+            <a:ext cx="10881360" cy="9144"/>
+          </a:xfrm>
+          <a:prstGeom prst="rect">
+            <a:avLst/>
+          </a:prstGeom>
+          <a:solidFill>
+            <a:srgbClr val="000000"/>
+          </a:solidFill>
+          <a:ln>
+            <a:solidFill>
+              <a:srgbClr val="000000"/>
+            </a:solidFill>
+          </a:ln>
+        </p:spPr>
+        <p:style>
+          <a:lnRef idx="1">
+            <a:schemeClr val="accent1"/>
+          </a:lnRef>
+          <a:fillRef idx="3">
+            <a:schemeClr val="accent1"/>
+          </a:fillRef>
+          <a:effectRef idx="2">
+            <a:schemeClr val="accent1"/>
+          </a:effectRef>
+          <a:fontRef idx="minor">
+            <a:schemeClr val="lt1"/>
+          </a:fontRef>
+        </p:style>
+        <p:txBody>
+          <a:bodyPr rtlCol="0" anchor="ctr"/>
+          <a:lstStyle/>
+          <a:p>
+            <a:pPr algn="ctr"/>
+          </a:p>
+        </p:txBody>
+      </p:sp>
+      <p:sp>
+        <p:nvSpPr>
+          <p:cNvPr id="4" name="TextBox 3"/>
+          <p:cNvSpPr txBox="1"/>
+          <p:nvPr/>
+        </p:nvSpPr>
+        <p:spPr>
+          <a:xfrm>
+            <a:off x="868680" y="1325880"/>
+            <a:ext cx="10424160" cy="4754880"/>
+          </a:xfrm>
+          <a:prstGeom prst="rect">
+            <a:avLst/>
+          </a:prstGeom>
+          <a:noFill/>
+        </p:spPr>
+        <p:txBody>
+          <a:bodyPr wrap="square">
+            <a:spAutoFit/>
+          </a:bodyPr>
           <a:lstStyle/>
           <a:p>
             <a:pPr>
-              <a:defRPr sz="2400"/>
+              <a:spcAft>
+                <a:spcPts val="1000"/>
+              </a:spcAft>
+              <a:defRPr sz="2100">
+                <a:latin typeface="Calibri"/>
+              </a:defRPr>
             </a:pPr>
             <a:r>
-              <a:t>Dataset: Flickr8k.</a:t>
+              <a:t>Класически подход: CNN извлича визуални характеристики, а RNN/LSTM генерира изречение дума по дума.</a:t>
             </a:r>
           </a:p>
           <a:p>
             <a:pPr>
-              <a:defRPr sz="2400"/>
+              <a:spcAft>
+                <a:spcPts val="1000"/>
+              </a:spcAft>
+              <a:defRPr sz="2100">
+                <a:latin typeface="Calibri"/>
+              </a:defRPr>
             </a:pPr>
             <a:r>
-              <a:t>8091 изображения.</a:t>
+              <a:t>Attention механизмите подобряват връзката между отделни части от изображението и отделни думи.</a:t>
             </a:r>
           </a:p>
           <a:p>
             <a:pPr>
-              <a:defRPr sz="2400"/>
+              <a:spcAft>
+                <a:spcPts val="1000"/>
+              </a:spcAft>
+              <a:defRPr sz="2100">
+                <a:latin typeface="Calibri"/>
+              </a:defRPr>
             </a:pPr>
             <a:r>
-              <a:t>40455 captions.</a:t>
+              <a:t>Transformer-базираните vision-language модели обикновено дават по-добри резултати, но са по-тежки.</a:t>
             </a:r>
           </a:p>
           <a:p>
             <a:pPr>
-              <a:defRPr sz="2400"/>
+              <a:spcAft>
+                <a:spcPts val="1000"/>
+              </a:spcAft>
+              <a:defRPr sz="2100">
+                <a:latin typeface="Calibri"/>
+              </a:defRPr>
             </a:pPr>
             <a:r>
-              <a:t>Средно около 5 captions на изображение.</a:t>
-            </a:r>
-          </a:p>
-          <a:p>
-            <a:pPr>
-              <a:defRPr sz="2400"/>
-            </a:pPr>
-            <a:r>
-              <a:t>Проверени са липсващи изображения, празни captions и дубликати.</a:t>
+              <a:t>За оценка се използват автоматични метрики като BLEU и ROUGE-L, както и качествен преглед на примери.</a:t>
+            </a:r>
+          </a:p>
+        </p:txBody>
+      </p:sp>
+      <p:sp>
+        <p:nvSpPr>
+          <p:cNvPr id="5" name="TextBox 4"/>
+          <p:cNvSpPr txBox="1"/>
+          <p:nvPr/>
+        </p:nvSpPr>
+        <p:spPr>
+          <a:xfrm>
+            <a:off x="548640" y="6473952"/>
+            <a:ext cx="5486400" cy="228600"/>
+          </a:xfrm>
+          <a:prstGeom prst="rect">
+            <a:avLst/>
+          </a:prstGeom>
+          <a:noFill/>
+        </p:spPr>
+        <p:txBody>
+          <a:bodyPr wrap="none">
+            <a:spAutoFit/>
+          </a:bodyPr>
+          <a:lstStyle/>
+          <a:p>
+            <a:pPr algn="l"/>
+            <a:r>
+              <a:rPr sz="800" b="0" i="1">
+                <a:latin typeface="Calibri"/>
+              </a:rPr>
+              <a:t>Генериране на описание за изображение</a:t>
+            </a:r>
+          </a:p>
+        </p:txBody>
+      </p:sp>
+      <p:sp>
+        <p:nvSpPr>
+          <p:cNvPr id="6" name="TextBox 5"/>
+          <p:cNvSpPr txBox="1"/>
+          <p:nvPr/>
+        </p:nvSpPr>
+        <p:spPr>
+          <a:xfrm>
+            <a:off x="10972800" y="6473952"/>
+            <a:ext cx="640080" cy="228600"/>
+          </a:xfrm>
+          <a:prstGeom prst="rect">
+            <a:avLst/>
+          </a:prstGeom>
+          <a:noFill/>
+        </p:spPr>
+        <p:txBody>
+          <a:bodyPr wrap="none">
+            <a:spAutoFit/>
+          </a:bodyPr>
+          <a:lstStyle/>
+          <a:p>
+            <a:pPr algn="r"/>
+            <a:r>
+              <a:rPr sz="800" b="0" i="0">
+                <a:latin typeface="Calibri"/>
+              </a:rPr>
+              <a:t>4/15</a:t>
             </a:r>
           </a:p>
         </p:txBody>
@@ -3787,69 +5523,216 @@
       <p:grpSpPr/>
       <p:sp>
         <p:nvSpPr>
-          <p:cNvPr id="2" name="Title 1"/>
-          <p:cNvSpPr>
-            <a:spLocks noGrp="1"/>
-          </p:cNvSpPr>
-          <p:nvPr>
-            <p:ph type="title"/>
-          </p:nvPr>
-        </p:nvSpPr>
-        <p:spPr/>
-        <p:txBody>
-          <a:bodyPr/>
-          <a:lstStyle/>
-          <a:p>
-            <a:r>
-              <a:t>Слайд 5: EDA</a:t>
-            </a:r>
-          </a:p>
-        </p:txBody>
-      </p:sp>
-      <p:sp>
-        <p:nvSpPr>
-          <p:cNvPr id="3" name="Content Placeholder 2"/>
-          <p:cNvSpPr>
-            <a:spLocks noGrp="1"/>
-          </p:cNvSpPr>
-          <p:nvPr>
-            <p:ph idx="1"/>
-          </p:nvPr>
-        </p:nvSpPr>
-        <p:spPr/>
-        <p:txBody>
-          <a:bodyPr/>
+          <p:cNvPr id="2" name="TextBox 1"/>
+          <p:cNvSpPr txBox="1"/>
+          <p:nvPr/>
+        </p:nvSpPr>
+        <p:spPr>
+          <a:xfrm>
+            <a:off x="640080" y="411480"/>
+            <a:ext cx="10972800" cy="502920"/>
+          </a:xfrm>
+          <a:prstGeom prst="rect">
+            <a:avLst/>
+          </a:prstGeom>
+          <a:noFill/>
+        </p:spPr>
+        <p:txBody>
+          <a:bodyPr wrap="none">
+            <a:spAutoFit/>
+          </a:bodyPr>
+          <a:lstStyle/>
+          <a:p>
+            <a:pPr algn="l"/>
+            <a:r>
+              <a:rPr sz="2600" b="1" i="0">
+                <a:latin typeface="Calibri"/>
+              </a:rPr>
+              <a:t>Набор от данни</a:t>
+            </a:r>
+          </a:p>
+        </p:txBody>
+      </p:sp>
+      <p:sp>
+        <p:nvSpPr>
+          <p:cNvPr id="3" name="Rectangle 2"/>
+          <p:cNvSpPr/>
+          <p:nvPr/>
+        </p:nvSpPr>
+        <p:spPr>
+          <a:xfrm>
+            <a:off x="640080" y="1005840"/>
+            <a:ext cx="10881360" cy="9144"/>
+          </a:xfrm>
+          <a:prstGeom prst="rect">
+            <a:avLst/>
+          </a:prstGeom>
+          <a:solidFill>
+            <a:srgbClr val="000000"/>
+          </a:solidFill>
+          <a:ln>
+            <a:solidFill>
+              <a:srgbClr val="000000"/>
+            </a:solidFill>
+          </a:ln>
+        </p:spPr>
+        <p:style>
+          <a:lnRef idx="1">
+            <a:schemeClr val="accent1"/>
+          </a:lnRef>
+          <a:fillRef idx="3">
+            <a:schemeClr val="accent1"/>
+          </a:fillRef>
+          <a:effectRef idx="2">
+            <a:schemeClr val="accent1"/>
+          </a:effectRef>
+          <a:fontRef idx="minor">
+            <a:schemeClr val="lt1"/>
+          </a:fontRef>
+        </p:style>
+        <p:txBody>
+          <a:bodyPr rtlCol="0" anchor="ctr"/>
+          <a:lstStyle/>
+          <a:p>
+            <a:pPr algn="ctr"/>
+          </a:p>
+        </p:txBody>
+      </p:sp>
+      <p:sp>
+        <p:nvSpPr>
+          <p:cNvPr id="4" name="TextBox 3"/>
+          <p:cNvSpPr txBox="1"/>
+          <p:nvPr/>
+        </p:nvSpPr>
+        <p:spPr>
+          <a:xfrm>
+            <a:off x="868680" y="1325880"/>
+            <a:ext cx="10424160" cy="4754880"/>
+          </a:xfrm>
+          <a:prstGeom prst="rect">
+            <a:avLst/>
+          </a:prstGeom>
+          <a:noFill/>
+        </p:spPr>
+        <p:txBody>
+          <a:bodyPr wrap="square">
+            <a:spAutoFit/>
+          </a:bodyPr>
           <a:lstStyle/>
           <a:p>
             <a:pPr>
-              <a:defRPr sz="2400"/>
+              <a:spcAft>
+                <a:spcPts val="1000"/>
+              </a:spcAft>
+              <a:defRPr sz="2100">
+                <a:latin typeface="Calibri"/>
+              </a:defRPr>
             </a:pPr>
             <a:r>
-              <a:t>Анализирах дължина на captions.</a:t>
+              <a:t>Използван е Flickr8k.</a:t>
             </a:r>
           </a:p>
           <a:p>
             <a:pPr>
-              <a:defRPr sz="2400"/>
+              <a:spcAft>
+                <a:spcPts val="1000"/>
+              </a:spcAft>
+              <a:defRPr sz="2100">
+                <a:latin typeface="Calibri"/>
+              </a:defRPr>
             </a:pPr>
             <a:r>
-              <a:t>Проверих най-чести думи.</a:t>
+              <a:t>Наборът съдържа 8091 изображения от ежедневни сцени.</a:t>
             </a:r>
           </a:p>
           <a:p>
             <a:pPr>
-              <a:defRPr sz="2400"/>
+              <a:spcAft>
+                <a:spcPts val="1000"/>
+              </a:spcAft>
+              <a:defRPr sz="2100">
+                <a:latin typeface="Calibri"/>
+              </a:defRPr>
             </a:pPr>
             <a:r>
-              <a:t>Проверих размери и aspect ratio на изображенията.</a:t>
+              <a:t>За всяко изображение има приблизително пет човешки описания.</a:t>
             </a:r>
           </a:p>
           <a:p>
             <a:pPr>
-              <a:defRPr sz="2400"/>
+              <a:spcAft>
+                <a:spcPts val="1000"/>
+              </a:spcAft>
+              <a:defRPr sz="2100">
+                <a:latin typeface="Calibri"/>
+              </a:defRPr>
             </a:pPr>
             <a:r>
-              <a:t>Използвах визуализации за текстовите и image статистиките.</a:t>
+              <a:t>Данните са разделени на train, validation и test по уникални изображения, за да няма изтичане между частите.</a:t>
+            </a:r>
+          </a:p>
+        </p:txBody>
+      </p:sp>
+      <p:sp>
+        <p:nvSpPr>
+          <p:cNvPr id="5" name="TextBox 4"/>
+          <p:cNvSpPr txBox="1"/>
+          <p:nvPr/>
+        </p:nvSpPr>
+        <p:spPr>
+          <a:xfrm>
+            <a:off x="548640" y="6473952"/>
+            <a:ext cx="5486400" cy="228600"/>
+          </a:xfrm>
+          <a:prstGeom prst="rect">
+            <a:avLst/>
+          </a:prstGeom>
+          <a:noFill/>
+        </p:spPr>
+        <p:txBody>
+          <a:bodyPr wrap="none">
+            <a:spAutoFit/>
+          </a:bodyPr>
+          <a:lstStyle/>
+          <a:p>
+            <a:pPr algn="l"/>
+            <a:r>
+              <a:rPr sz="800" b="0" i="1">
+                <a:latin typeface="Calibri"/>
+              </a:rPr>
+              <a:t>Генериране на описание за изображение</a:t>
+            </a:r>
+          </a:p>
+        </p:txBody>
+      </p:sp>
+      <p:sp>
+        <p:nvSpPr>
+          <p:cNvPr id="6" name="TextBox 5"/>
+          <p:cNvSpPr txBox="1"/>
+          <p:nvPr/>
+        </p:nvSpPr>
+        <p:spPr>
+          <a:xfrm>
+            <a:off x="10972800" y="6473952"/>
+            <a:ext cx="640080" cy="228600"/>
+          </a:xfrm>
+          <a:prstGeom prst="rect">
+            <a:avLst/>
+          </a:prstGeom>
+          <a:noFill/>
+        </p:spPr>
+        <p:txBody>
+          <a:bodyPr wrap="none">
+            <a:spAutoFit/>
+          </a:bodyPr>
+          <a:lstStyle/>
+          <a:p>
+            <a:pPr algn="r"/>
+            <a:r>
+              <a:rPr sz="800" b="0" i="0">
+                <a:latin typeface="Calibri"/>
+              </a:rPr>
+              <a:t>5/15</a:t>
             </a:r>
           </a:p>
         </p:txBody>
@@ -3874,69 +5757,216 @@
       <p:grpSpPr/>
       <p:sp>
         <p:nvSpPr>
-          <p:cNvPr id="2" name="Title 1"/>
-          <p:cNvSpPr>
-            <a:spLocks noGrp="1"/>
-          </p:cNvSpPr>
-          <p:nvPr>
-            <p:ph type="title"/>
-          </p:nvPr>
-        </p:nvSpPr>
-        <p:spPr/>
-        <p:txBody>
-          <a:bodyPr/>
-          <a:lstStyle/>
-          <a:p>
-            <a:r>
-              <a:t>Слайд 6: Preprocessing</a:t>
-            </a:r>
-          </a:p>
-        </p:txBody>
-      </p:sp>
-      <p:sp>
-        <p:nvSpPr>
-          <p:cNvPr id="3" name="Content Placeholder 2"/>
-          <p:cNvSpPr>
-            <a:spLocks noGrp="1"/>
-          </p:cNvSpPr>
-          <p:nvPr>
-            <p:ph idx="1"/>
-          </p:nvPr>
-        </p:nvSpPr>
-        <p:spPr/>
-        <p:txBody>
-          <a:bodyPr/>
+          <p:cNvPr id="2" name="TextBox 1"/>
+          <p:cNvSpPr txBox="1"/>
+          <p:nvPr/>
+        </p:nvSpPr>
+        <p:spPr>
+          <a:xfrm>
+            <a:off x="640080" y="411480"/>
+            <a:ext cx="10972800" cy="502920"/>
+          </a:xfrm>
+          <a:prstGeom prst="rect">
+            <a:avLst/>
+          </a:prstGeom>
+          <a:noFill/>
+        </p:spPr>
+        <p:txBody>
+          <a:bodyPr wrap="none">
+            <a:spAutoFit/>
+          </a:bodyPr>
+          <a:lstStyle/>
+          <a:p>
+            <a:pPr algn="l"/>
+            <a:r>
+              <a:rPr sz="2600" b="1" i="0">
+                <a:latin typeface="Calibri"/>
+              </a:rPr>
+              <a:t>Разглеждане на данните</a:t>
+            </a:r>
+          </a:p>
+        </p:txBody>
+      </p:sp>
+      <p:sp>
+        <p:nvSpPr>
+          <p:cNvPr id="3" name="Rectangle 2"/>
+          <p:cNvSpPr/>
+          <p:nvPr/>
+        </p:nvSpPr>
+        <p:spPr>
+          <a:xfrm>
+            <a:off x="640080" y="1005840"/>
+            <a:ext cx="10881360" cy="9144"/>
+          </a:xfrm>
+          <a:prstGeom prst="rect">
+            <a:avLst/>
+          </a:prstGeom>
+          <a:solidFill>
+            <a:srgbClr val="000000"/>
+          </a:solidFill>
+          <a:ln>
+            <a:solidFill>
+              <a:srgbClr val="000000"/>
+            </a:solidFill>
+          </a:ln>
+        </p:spPr>
+        <p:style>
+          <a:lnRef idx="1">
+            <a:schemeClr val="accent1"/>
+          </a:lnRef>
+          <a:fillRef idx="3">
+            <a:schemeClr val="accent1"/>
+          </a:fillRef>
+          <a:effectRef idx="2">
+            <a:schemeClr val="accent1"/>
+          </a:effectRef>
+          <a:fontRef idx="minor">
+            <a:schemeClr val="lt1"/>
+          </a:fontRef>
+        </p:style>
+        <p:txBody>
+          <a:bodyPr rtlCol="0" anchor="ctr"/>
+          <a:lstStyle/>
+          <a:p>
+            <a:pPr algn="ctr"/>
+          </a:p>
+        </p:txBody>
+      </p:sp>
+      <p:sp>
+        <p:nvSpPr>
+          <p:cNvPr id="4" name="TextBox 3"/>
+          <p:cNvSpPr txBox="1"/>
+          <p:nvPr/>
+        </p:nvSpPr>
+        <p:spPr>
+          <a:xfrm>
+            <a:off x="868680" y="1325880"/>
+            <a:ext cx="10424160" cy="4754880"/>
+          </a:xfrm>
+          <a:prstGeom prst="rect">
+            <a:avLst/>
+          </a:prstGeom>
+          <a:noFill/>
+        </p:spPr>
+        <p:txBody>
+          <a:bodyPr wrap="square">
+            <a:spAutoFit/>
+          </a:bodyPr>
           <a:lstStyle/>
           <a:p>
             <a:pPr>
-              <a:defRPr sz="2400"/>
+              <a:spcAft>
+                <a:spcPts val="1000"/>
+              </a:spcAft>
+              <a:defRPr sz="2100">
+                <a:latin typeface="Calibri"/>
+              </a:defRPr>
             </a:pPr>
             <a:r>
-              <a:t>Resize до `224x224`.</a:t>
+              <a:t>Проверени са липсващи изображения, празни описания и повторения.</a:t>
             </a:r>
           </a:p>
           <a:p>
             <a:pPr>
-              <a:defRPr sz="2400"/>
+              <a:spcAft>
+                <a:spcPts val="1000"/>
+              </a:spcAft>
+              <a:defRPr sz="2100">
+                <a:latin typeface="Calibri"/>
+              </a:defRPr>
             </a:pPr>
             <a:r>
-              <a:t>ImageNet normalization.</a:t>
+              <a:t>Анализирана е дължината на описанията и най-често срещаните думи.</a:t>
             </a:r>
           </a:p>
           <a:p>
             <a:pPr>
-              <a:defRPr sz="2400"/>
+              <a:spcAft>
+                <a:spcPts val="1000"/>
+              </a:spcAft>
+              <a:defRPr sz="2100">
+                <a:latin typeface="Calibri"/>
+              </a:defRPr>
             </a:pPr>
             <a:r>
-              <a:t>Train augmentation: random horizontal flip и random rotation.</a:t>
+              <a:t>Разгледани са размерите на изображенията и съотношението ширина към височина.</a:t>
             </a:r>
           </a:p>
           <a:p>
             <a:pPr>
-              <a:defRPr sz="2400"/>
+              <a:spcAft>
+                <a:spcPts val="1000"/>
+              </a:spcAft>
+              <a:defRPr sz="2100">
+                <a:latin typeface="Calibri"/>
+              </a:defRPr>
             </a:pPr>
             <a:r>
-              <a:t>Validation/test preprocessing е детерминиран.</a:t>
+              <a:t>Визуализациите са използвани, за да се види дали има очевидни аномалии в данните.</a:t>
+            </a:r>
+          </a:p>
+        </p:txBody>
+      </p:sp>
+      <p:sp>
+        <p:nvSpPr>
+          <p:cNvPr id="5" name="TextBox 4"/>
+          <p:cNvSpPr txBox="1"/>
+          <p:nvPr/>
+        </p:nvSpPr>
+        <p:spPr>
+          <a:xfrm>
+            <a:off x="548640" y="6473952"/>
+            <a:ext cx="5486400" cy="228600"/>
+          </a:xfrm>
+          <a:prstGeom prst="rect">
+            <a:avLst/>
+          </a:prstGeom>
+          <a:noFill/>
+        </p:spPr>
+        <p:txBody>
+          <a:bodyPr wrap="none">
+            <a:spAutoFit/>
+          </a:bodyPr>
+          <a:lstStyle/>
+          <a:p>
+            <a:pPr algn="l"/>
+            <a:r>
+              <a:rPr sz="800" b="0" i="1">
+                <a:latin typeface="Calibri"/>
+              </a:rPr>
+              <a:t>Генериране на описание за изображение</a:t>
+            </a:r>
+          </a:p>
+        </p:txBody>
+      </p:sp>
+      <p:sp>
+        <p:nvSpPr>
+          <p:cNvPr id="6" name="TextBox 5"/>
+          <p:cNvSpPr txBox="1"/>
+          <p:nvPr/>
+        </p:nvSpPr>
+        <p:spPr>
+          <a:xfrm>
+            <a:off x="10972800" y="6473952"/>
+            <a:ext cx="640080" cy="228600"/>
+          </a:xfrm>
+          <a:prstGeom prst="rect">
+            <a:avLst/>
+          </a:prstGeom>
+          <a:noFill/>
+        </p:spPr>
+        <p:txBody>
+          <a:bodyPr wrap="none">
+            <a:spAutoFit/>
+          </a:bodyPr>
+          <a:lstStyle/>
+          <a:p>
+            <a:pPr algn="r"/>
+            <a:r>
+              <a:rPr sz="800" b="0" i="0">
+                <a:latin typeface="Calibri"/>
+              </a:rPr>
+              <a:t>6/15</a:t>
             </a:r>
           </a:p>
         </p:txBody>
@@ -3961,77 +5991,216 @@
       <p:grpSpPr/>
       <p:sp>
         <p:nvSpPr>
-          <p:cNvPr id="2" name="Title 1"/>
-          <p:cNvSpPr>
-            <a:spLocks noGrp="1"/>
-          </p:cNvSpPr>
-          <p:nvPr>
-            <p:ph type="title"/>
-          </p:nvPr>
-        </p:nvSpPr>
-        <p:spPr/>
-        <p:txBody>
-          <a:bodyPr/>
-          <a:lstStyle/>
-          <a:p>
-            <a:r>
-              <a:t>Слайд 7: Модел</a:t>
-            </a:r>
-          </a:p>
-        </p:txBody>
-      </p:sp>
-      <p:sp>
-        <p:nvSpPr>
-          <p:cNvPr id="3" name="Content Placeholder 2"/>
-          <p:cNvSpPr>
-            <a:spLocks noGrp="1"/>
-          </p:cNvSpPr>
-          <p:nvPr>
-            <p:ph idx="1"/>
-          </p:nvPr>
-        </p:nvSpPr>
-        <p:spPr/>
-        <p:txBody>
-          <a:bodyPr/>
+          <p:cNvPr id="2" name="TextBox 1"/>
+          <p:cNvSpPr txBox="1"/>
+          <p:nvPr/>
+        </p:nvSpPr>
+        <p:spPr>
+          <a:xfrm>
+            <a:off x="640080" y="411480"/>
+            <a:ext cx="10972800" cy="502920"/>
+          </a:xfrm>
+          <a:prstGeom prst="rect">
+            <a:avLst/>
+          </a:prstGeom>
+          <a:noFill/>
+        </p:spPr>
+        <p:txBody>
+          <a:bodyPr wrap="none">
+            <a:spAutoFit/>
+          </a:bodyPr>
+          <a:lstStyle/>
+          <a:p>
+            <a:pPr algn="l"/>
+            <a:r>
+              <a:rPr sz="2600" b="1" i="0">
+                <a:latin typeface="Calibri"/>
+              </a:rPr>
+              <a:t>Предварителна обработка</a:t>
+            </a:r>
+          </a:p>
+        </p:txBody>
+      </p:sp>
+      <p:sp>
+        <p:nvSpPr>
+          <p:cNvPr id="3" name="Rectangle 2"/>
+          <p:cNvSpPr/>
+          <p:nvPr/>
+        </p:nvSpPr>
+        <p:spPr>
+          <a:xfrm>
+            <a:off x="640080" y="1005840"/>
+            <a:ext cx="10881360" cy="9144"/>
+          </a:xfrm>
+          <a:prstGeom prst="rect">
+            <a:avLst/>
+          </a:prstGeom>
+          <a:solidFill>
+            <a:srgbClr val="000000"/>
+          </a:solidFill>
+          <a:ln>
+            <a:solidFill>
+              <a:srgbClr val="000000"/>
+            </a:solidFill>
+          </a:ln>
+        </p:spPr>
+        <p:style>
+          <a:lnRef idx="1">
+            <a:schemeClr val="accent1"/>
+          </a:lnRef>
+          <a:fillRef idx="3">
+            <a:schemeClr val="accent1"/>
+          </a:fillRef>
+          <a:effectRef idx="2">
+            <a:schemeClr val="accent1"/>
+          </a:effectRef>
+          <a:fontRef idx="minor">
+            <a:schemeClr val="lt1"/>
+          </a:fontRef>
+        </p:style>
+        <p:txBody>
+          <a:bodyPr rtlCol="0" anchor="ctr"/>
+          <a:lstStyle/>
+          <a:p>
+            <a:pPr algn="ctr"/>
+          </a:p>
+        </p:txBody>
+      </p:sp>
+      <p:sp>
+        <p:nvSpPr>
+          <p:cNvPr id="4" name="TextBox 3"/>
+          <p:cNvSpPr txBox="1"/>
+          <p:nvPr/>
+        </p:nvSpPr>
+        <p:spPr>
+          <a:xfrm>
+            <a:off x="868680" y="1325880"/>
+            <a:ext cx="10424160" cy="4754880"/>
+          </a:xfrm>
+          <a:prstGeom prst="rect">
+            <a:avLst/>
+          </a:prstGeom>
+          <a:noFill/>
+        </p:spPr>
+        <p:txBody>
+          <a:bodyPr wrap="square">
+            <a:spAutoFit/>
+          </a:bodyPr>
           <a:lstStyle/>
           <a:p>
             <a:pPr>
-              <a:defRPr sz="2400"/>
+              <a:spcAft>
+                <a:spcPts val="1000"/>
+              </a:spcAft>
+              <a:defRPr sz="2100">
+                <a:latin typeface="Calibri"/>
+              </a:defRPr>
             </a:pPr>
             <a:r>
-              <a:t>Encoder: предварително обучен VGG16.</a:t>
+              <a:t>Изображенията се преоразмеряват до 224 x 224 пиксела.</a:t>
             </a:r>
           </a:p>
           <a:p>
             <a:pPr>
-              <a:defRPr sz="2400"/>
+              <a:spcAft>
+                <a:spcPts val="1000"/>
+              </a:spcAft>
+              <a:defRPr sz="2100">
+                <a:latin typeface="Calibri"/>
+              </a:defRPr>
             </a:pPr>
             <a:r>
-              <a:t>Decoder: LSTM.</a:t>
+              <a:t>Използва се нормализация със средни стойности и стандартни отклонения от ImageNet.</a:t>
             </a:r>
           </a:p>
           <a:p>
             <a:pPr>
-              <a:defRPr sz="2400"/>
+              <a:spcAft>
+                <a:spcPts val="1000"/>
+              </a:spcAft>
+              <a:defRPr sz="2100">
+                <a:latin typeface="Calibri"/>
+              </a:defRPr>
             </a:pPr>
             <a:r>
-              <a:t>Word representation: обучаем `Embedding` слой.</a:t>
+              <a:t>При обучението се използват леки augmentation операции като обръщане по хоризонтала и ротация.</a:t>
             </a:r>
           </a:p>
           <a:p>
             <a:pPr>
-              <a:defRPr sz="2400"/>
+              <a:spcAft>
+                <a:spcPts val="1000"/>
+              </a:spcAft>
+              <a:defRPr sz="2100">
+                <a:latin typeface="Calibri"/>
+              </a:defRPr>
             </a:pPr>
             <a:r>
-              <a:t>Кеширах VGG features, за да ускоря обучението.</a:t>
-            </a:r>
-          </a:p>
-          <a:p>
-            <a:pPr>
-              <a:defRPr sz="2400"/>
-            </a:pPr>
-            <a:r>
-              <a:t>Използвах и VGG retrieval вариант за по-заземени captions.</a:t>
+              <a:t>При validation и test обработката е детерминирана, за да се сравняват резултатите коректно.</a:t>
+            </a:r>
+          </a:p>
+        </p:txBody>
+      </p:sp>
+      <p:sp>
+        <p:nvSpPr>
+          <p:cNvPr id="5" name="TextBox 4"/>
+          <p:cNvSpPr txBox="1"/>
+          <p:nvPr/>
+        </p:nvSpPr>
+        <p:spPr>
+          <a:xfrm>
+            <a:off x="548640" y="6473952"/>
+            <a:ext cx="5486400" cy="228600"/>
+          </a:xfrm>
+          <a:prstGeom prst="rect">
+            <a:avLst/>
+          </a:prstGeom>
+          <a:noFill/>
+        </p:spPr>
+        <p:txBody>
+          <a:bodyPr wrap="none">
+            <a:spAutoFit/>
+          </a:bodyPr>
+          <a:lstStyle/>
+          <a:p>
+            <a:pPr algn="l"/>
+            <a:r>
+              <a:rPr sz="800" b="0" i="1">
+                <a:latin typeface="Calibri"/>
+              </a:rPr>
+              <a:t>Генериране на описание за изображение</a:t>
+            </a:r>
+          </a:p>
+        </p:txBody>
+      </p:sp>
+      <p:sp>
+        <p:nvSpPr>
+          <p:cNvPr id="6" name="TextBox 5"/>
+          <p:cNvSpPr txBox="1"/>
+          <p:nvPr/>
+        </p:nvSpPr>
+        <p:spPr>
+          <a:xfrm>
+            <a:off x="10972800" y="6473952"/>
+            <a:ext cx="640080" cy="228600"/>
+          </a:xfrm>
+          <a:prstGeom prst="rect">
+            <a:avLst/>
+          </a:prstGeom>
+          <a:noFill/>
+        </p:spPr>
+        <p:txBody>
+          <a:bodyPr wrap="none">
+            <a:spAutoFit/>
+          </a:bodyPr>
+          <a:lstStyle/>
+          <a:p>
+            <a:pPr algn="r"/>
+            <a:r>
+              <a:rPr sz="800" b="0" i="0">
+                <a:latin typeface="Calibri"/>
+              </a:rPr>
+              <a:t>7/15</a:t>
             </a:r>
           </a:p>
         </p:txBody>
@@ -4056,69 +6225,216 @@
       <p:grpSpPr/>
       <p:sp>
         <p:nvSpPr>
-          <p:cNvPr id="2" name="Title 1"/>
-          <p:cNvSpPr>
-            <a:spLocks noGrp="1"/>
-          </p:cNvSpPr>
-          <p:nvPr>
-            <p:ph type="title"/>
-          </p:nvPr>
-        </p:nvSpPr>
-        <p:spPr/>
-        <p:txBody>
-          <a:bodyPr/>
-          <a:lstStyle/>
-          <a:p>
-            <a:r>
-              <a:t>Слайд 8: Обучение и оценка</a:t>
-            </a:r>
-          </a:p>
-        </p:txBody>
-      </p:sp>
-      <p:sp>
-        <p:nvSpPr>
-          <p:cNvPr id="3" name="Content Placeholder 2"/>
-          <p:cNvSpPr>
-            <a:spLocks noGrp="1"/>
-          </p:cNvSpPr>
-          <p:nvPr>
-            <p:ph idx="1"/>
-          </p:nvPr>
-        </p:nvSpPr>
-        <p:spPr/>
-        <p:txBody>
-          <a:bodyPr/>
+          <p:cNvPr id="2" name="TextBox 1"/>
+          <p:cNvSpPr txBox="1"/>
+          <p:nvPr/>
+        </p:nvSpPr>
+        <p:spPr>
+          <a:xfrm>
+            <a:off x="640080" y="411480"/>
+            <a:ext cx="10972800" cy="502920"/>
+          </a:xfrm>
+          <a:prstGeom prst="rect">
+            <a:avLst/>
+          </a:prstGeom>
+          <a:noFill/>
+        </p:spPr>
+        <p:txBody>
+          <a:bodyPr wrap="none">
+            <a:spAutoFit/>
+          </a:bodyPr>
+          <a:lstStyle/>
+          <a:p>
+            <a:pPr algn="l"/>
+            <a:r>
+              <a:rPr sz="2600" b="1" i="0">
+                <a:latin typeface="Calibri"/>
+              </a:rPr>
+              <a:t>Текстова обработка</a:t>
+            </a:r>
+          </a:p>
+        </p:txBody>
+      </p:sp>
+      <p:sp>
+        <p:nvSpPr>
+          <p:cNvPr id="3" name="Rectangle 2"/>
+          <p:cNvSpPr/>
+          <p:nvPr/>
+        </p:nvSpPr>
+        <p:spPr>
+          <a:xfrm>
+            <a:off x="640080" y="1005840"/>
+            <a:ext cx="10881360" cy="9144"/>
+          </a:xfrm>
+          <a:prstGeom prst="rect">
+            <a:avLst/>
+          </a:prstGeom>
+          <a:solidFill>
+            <a:srgbClr val="000000"/>
+          </a:solidFill>
+          <a:ln>
+            <a:solidFill>
+              <a:srgbClr val="000000"/>
+            </a:solidFill>
+          </a:ln>
+        </p:spPr>
+        <p:style>
+          <a:lnRef idx="1">
+            <a:schemeClr val="accent1"/>
+          </a:lnRef>
+          <a:fillRef idx="3">
+            <a:schemeClr val="accent1"/>
+          </a:fillRef>
+          <a:effectRef idx="2">
+            <a:schemeClr val="accent1"/>
+          </a:effectRef>
+          <a:fontRef idx="minor">
+            <a:schemeClr val="lt1"/>
+          </a:fontRef>
+        </p:style>
+        <p:txBody>
+          <a:bodyPr rtlCol="0" anchor="ctr"/>
+          <a:lstStyle/>
+          <a:p>
+            <a:pPr algn="ctr"/>
+          </a:p>
+        </p:txBody>
+      </p:sp>
+      <p:sp>
+        <p:nvSpPr>
+          <p:cNvPr id="4" name="TextBox 3"/>
+          <p:cNvSpPr txBox="1"/>
+          <p:nvPr/>
+        </p:nvSpPr>
+        <p:spPr>
+          <a:xfrm>
+            <a:off x="868680" y="1325880"/>
+            <a:ext cx="10424160" cy="4754880"/>
+          </a:xfrm>
+          <a:prstGeom prst="rect">
+            <a:avLst/>
+          </a:prstGeom>
+          <a:noFill/>
+        </p:spPr>
+        <p:txBody>
+          <a:bodyPr wrap="square">
+            <a:spAutoFit/>
+          </a:bodyPr>
           <a:lstStyle/>
           <a:p>
             <a:pPr>
-              <a:defRPr sz="2400"/>
+              <a:spcAft>
+                <a:spcPts val="1000"/>
+              </a:spcAft>
+              <a:defRPr sz="2100">
+                <a:latin typeface="Calibri"/>
+              </a:defRPr>
             </a:pPr>
             <a:r>
-              <a:t>Split: train / validation / test по уникални изображения.</a:t>
+              <a:t>Описанията се почистват и токенизират.</a:t>
             </a:r>
           </a:p>
           <a:p>
             <a:pPr>
-              <a:defRPr sz="2400"/>
+              <a:spcAft>
+                <a:spcPts val="1000"/>
+              </a:spcAft>
+              <a:defRPr sz="2100">
+                <a:latin typeface="Calibri"/>
+              </a:defRPr>
             </a:pPr>
             <a:r>
-              <a:t>Loss: cross-entropy върху следващата дума.</a:t>
+              <a:t>Изграден е речник от думите, които се срещат достатъчно често в training частта.</a:t>
             </a:r>
           </a:p>
           <a:p>
             <a:pPr>
-              <a:defRPr sz="2400"/>
+              <a:spcAft>
+                <a:spcPts val="1000"/>
+              </a:spcAft>
+              <a:defRPr sz="2100">
+                <a:latin typeface="Calibri"/>
+              </a:defRPr>
             </a:pPr>
             <a:r>
-              <a:t>Метрики: BLEU-1, BLEU-4, ROUGE-L.</a:t>
+              <a:t>Добавени са специални токени за начало, край, padding и непозната дума.</a:t>
             </a:r>
           </a:p>
           <a:p>
             <a:pPr>
-              <a:defRPr sz="2400"/>
+              <a:spcAft>
+                <a:spcPts val="1000"/>
+              </a:spcAft>
+              <a:defRPr sz="2100">
+                <a:latin typeface="Calibri"/>
+              </a:defRPr>
             </a:pPr>
             <a:r>
-              <a:t>Най-добрият checkpoint е избран по validation loss.</a:t>
+              <a:t>Думите в основния модел се представят чрез обучаем Embedding слой.</a:t>
+            </a:r>
+          </a:p>
+        </p:txBody>
+      </p:sp>
+      <p:sp>
+        <p:nvSpPr>
+          <p:cNvPr id="5" name="TextBox 4"/>
+          <p:cNvSpPr txBox="1"/>
+          <p:nvPr/>
+        </p:nvSpPr>
+        <p:spPr>
+          <a:xfrm>
+            <a:off x="548640" y="6473952"/>
+            <a:ext cx="5486400" cy="228600"/>
+          </a:xfrm>
+          <a:prstGeom prst="rect">
+            <a:avLst/>
+          </a:prstGeom>
+          <a:noFill/>
+        </p:spPr>
+        <p:txBody>
+          <a:bodyPr wrap="none">
+            <a:spAutoFit/>
+          </a:bodyPr>
+          <a:lstStyle/>
+          <a:p>
+            <a:pPr algn="l"/>
+            <a:r>
+              <a:rPr sz="800" b="0" i="1">
+                <a:latin typeface="Calibri"/>
+              </a:rPr>
+              <a:t>Генериране на описание за изображение</a:t>
+            </a:r>
+          </a:p>
+        </p:txBody>
+      </p:sp>
+      <p:sp>
+        <p:nvSpPr>
+          <p:cNvPr id="6" name="TextBox 5"/>
+          <p:cNvSpPr txBox="1"/>
+          <p:nvPr/>
+        </p:nvSpPr>
+        <p:spPr>
+          <a:xfrm>
+            <a:off x="10972800" y="6473952"/>
+            <a:ext cx="640080" cy="228600"/>
+          </a:xfrm>
+          <a:prstGeom prst="rect">
+            <a:avLst/>
+          </a:prstGeom>
+          <a:noFill/>
+        </p:spPr>
+        <p:txBody>
+          <a:bodyPr wrap="none">
+            <a:spAutoFit/>
+          </a:bodyPr>
+          <a:lstStyle/>
+          <a:p>
+            <a:pPr algn="r"/>
+            <a:r>
+              <a:rPr sz="800" b="0" i="0">
+                <a:latin typeface="Calibri"/>
+              </a:rPr>
+              <a:t>8/15</a:t>
             </a:r>
           </a:p>
         </p:txBody>
@@ -4143,93 +6459,216 @@
       <p:grpSpPr/>
       <p:sp>
         <p:nvSpPr>
-          <p:cNvPr id="2" name="Title 1"/>
-          <p:cNvSpPr>
-            <a:spLocks noGrp="1"/>
-          </p:cNvSpPr>
-          <p:nvPr>
-            <p:ph type="title"/>
-          </p:nvPr>
-        </p:nvSpPr>
-        <p:spPr/>
-        <p:txBody>
-          <a:bodyPr/>
-          <a:lstStyle/>
-          <a:p>
-            <a:r>
-              <a:t>Слайд 9: Резултати</a:t>
-            </a:r>
-          </a:p>
-        </p:txBody>
-      </p:sp>
-      <p:sp>
-        <p:nvSpPr>
-          <p:cNvPr id="3" name="Content Placeholder 2"/>
-          <p:cNvSpPr>
-            <a:spLocks noGrp="1"/>
-          </p:cNvSpPr>
-          <p:nvPr>
-            <p:ph idx="1"/>
-          </p:nvPr>
-        </p:nvSpPr>
-        <p:spPr/>
-        <p:txBody>
-          <a:bodyPr/>
+          <p:cNvPr id="2" name="TextBox 1"/>
+          <p:cNvSpPr txBox="1"/>
+          <p:nvPr/>
+        </p:nvSpPr>
+        <p:spPr>
+          <a:xfrm>
+            <a:off x="640080" y="411480"/>
+            <a:ext cx="10972800" cy="502920"/>
+          </a:xfrm>
+          <a:prstGeom prst="rect">
+            <a:avLst/>
+          </a:prstGeom>
+          <a:noFill/>
+        </p:spPr>
+        <p:txBody>
+          <a:bodyPr wrap="none">
+            <a:spAutoFit/>
+          </a:bodyPr>
+          <a:lstStyle/>
+          <a:p>
+            <a:pPr algn="l"/>
+            <a:r>
+              <a:rPr sz="2600" b="1" i="0">
+                <a:latin typeface="Calibri"/>
+              </a:rPr>
+              <a:t>Архитектура на модела</a:t>
+            </a:r>
+          </a:p>
+        </p:txBody>
+      </p:sp>
+      <p:sp>
+        <p:nvSpPr>
+          <p:cNvPr id="3" name="Rectangle 2"/>
+          <p:cNvSpPr/>
+          <p:nvPr/>
+        </p:nvSpPr>
+        <p:spPr>
+          <a:xfrm>
+            <a:off x="640080" y="1005840"/>
+            <a:ext cx="10881360" cy="9144"/>
+          </a:xfrm>
+          <a:prstGeom prst="rect">
+            <a:avLst/>
+          </a:prstGeom>
+          <a:solidFill>
+            <a:srgbClr val="000000"/>
+          </a:solidFill>
+          <a:ln>
+            <a:solidFill>
+              <a:srgbClr val="000000"/>
+            </a:solidFill>
+          </a:ln>
+        </p:spPr>
+        <p:style>
+          <a:lnRef idx="1">
+            <a:schemeClr val="accent1"/>
+          </a:lnRef>
+          <a:fillRef idx="3">
+            <a:schemeClr val="accent1"/>
+          </a:fillRef>
+          <a:effectRef idx="2">
+            <a:schemeClr val="accent1"/>
+          </a:effectRef>
+          <a:fontRef idx="minor">
+            <a:schemeClr val="lt1"/>
+          </a:fontRef>
+        </p:style>
+        <p:txBody>
+          <a:bodyPr rtlCol="0" anchor="ctr"/>
+          <a:lstStyle/>
+          <a:p>
+            <a:pPr algn="ctr"/>
+          </a:p>
+        </p:txBody>
+      </p:sp>
+      <p:sp>
+        <p:nvSpPr>
+          <p:cNvPr id="4" name="TextBox 3"/>
+          <p:cNvSpPr txBox="1"/>
+          <p:nvPr/>
+        </p:nvSpPr>
+        <p:spPr>
+          <a:xfrm>
+            <a:off x="868680" y="1325880"/>
+            <a:ext cx="10424160" cy="4754880"/>
+          </a:xfrm>
+          <a:prstGeom prst="rect">
+            <a:avLst/>
+          </a:prstGeom>
+          <a:noFill/>
+        </p:spPr>
+        <p:txBody>
+          <a:bodyPr wrap="square">
+            <a:spAutoFit/>
+          </a:bodyPr>
           <a:lstStyle/>
           <a:p>
             <a:pPr>
-              <a:defRPr sz="2400"/>
+              <a:spcAft>
+                <a:spcPts val="1000"/>
+              </a:spcAft>
+              <a:defRPr sz="2100">
+                <a:latin typeface="Calibri"/>
+              </a:defRPr>
             </a:pPr>
             <a:r>
-              <a:t>Validation loss: `2.7857`.</a:t>
+              <a:t>Encoder: предварително обучен VGG16, използван за извличане на визуални характеристики.</a:t>
             </a:r>
           </a:p>
           <a:p>
             <a:pPr>
-              <a:defRPr sz="2400"/>
+              <a:spcAft>
+                <a:spcPts val="1000"/>
+              </a:spcAft>
+              <a:defRPr sz="2100">
+                <a:latin typeface="Calibri"/>
+              </a:defRPr>
             </a:pPr>
             <a:r>
-              <a:t>Test loss: `2.7643`.</a:t>
+              <a:t>Decoder: LSTM, който получава image features и генерира последователност от думи.</a:t>
             </a:r>
           </a:p>
           <a:p>
             <a:pPr>
-              <a:defRPr sz="2400"/>
+              <a:spcAft>
+                <a:spcPts val="1000"/>
+              </a:spcAft>
+              <a:defRPr sz="2100">
+                <a:latin typeface="Calibri"/>
+              </a:defRPr>
             </a:pPr>
             <a:r>
-              <a:t>BLEU-1: `0.5386`.</a:t>
+              <a:t>Loss функция: cross-entropy за предсказване на следващата дума.</a:t>
             </a:r>
           </a:p>
           <a:p>
             <a:pPr>
-              <a:defRPr sz="2400"/>
+              <a:spcAft>
+                <a:spcPts val="1000"/>
+              </a:spcAft>
+              <a:defRPr sz="2100">
+                <a:latin typeface="Calibri"/>
+              </a:defRPr>
             </a:pPr>
             <a:r>
-              <a:t>BLEU-4: `0.1392`.</a:t>
-            </a:r>
-          </a:p>
-          <a:p>
-            <a:pPr>
-              <a:defRPr sz="2400"/>
-            </a:pPr>
-            <a:r>
-              <a:t>ROUGE-L: `0.3918`.</a:t>
-            </a:r>
-          </a:p>
-          <a:p>
-            <a:pPr>
-              <a:defRPr sz="2400"/>
-            </a:pPr>
-            <a:r>
-              <a:t>Генерираните captions са запазени в `reports/model/generated_captions.csv`.</a:t>
-            </a:r>
-          </a:p>
-          <a:p>
-            <a:pPr>
-              <a:defRPr sz="2400"/>
-            </a:pPr>
-            <a:r>
-              <a:t>Architecture experiments показаха, че hidden size 512 е най-добър от тестваните кратки варианти.</a:t>
+              <a:t>VGG features се кешират, за да се ускори обучението при повторни експерименти.</a:t>
+            </a:r>
+          </a:p>
+        </p:txBody>
+      </p:sp>
+      <p:sp>
+        <p:nvSpPr>
+          <p:cNvPr id="5" name="TextBox 4"/>
+          <p:cNvSpPr txBox="1"/>
+          <p:nvPr/>
+        </p:nvSpPr>
+        <p:spPr>
+          <a:xfrm>
+            <a:off x="548640" y="6473952"/>
+            <a:ext cx="5486400" cy="228600"/>
+          </a:xfrm>
+          <a:prstGeom prst="rect">
+            <a:avLst/>
+          </a:prstGeom>
+          <a:noFill/>
+        </p:spPr>
+        <p:txBody>
+          <a:bodyPr wrap="none">
+            <a:spAutoFit/>
+          </a:bodyPr>
+          <a:lstStyle/>
+          <a:p>
+            <a:pPr algn="l"/>
+            <a:r>
+              <a:rPr sz="800" b="0" i="1">
+                <a:latin typeface="Calibri"/>
+              </a:rPr>
+              <a:t>Генериране на описание за изображение</a:t>
+            </a:r>
+          </a:p>
+        </p:txBody>
+      </p:sp>
+      <p:sp>
+        <p:nvSpPr>
+          <p:cNvPr id="6" name="TextBox 5"/>
+          <p:cNvSpPr txBox="1"/>
+          <p:nvPr/>
+        </p:nvSpPr>
+        <p:spPr>
+          <a:xfrm>
+            <a:off x="10972800" y="6473952"/>
+            <a:ext cx="640080" cy="228600"/>
+          </a:xfrm>
+          <a:prstGeom prst="rect">
+            <a:avLst/>
+          </a:prstGeom>
+          <a:noFill/>
+        </p:spPr>
+        <p:txBody>
+          <a:bodyPr wrap="none">
+            <a:spAutoFit/>
+          </a:bodyPr>
+          <a:lstStyle/>
+          <a:p>
+            <a:pPr algn="r"/>
+            <a:r>
+              <a:rPr sz="800" b="0" i="0">
+                <a:latin typeface="Calibri"/>
+              </a:rPr>
+              <a:t>9/15</a:t>
             </a:r>
           </a:p>
         </p:txBody>

--- a/presentation/image_captioning_presentation.pptx
+++ b/presentation/image_captioning_presentation.pptx
@@ -20,6 +20,22 @@
     <p:sldId id="268" r:id="rId19"/>
     <p:sldId id="269" r:id="rId20"/>
     <p:sldId id="270" r:id="rId21"/>
+    <p:sldId id="271" r:id="rId22"/>
+    <p:sldId id="272" r:id="rId23"/>
+    <p:sldId id="273" r:id="rId24"/>
+    <p:sldId id="274" r:id="rId25"/>
+    <p:sldId id="275" r:id="rId26"/>
+    <p:sldId id="276" r:id="rId27"/>
+    <p:sldId id="277" r:id="rId28"/>
+    <p:sldId id="278" r:id="rId29"/>
+    <p:sldId id="279" r:id="rId30"/>
+    <p:sldId id="280" r:id="rId31"/>
+    <p:sldId id="281" r:id="rId32"/>
+    <p:sldId id="282" r:id="rId33"/>
+    <p:sldId id="283" r:id="rId34"/>
+    <p:sldId id="284" r:id="rId35"/>
+    <p:sldId id="285" r:id="rId36"/>
+    <p:sldId id="286" r:id="rId37"/>
   </p:sldIdLst>
   <p:sldSz cx="12192000" cy="6858000" type="screen4x3"/>
   <p:notesSz cx="6858000" cy="9144000"/>
@@ -3110,8 +3126,8 @@
         </p:nvSpPr>
         <p:spPr>
           <a:xfrm>
-            <a:off x="594360" y="320040"/>
-            <a:ext cx="10972800" cy="365760"/>
+            <a:off x="640080" y="320040"/>
+            <a:ext cx="10972800" cy="411480"/>
           </a:xfrm>
           <a:prstGeom prst="rect">
             <a:avLst/>
@@ -3142,8 +3158,8 @@
         </p:nvSpPr>
         <p:spPr>
           <a:xfrm>
-            <a:off x="1097280" y="1508760"/>
-            <a:ext cx="10058400" cy="960120"/>
+            <a:off x="1051560" y="1508760"/>
+            <a:ext cx="10149840" cy="914400"/>
           </a:xfrm>
           <a:prstGeom prst="rect">
             <a:avLst/>
@@ -3174,8 +3190,8 @@
         </p:nvSpPr>
         <p:spPr>
           <a:xfrm>
-            <a:off x="3566160" y="2743200"/>
-            <a:ext cx="5029200" cy="502920"/>
+            <a:off x="3474720" y="2743200"/>
+            <a:ext cx="5303520" cy="502920"/>
           </a:xfrm>
           <a:prstGeom prst="rect">
             <a:avLst/>
@@ -3206,8 +3222,8 @@
         </p:nvSpPr>
         <p:spPr>
           <a:xfrm>
-            <a:off x="2743200" y="4343400"/>
-            <a:ext cx="6766560" cy="274320"/>
+            <a:off x="2377440" y="4206240"/>
+            <a:ext cx="7498079" cy="256032"/>
           </a:xfrm>
           <a:prstGeom prst="rect">
             <a:avLst/>
@@ -3222,7 +3238,7 @@
           <a:p>
             <a:pPr algn="ctr"/>
             <a:r>
-              <a:rPr sz="1600" b="0" i="1">
+              <a:rPr sz="1500" b="0" i="1">
                 <a:latin typeface="Calibri"/>
               </a:rPr>
               <a:t>Факултет по математика и информатика</a:t>
@@ -3238,8 +3254,8 @@
         </p:nvSpPr>
         <p:spPr>
           <a:xfrm>
-            <a:off x="2743200" y="4663440"/>
-            <a:ext cx="6766560" cy="274320"/>
+            <a:off x="2377440" y="4507992"/>
+            <a:ext cx="7498079" cy="256032"/>
           </a:xfrm>
           <a:prstGeom prst="rect">
             <a:avLst/>
@@ -3254,7 +3270,7 @@
           <a:p>
             <a:pPr algn="ctr"/>
             <a:r>
-              <a:rPr sz="1600" b="0" i="1">
+              <a:rPr sz="1500" b="0" i="1">
                 <a:latin typeface="Calibri"/>
               </a:rPr>
               <a:t>Студент: Никола</a:t>
@@ -3270,8 +3286,8 @@
         </p:nvSpPr>
         <p:spPr>
           <a:xfrm>
-            <a:off x="2743200" y="4983480"/>
-            <a:ext cx="6766560" cy="274320"/>
+            <a:off x="2377440" y="4809744"/>
+            <a:ext cx="7498079" cy="256032"/>
           </a:xfrm>
           <a:prstGeom prst="rect">
             <a:avLst/>
@@ -3286,7 +3302,7 @@
           <a:p>
             <a:pPr algn="ctr"/>
             <a:r>
-              <a:rPr sz="1600" b="0" i="1">
+              <a:rPr sz="1500" b="0" i="1">
                 <a:latin typeface="Calibri"/>
               </a:rPr>
               <a:t>Факултетен номер: [попълва се]</a:t>
@@ -3302,8 +3318,8 @@
         </p:nvSpPr>
         <p:spPr>
           <a:xfrm>
-            <a:off x="2743200" y="5303520"/>
-            <a:ext cx="6766560" cy="274320"/>
+            <a:off x="2377440" y="5111496"/>
+            <a:ext cx="7498079" cy="256032"/>
           </a:xfrm>
           <a:prstGeom prst="rect">
             <a:avLst/>
@@ -3318,7 +3334,7 @@
           <a:p>
             <a:pPr algn="ctr"/>
             <a:r>
-              <a:rPr sz="1600" b="0" i="1">
+              <a:rPr sz="1500" b="0" i="1">
                 <a:latin typeface="Calibri"/>
               </a:rPr>
               <a:t>Учебен план: Изкуствен интелект</a:t>
@@ -3334,8 +3350,8 @@
         </p:nvSpPr>
         <p:spPr>
           <a:xfrm>
-            <a:off x="2743200" y="5623560"/>
-            <a:ext cx="6766560" cy="274320"/>
+            <a:off x="2377440" y="5413248"/>
+            <a:ext cx="7498079" cy="256032"/>
           </a:xfrm>
           <a:prstGeom prst="rect">
             <a:avLst/>
@@ -3350,10 +3366,42 @@
           <a:p>
             <a:pPr algn="ctr"/>
             <a:r>
-              <a:rPr sz="1600" b="0" i="1">
+              <a:rPr sz="1500" b="0" i="1">
                 <a:latin typeface="Calibri"/>
               </a:rPr>
               <a:t>Дисциплина: Дълбоко обучение</a:t>
+            </a:r>
+          </a:p>
+        </p:txBody>
+      </p:sp>
+      <p:sp>
+        <p:nvSpPr>
+          <p:cNvPr id="10" name="TextBox 9"/>
+          <p:cNvSpPr txBox="1"/>
+          <p:nvPr/>
+        </p:nvSpPr>
+        <p:spPr>
+          <a:xfrm>
+            <a:off x="2377440" y="5715000"/>
+            <a:ext cx="7498079" cy="256032"/>
+          </a:xfrm>
+          <a:prstGeom prst="rect">
+            <a:avLst/>
+          </a:prstGeom>
+          <a:noFill/>
+        </p:spPr>
+        <p:txBody>
+          <a:bodyPr wrap="none">
+            <a:spAutoFit/>
+          </a:bodyPr>
+          <a:lstStyle/>
+          <a:p>
+            <a:pPr algn="ctr"/>
+            <a:r>
+              <a:rPr sz="1500" b="0" i="1">
+                <a:latin typeface="Calibri"/>
+              </a:rPr>
+              <a:t>Реализацията включва анализ на данните, обучение на модел, оценка и Streamlit интерфейс.</a:t>
             </a:r>
           </a:p>
         </p:txBody>
@@ -3384,8 +3432,8 @@
         </p:nvSpPr>
         <p:spPr>
           <a:xfrm>
-            <a:off x="640080" y="411480"/>
-            <a:ext cx="10972800" cy="502920"/>
+            <a:off x="594360" y="347472"/>
+            <a:ext cx="11064240" cy="457200"/>
           </a:xfrm>
           <a:prstGeom prst="rect">
             <a:avLst/>
@@ -3398,12 +3446,11 @@
           </a:bodyPr>
           <a:lstStyle/>
           <a:p>
-            <a:pPr algn="l"/>
-            <a:r>
-              <a:rPr sz="2600" b="1" i="0">
+            <a:r>
+              <a:rPr sz="2500" b="1" i="0">
                 <a:latin typeface="Calibri"/>
               </a:rPr>
-              <a:t>Експерименти</a:t>
+              <a:t>Какво ми показа текстовият анализ</a:t>
             </a:r>
           </a:p>
         </p:txBody>
@@ -3416,8 +3463,8 @@
         </p:nvSpPr>
         <p:spPr>
           <a:xfrm>
-            <a:off x="640080" y="1005840"/>
-            <a:ext cx="10881360" cy="9144"/>
+            <a:off x="594360" y="932688"/>
+            <a:ext cx="10972800" cy="18288"/>
           </a:xfrm>
           <a:prstGeom prst="rect">
             <a:avLst/>
@@ -3461,69 +3508,69 @@
         </p:nvSpPr>
         <p:spPr>
           <a:xfrm>
-            <a:off x="868680" y="1325880"/>
-            <a:ext cx="10424160" cy="4754880"/>
-          </a:xfrm>
-          <a:prstGeom prst="rect">
-            <a:avLst/>
-          </a:prstGeom>
-          <a:noFill/>
-        </p:spPr>
-        <p:txBody>
-          <a:bodyPr wrap="square">
-            <a:spAutoFit/>
-          </a:bodyPr>
-          <a:lstStyle/>
-          <a:p>
-            <a:pPr>
-              <a:spcAft>
-                <a:spcPts val="1000"/>
-              </a:spcAft>
-              <a:defRPr sz="2100">
-                <a:latin typeface="Calibri"/>
-              </a:defRPr>
-            </a:pPr>
-            <a:r>
-              <a:t>Тествани са различни настройки на LSTM hidden size и dropout.</a:t>
-            </a:r>
-          </a:p>
-          <a:p>
-            <a:pPr>
-              <a:spcAft>
-                <a:spcPts val="1000"/>
-              </a:spcAft>
-              <a:defRPr sz="2100">
-                <a:latin typeface="Calibri"/>
-              </a:defRPr>
-            </a:pPr>
-            <a:r>
-              <a:t>Направен е TF-IDF експеримент върху captions за анализ на важните думи.</a:t>
-            </a:r>
-          </a:p>
-          <a:p>
-            <a:pPr>
-              <a:spcAft>
-                <a:spcPts val="1000"/>
-              </a:spcAft>
-              <a:defRPr sz="2100">
-                <a:latin typeface="Calibri"/>
-              </a:defRPr>
-            </a:pPr>
-            <a:r>
-              <a:t>Добавен е VGG retrieval подход, който избира описание от визуално близки training изображения.</a:t>
-            </a:r>
-          </a:p>
-          <a:p>
-            <a:pPr>
-              <a:spcAft>
-                <a:spcPts val="1000"/>
-              </a:spcAft>
-              <a:defRPr sz="2100">
-                <a:latin typeface="Calibri"/>
-              </a:defRPr>
-            </a:pPr>
-            <a:r>
-              <a:t>Сравнен е и режим с предварително обучен BLIP модел като по-силен ориентир.</a:t>
+            <a:off x="822960" y="1234440"/>
+            <a:ext cx="10607040" cy="5074920"/>
+          </a:xfrm>
+          <a:prstGeom prst="rect">
+            <a:avLst/>
+          </a:prstGeom>
+          <a:noFill/>
+        </p:spPr>
+        <p:txBody>
+          <a:bodyPr wrap="square" lIns="45720" rIns="45720">
+            <a:spAutoFit/>
+          </a:bodyPr>
+          <a:lstStyle/>
+          <a:p>
+            <a:pPr>
+              <a:spcAft>
+                <a:spcPts val="1000"/>
+              </a:spcAft>
+              <a:defRPr sz="2000">
+                <a:latin typeface="Calibri"/>
+              </a:defRPr>
+            </a:pPr>
+            <a:r>
+              <a:t>Описанията са сравнително кратки и директни.</a:t>
+            </a:r>
+          </a:p>
+          <a:p>
+            <a:pPr>
+              <a:spcAft>
+                <a:spcPts val="1000"/>
+              </a:spcAft>
+              <a:defRPr sz="2000">
+                <a:latin typeface="Calibri"/>
+              </a:defRPr>
+            </a:pPr>
+            <a:r>
+              <a:t>Много често се срещат думи като `dog`, `man`, `woman`, `boy`, `girl`, `black`, `white`, `running`.</a:t>
+            </a:r>
+          </a:p>
+          <a:p>
+            <a:pPr>
+              <a:spcAft>
+                <a:spcPts val="1000"/>
+              </a:spcAft>
+              <a:defRPr sz="2000">
+                <a:latin typeface="Calibri"/>
+              </a:defRPr>
+            </a:pPr>
+            <a:r>
+              <a:t>Това ми показа, че dataset-ът има силен фокус върху хора, кучета, цветове и outdoor действия.</a:t>
+            </a:r>
+          </a:p>
+          <a:p>
+            <a:pPr>
+              <a:spcAft>
+                <a:spcPts val="1000"/>
+              </a:spcAft>
+              <a:defRPr sz="2000">
+                <a:latin typeface="Calibri"/>
+              </a:defRPr>
+            </a:pPr>
+            <a:r>
+              <a:t>По-късно това се вижда и в поведението на модела — той често предпочита такива сцени и думи.</a:t>
             </a:r>
           </a:p>
         </p:txBody>
@@ -3536,8 +3583,8 @@
         </p:nvSpPr>
         <p:spPr>
           <a:xfrm>
-            <a:off x="548640" y="6473952"/>
-            <a:ext cx="5486400" cy="228600"/>
+            <a:off x="502920" y="6473952"/>
+            <a:ext cx="7772400" cy="228600"/>
           </a:xfrm>
           <a:prstGeom prst="rect">
             <a:avLst/>
@@ -3568,8 +3615,8 @@
         </p:nvSpPr>
         <p:spPr>
           <a:xfrm>
-            <a:off x="10972800" y="6473952"/>
-            <a:ext cx="640080" cy="228600"/>
+            <a:off x="10789920" y="6473952"/>
+            <a:ext cx="822960" cy="228600"/>
           </a:xfrm>
           <a:prstGeom prst="rect">
             <a:avLst/>
@@ -3587,7 +3634,7 @@
               <a:rPr sz="800" b="0" i="0">
                 <a:latin typeface="Calibri"/>
               </a:rPr>
-              <a:t>10/15</a:t>
+              <a:t>10/31</a:t>
             </a:r>
           </a:p>
         </p:txBody>
@@ -3618,8 +3665,8 @@
         </p:nvSpPr>
         <p:spPr>
           <a:xfrm>
-            <a:off x="640080" y="411480"/>
-            <a:ext cx="10972800" cy="502920"/>
+            <a:off x="594360" y="347472"/>
+            <a:ext cx="11064240" cy="457200"/>
           </a:xfrm>
           <a:prstGeom prst="rect">
             <a:avLst/>
@@ -3632,12 +3679,11 @@
           </a:bodyPr>
           <a:lstStyle/>
           <a:p>
-            <a:pPr algn="l"/>
-            <a:r>
-              <a:rPr sz="2600" b="1" i="0">
+            <a:r>
+              <a:rPr sz="2500" b="1" i="0">
                 <a:latin typeface="Calibri"/>
               </a:rPr>
-              <a:t>Резултати от основния модел</a:t>
+              <a:t>Какво ми показа image анализът</a:t>
             </a:r>
           </a:p>
         </p:txBody>
@@ -3650,8 +3696,8 @@
         </p:nvSpPr>
         <p:spPr>
           <a:xfrm>
-            <a:off x="640080" y="1005840"/>
-            <a:ext cx="10881360" cy="9144"/>
+            <a:off x="594360" y="932688"/>
+            <a:ext cx="10972800" cy="18288"/>
           </a:xfrm>
           <a:prstGeom prst="rect">
             <a:avLst/>
@@ -3695,95 +3741,69 @@
         </p:nvSpPr>
         <p:spPr>
           <a:xfrm>
-            <a:off x="868680" y="1325880"/>
-            <a:ext cx="10424160" cy="4754880"/>
-          </a:xfrm>
-          <a:prstGeom prst="rect">
-            <a:avLst/>
-          </a:prstGeom>
-          <a:noFill/>
-        </p:spPr>
-        <p:txBody>
-          <a:bodyPr wrap="square">
-            <a:spAutoFit/>
-          </a:bodyPr>
-          <a:lstStyle/>
-          <a:p>
-            <a:pPr>
-              <a:spcAft>
-                <a:spcPts val="1000"/>
-              </a:spcAft>
-              <a:defRPr sz="2100">
-                <a:latin typeface="Calibri"/>
-              </a:defRPr>
-            </a:pPr>
-            <a:r>
-              <a:t>Validation loss: 2.7857.</a:t>
-            </a:r>
-          </a:p>
-          <a:p>
-            <a:pPr>
-              <a:spcAft>
-                <a:spcPts val="1000"/>
-              </a:spcAft>
-              <a:defRPr sz="2100">
-                <a:latin typeface="Calibri"/>
-              </a:defRPr>
-            </a:pPr>
-            <a:r>
-              <a:t>Test loss: 2.7643.</a:t>
-            </a:r>
-          </a:p>
-          <a:p>
-            <a:pPr>
-              <a:spcAft>
-                <a:spcPts val="1000"/>
-              </a:spcAft>
-              <a:defRPr sz="2100">
-                <a:latin typeface="Calibri"/>
-              </a:defRPr>
-            </a:pPr>
-            <a:r>
-              <a:t>BLEU-1: 0.5386.</a:t>
-            </a:r>
-          </a:p>
-          <a:p>
-            <a:pPr>
-              <a:spcAft>
-                <a:spcPts val="1000"/>
-              </a:spcAft>
-              <a:defRPr sz="2100">
-                <a:latin typeface="Calibri"/>
-              </a:defRPr>
-            </a:pPr>
-            <a:r>
-              <a:t>BLEU-4: 0.1392.</a:t>
-            </a:r>
-          </a:p>
-          <a:p>
-            <a:pPr>
-              <a:spcAft>
-                <a:spcPts val="1000"/>
-              </a:spcAft>
-              <a:defRPr sz="2100">
-                <a:latin typeface="Calibri"/>
-              </a:defRPr>
-            </a:pPr>
-            <a:r>
-              <a:t>ROUGE-L: 0.3918.</a:t>
-            </a:r>
-          </a:p>
-          <a:p>
-            <a:pPr>
-              <a:spcAft>
-                <a:spcPts val="1000"/>
-              </a:spcAft>
-              <a:defRPr sz="2100">
-                <a:latin typeface="Calibri"/>
-              </a:defRPr>
-            </a:pPr>
-            <a:r>
-              <a:t>Резултатите показват работещ baseline, но не и модел, който винаги описва точно произволни изображения.</a:t>
+            <a:off x="822960" y="1234440"/>
+            <a:ext cx="10607040" cy="5074920"/>
+          </a:xfrm>
+          <a:prstGeom prst="rect">
+            <a:avLst/>
+          </a:prstGeom>
+          <a:noFill/>
+        </p:spPr>
+        <p:txBody>
+          <a:bodyPr wrap="square" lIns="45720" rIns="45720">
+            <a:spAutoFit/>
+          </a:bodyPr>
+          <a:lstStyle/>
+          <a:p>
+            <a:pPr>
+              <a:spcAft>
+                <a:spcPts val="1000"/>
+              </a:spcAft>
+              <a:defRPr sz="2000">
+                <a:latin typeface="Calibri"/>
+              </a:defRPr>
+            </a:pPr>
+            <a:r>
+              <a:t>Изображенията са с различни размери и aspect ratio.</a:t>
+            </a:r>
+          </a:p>
+          <a:p>
+            <a:pPr>
+              <a:spcAft>
+                <a:spcPts val="1000"/>
+              </a:spcAft>
+              <a:defRPr sz="2000">
+                <a:latin typeface="Calibri"/>
+              </a:defRPr>
+            </a:pPr>
+            <a:r>
+              <a:t>За да ги подам към VGG16, ги преобразувам до 224 x 224 пиксела.</a:t>
+            </a:r>
+          </a:p>
+          <a:p>
+            <a:pPr>
+              <a:spcAft>
+                <a:spcPts val="1000"/>
+              </a:spcAft>
+              <a:defRPr sz="2000">
+                <a:latin typeface="Calibri"/>
+              </a:defRPr>
+            </a:pPr>
+            <a:r>
+              <a:t>Това прави входа стандартен и съвместим с VGG16.</a:t>
+            </a:r>
+          </a:p>
+          <a:p>
+            <a:pPr>
+              <a:spcAft>
+                <a:spcPts val="1000"/>
+              </a:spcAft>
+              <a:defRPr sz="2000">
+                <a:latin typeface="Calibri"/>
+              </a:defRPr>
+            </a:pPr>
+            <a:r>
+              <a:t>Недостатъкът е, че при някои снимки има лека деформация, но за baseline модел това е приемлив компромис.</a:t>
             </a:r>
           </a:p>
         </p:txBody>
@@ -3796,8 +3816,8 @@
         </p:nvSpPr>
         <p:spPr>
           <a:xfrm>
-            <a:off x="548640" y="6473952"/>
-            <a:ext cx="5486400" cy="228600"/>
+            <a:off x="502920" y="6473952"/>
+            <a:ext cx="7772400" cy="228600"/>
           </a:xfrm>
           <a:prstGeom prst="rect">
             <a:avLst/>
@@ -3828,8 +3848,8 @@
         </p:nvSpPr>
         <p:spPr>
           <a:xfrm>
-            <a:off x="10972800" y="6473952"/>
-            <a:ext cx="640080" cy="228600"/>
+            <a:off x="10789920" y="6473952"/>
+            <a:ext cx="822960" cy="228600"/>
           </a:xfrm>
           <a:prstGeom prst="rect">
             <a:avLst/>
@@ -3847,7 +3867,7 @@
               <a:rPr sz="800" b="0" i="0">
                 <a:latin typeface="Calibri"/>
               </a:rPr>
-              <a:t>11/15</a:t>
+              <a:t>11/31</a:t>
             </a:r>
           </a:p>
         </p:txBody>
@@ -3878,8 +3898,8 @@
         </p:nvSpPr>
         <p:spPr>
           <a:xfrm>
-            <a:off x="640080" y="411480"/>
-            <a:ext cx="10972800" cy="502920"/>
+            <a:off x="594360" y="347472"/>
+            <a:ext cx="11064240" cy="457200"/>
           </a:xfrm>
           <a:prstGeom prst="rect">
             <a:avLst/>
@@ -3892,12 +3912,11 @@
           </a:bodyPr>
           <a:lstStyle/>
           <a:p>
-            <a:pPr algn="l"/>
-            <a:r>
-              <a:rPr sz="2600" b="1" i="0">
+            <a:r>
+              <a:rPr sz="2500" b="1" i="0">
                 <a:latin typeface="Calibri"/>
               </a:rPr>
-              <a:t>Потребителски интерфейс</a:t>
+              <a:t>Train / validation / test split</a:t>
             </a:r>
           </a:p>
         </p:txBody>
@@ -3910,8 +3929,8 @@
         </p:nvSpPr>
         <p:spPr>
           <a:xfrm>
-            <a:off x="640080" y="1005840"/>
-            <a:ext cx="10881360" cy="9144"/>
+            <a:off x="594360" y="932688"/>
+            <a:ext cx="10972800" cy="18288"/>
           </a:xfrm>
           <a:prstGeom prst="rect">
             <a:avLst/>
@@ -3955,69 +3974,82 @@
         </p:nvSpPr>
         <p:spPr>
           <a:xfrm>
-            <a:off x="868680" y="1325880"/>
-            <a:ext cx="10424160" cy="4754880"/>
-          </a:xfrm>
-          <a:prstGeom prst="rect">
-            <a:avLst/>
-          </a:prstGeom>
-          <a:noFill/>
-        </p:spPr>
-        <p:txBody>
-          <a:bodyPr wrap="square">
-            <a:spAutoFit/>
-          </a:bodyPr>
-          <a:lstStyle/>
-          <a:p>
-            <a:pPr>
-              <a:spcAft>
-                <a:spcPts val="1000"/>
-              </a:spcAft>
-              <a:defRPr sz="2100">
-                <a:latin typeface="Calibri"/>
-              </a:defRPr>
-            </a:pPr>
-            <a:r>
-              <a:t>Изградено е Streamlit приложение за качване на изображение и генериране на описание.</a:t>
-            </a:r>
-          </a:p>
-          <a:p>
-            <a:pPr>
-              <a:spcAft>
-                <a:spcPts val="1000"/>
-              </a:spcAft>
-              <a:defRPr sz="2100">
-                <a:latin typeface="Calibri"/>
-              </a:defRPr>
-            </a:pPr>
-            <a:r>
-              <a:t>Интерфейсът показва входното изображение, генерирания текст и информация за използвания режим.</a:t>
-            </a:r>
-          </a:p>
-          <a:p>
-            <a:pPr>
-              <a:spcAft>
-                <a:spcPts val="1000"/>
-              </a:spcAft>
-              <a:defRPr sz="2100">
-                <a:latin typeface="Calibri"/>
-              </a:defRPr>
-            </a:pPr>
-            <a:r>
-              <a:t>Налични са три режима: VGG retrieval, VGG16 + LSTM и BLIP.</a:t>
-            </a:r>
-          </a:p>
-          <a:p>
-            <a:pPr>
-              <a:spcAft>
-                <a:spcPts val="1000"/>
-              </a:spcAft>
-              <a:defRPr sz="2100">
-                <a:latin typeface="Calibri"/>
-              </a:defRPr>
-            </a:pPr>
-            <a:r>
-              <a:t>Това позволява да се сравни собствената реализация с по-силен предварително обучен модел.</a:t>
+            <a:off x="822960" y="1234440"/>
+            <a:ext cx="10607040" cy="5074920"/>
+          </a:xfrm>
+          <a:prstGeom prst="rect">
+            <a:avLst/>
+          </a:prstGeom>
+          <a:noFill/>
+        </p:spPr>
+        <p:txBody>
+          <a:bodyPr wrap="square" lIns="45720" rIns="45720">
+            <a:spAutoFit/>
+          </a:bodyPr>
+          <a:lstStyle/>
+          <a:p>
+            <a:pPr>
+              <a:spcAft>
+                <a:spcPts val="1000"/>
+              </a:spcAft>
+              <a:defRPr sz="2000">
+                <a:latin typeface="Calibri"/>
+              </a:defRPr>
+            </a:pPr>
+            <a:r>
+              <a:t>Разделих данните на train, validation и test в съотношение 80% / 10% / 10%.</a:t>
+            </a:r>
+          </a:p>
+          <a:p>
+            <a:pPr>
+              <a:spcAft>
+                <a:spcPts val="1000"/>
+              </a:spcAft>
+              <a:defRPr sz="2000">
+                <a:latin typeface="Calibri"/>
+              </a:defRPr>
+            </a:pPr>
+            <a:r>
+              <a:t>Използвах seed 42, за да бъде split-ът повторим.</a:t>
+            </a:r>
+          </a:p>
+          <a:p>
+            <a:pPr>
+              <a:spcAft>
+                <a:spcPts val="1000"/>
+              </a:spcAft>
+              <a:defRPr sz="2000">
+                <a:latin typeface="Calibri"/>
+              </a:defRPr>
+            </a:pPr>
+            <a:r>
+              <a:t>Разделянето е по уникални изображения, не по отделни captions.</a:t>
+            </a:r>
+          </a:p>
+          <a:p>
+            <a:pPr>
+              <a:spcAft>
+                <a:spcPts val="1000"/>
+              </a:spcAft>
+              <a:defRPr sz="2000">
+                <a:latin typeface="Calibri"/>
+              </a:defRPr>
+            </a:pPr>
+            <a:r>
+              <a:t>Това е важно, защото иначе captions на една и съща снимка могат да попаднат и в train, и в test.</a:t>
+            </a:r>
+          </a:p>
+          <a:p>
+            <a:pPr>
+              <a:spcAft>
+                <a:spcPts val="1000"/>
+              </a:spcAft>
+              <a:defRPr sz="2000">
+                <a:latin typeface="Calibri"/>
+              </a:defRPr>
+            </a:pPr>
+            <a:r>
+              <a:t>Така оценката става по-честна.</a:t>
             </a:r>
           </a:p>
         </p:txBody>
@@ -4030,8 +4062,8 @@
         </p:nvSpPr>
         <p:spPr>
           <a:xfrm>
-            <a:off x="548640" y="6473952"/>
-            <a:ext cx="5486400" cy="228600"/>
+            <a:off x="502920" y="6473952"/>
+            <a:ext cx="7772400" cy="228600"/>
           </a:xfrm>
           <a:prstGeom prst="rect">
             <a:avLst/>
@@ -4062,8 +4094,8 @@
         </p:nvSpPr>
         <p:spPr>
           <a:xfrm>
-            <a:off x="10972800" y="6473952"/>
-            <a:ext cx="640080" cy="228600"/>
+            <a:off x="10789920" y="6473952"/>
+            <a:ext cx="822960" cy="228600"/>
           </a:xfrm>
           <a:prstGeom prst="rect">
             <a:avLst/>
@@ -4081,7 +4113,7 @@
               <a:rPr sz="800" b="0" i="0">
                 <a:latin typeface="Calibri"/>
               </a:rPr>
-              <a:t>12/15</a:t>
+              <a:t>12/31</a:t>
             </a:r>
           </a:p>
         </p:txBody>
@@ -4112,8 +4144,8 @@
         </p:nvSpPr>
         <p:spPr>
           <a:xfrm>
-            <a:off x="640080" y="411480"/>
-            <a:ext cx="10972800" cy="502920"/>
+            <a:off x="594360" y="347472"/>
+            <a:ext cx="11064240" cy="457200"/>
           </a:xfrm>
           <a:prstGeom prst="rect">
             <a:avLst/>
@@ -4126,12 +4158,11 @@
           </a:bodyPr>
           <a:lstStyle/>
           <a:p>
-            <a:pPr algn="l"/>
-            <a:r>
-              <a:rPr sz="2600" b="1" i="0">
+            <a:r>
+              <a:rPr sz="2500" b="1" i="0">
                 <a:latin typeface="Calibri"/>
               </a:rPr>
-              <a:t>Тестове</a:t>
+              <a:t>Image preprocessing</a:t>
             </a:r>
           </a:p>
         </p:txBody>
@@ -4144,8 +4175,8 @@
         </p:nvSpPr>
         <p:spPr>
           <a:xfrm>
-            <a:off x="640080" y="1005840"/>
-            <a:ext cx="10881360" cy="9144"/>
+            <a:off x="594360" y="932688"/>
+            <a:ext cx="10972800" cy="18288"/>
           </a:xfrm>
           <a:prstGeom prst="rect">
             <a:avLst/>
@@ -4189,69 +4220,69 @@
         </p:nvSpPr>
         <p:spPr>
           <a:xfrm>
-            <a:off x="868680" y="1325880"/>
-            <a:ext cx="10424160" cy="4754880"/>
-          </a:xfrm>
-          <a:prstGeom prst="rect">
-            <a:avLst/>
-          </a:prstGeom>
-          <a:noFill/>
-        </p:spPr>
-        <p:txBody>
-          <a:bodyPr wrap="square">
-            <a:spAutoFit/>
-          </a:bodyPr>
-          <a:lstStyle/>
-          <a:p>
-            <a:pPr>
-              <a:spcAft>
-                <a:spcPts val="1000"/>
-              </a:spcAft>
-              <a:defRPr sz="2100">
-                <a:latin typeface="Calibri"/>
-              </a:defRPr>
-            </a:pPr>
-            <a:r>
-              <a:t>Написани са тестове за речника, зареждането на данните и split логиката.</a:t>
-            </a:r>
-          </a:p>
-          <a:p>
-            <a:pPr>
-              <a:spcAft>
-                <a:spcPts val="1000"/>
-              </a:spcAft>
-              <a:defRPr sz="2100">
-                <a:latin typeface="Calibri"/>
-              </a:defRPr>
-            </a:pPr>
-            <a:r>
-              <a:t>Проверени са модулите за модел, обучение, оценка и inference.</a:t>
-            </a:r>
-          </a:p>
-          <a:p>
-            <a:pPr>
-              <a:spcAft>
-                <a:spcPts val="1000"/>
-              </a:spcAft>
-              <a:defRPr sz="2100">
-                <a:latin typeface="Calibri"/>
-              </a:defRPr>
-            </a:pPr>
-            <a:r>
-              <a:t>Има тестове за retrieval baseline, TF-IDF експериментите и генерирането на презентацията.</a:t>
-            </a:r>
-          </a:p>
-          <a:p>
-            <a:pPr>
-              <a:spcAft>
-                <a:spcPts val="1000"/>
-              </a:spcAft>
-              <a:defRPr sz="2100">
-                <a:latin typeface="Calibri"/>
-              </a:defRPr>
-            </a:pPr>
-            <a:r>
-              <a:t>Последната пълна проверка на проекта преминава с 31 успешни теста.</a:t>
+            <a:off x="822960" y="1234440"/>
+            <a:ext cx="10607040" cy="5074920"/>
+          </a:xfrm>
+          <a:prstGeom prst="rect">
+            <a:avLst/>
+          </a:prstGeom>
+          <a:noFill/>
+        </p:spPr>
+        <p:txBody>
+          <a:bodyPr wrap="square" lIns="45720" rIns="45720">
+            <a:spAutoFit/>
+          </a:bodyPr>
+          <a:lstStyle/>
+          <a:p>
+            <a:pPr>
+              <a:spcAft>
+                <a:spcPts val="1000"/>
+              </a:spcAft>
+              <a:defRPr sz="2000">
+                <a:latin typeface="Calibri"/>
+              </a:defRPr>
+            </a:pPr>
+            <a:r>
+              <a:t>Всички изображения ги resize-вам до 224 x 224.</a:t>
+            </a:r>
+          </a:p>
+          <a:p>
+            <a:pPr>
+              <a:spcAft>
+                <a:spcPts val="1000"/>
+              </a:spcAft>
+              <a:defRPr sz="2000">
+                <a:latin typeface="Calibri"/>
+              </a:defRPr>
+            </a:pPr>
+            <a:r>
+              <a:t>Използвам ImageNet normalization, защото VGG16 е обучен с такава нормализация.</a:t>
+            </a:r>
+          </a:p>
+          <a:p>
+            <a:pPr>
+              <a:spcAft>
+                <a:spcPts val="1000"/>
+              </a:spcAft>
+              <a:defRPr sz="2000">
+                <a:latin typeface="Calibri"/>
+              </a:defRPr>
+            </a:pPr>
+            <a:r>
+              <a:t>За training добавих леки augmentation операции.</a:t>
+            </a:r>
+          </a:p>
+          <a:p>
+            <a:pPr>
+              <a:spcAft>
+                <a:spcPts val="1000"/>
+              </a:spcAft>
+              <a:defRPr sz="2000">
+                <a:latin typeface="Calibri"/>
+              </a:defRPr>
+            </a:pPr>
+            <a:r>
+              <a:t>За validation и test оставих обработката фиксирана, за да не се променя оценката при всяко пускане.</a:t>
             </a:r>
           </a:p>
         </p:txBody>
@@ -4264,8 +4295,8 @@
         </p:nvSpPr>
         <p:spPr>
           <a:xfrm>
-            <a:off x="548640" y="6473952"/>
-            <a:ext cx="5486400" cy="228600"/>
+            <a:off x="502920" y="6473952"/>
+            <a:ext cx="7772400" cy="228600"/>
           </a:xfrm>
           <a:prstGeom prst="rect">
             <a:avLst/>
@@ -4296,8 +4327,8 @@
         </p:nvSpPr>
         <p:spPr>
           <a:xfrm>
-            <a:off x="10972800" y="6473952"/>
-            <a:ext cx="640080" cy="228600"/>
+            <a:off x="10789920" y="6473952"/>
+            <a:ext cx="822960" cy="228600"/>
           </a:xfrm>
           <a:prstGeom prst="rect">
             <a:avLst/>
@@ -4315,7 +4346,7 @@
               <a:rPr sz="800" b="0" i="0">
                 <a:latin typeface="Calibri"/>
               </a:rPr>
-              <a:t>13/15</a:t>
+              <a:t>13/31</a:t>
             </a:r>
           </a:p>
         </p:txBody>
@@ -4346,8 +4377,8 @@
         </p:nvSpPr>
         <p:spPr>
           <a:xfrm>
-            <a:off x="640080" y="411480"/>
-            <a:ext cx="10972800" cy="502920"/>
+            <a:off x="594360" y="347472"/>
+            <a:ext cx="11064240" cy="457200"/>
           </a:xfrm>
           <a:prstGeom prst="rect">
             <a:avLst/>
@@ -4360,12 +4391,11 @@
           </a:bodyPr>
           <a:lstStyle/>
           <a:p>
-            <a:pPr algn="l"/>
-            <a:r>
-              <a:rPr sz="2600" b="1" i="0">
+            <a:r>
+              <a:rPr sz="2500" b="1" i="0">
                 <a:latin typeface="Calibri"/>
               </a:rPr>
-              <a:t>Ограничения</a:t>
+              <a:t>Augmentation</a:t>
             </a:r>
           </a:p>
         </p:txBody>
@@ -4378,8 +4408,8 @@
         </p:nvSpPr>
         <p:spPr>
           <a:xfrm>
-            <a:off x="640080" y="1005840"/>
-            <a:ext cx="10881360" cy="9144"/>
+            <a:off x="594360" y="932688"/>
+            <a:ext cx="10972800" cy="18288"/>
           </a:xfrm>
           <a:prstGeom prst="rect">
             <a:avLst/>
@@ -4423,69 +4453,82 @@
         </p:nvSpPr>
         <p:spPr>
           <a:xfrm>
-            <a:off x="868680" y="1325880"/>
-            <a:ext cx="10424160" cy="4754880"/>
-          </a:xfrm>
-          <a:prstGeom prst="rect">
-            <a:avLst/>
-          </a:prstGeom>
-          <a:noFill/>
-        </p:spPr>
-        <p:txBody>
-          <a:bodyPr wrap="square">
-            <a:spAutoFit/>
-          </a:bodyPr>
-          <a:lstStyle/>
-          <a:p>
-            <a:pPr>
-              <a:spcAft>
-                <a:spcPts val="1000"/>
-              </a:spcAft>
-              <a:defRPr sz="2100">
-                <a:latin typeface="Calibri"/>
-              </a:defRPr>
-            </a:pPr>
-            <a:r>
-              <a:t>Flickr8k е сравнително малък набор от данни и не покрива всички ситуации от реалния свят.</a:t>
-            </a:r>
-          </a:p>
-          <a:p>
-            <a:pPr>
-              <a:spcAft>
-                <a:spcPts val="1000"/>
-              </a:spcAft>
-              <a:defRPr sz="2100">
-                <a:latin typeface="Calibri"/>
-              </a:defRPr>
-            </a:pPr>
-            <a:r>
-              <a:t>VGG16 + LSTM без attention често генерира общи или неточни описания.</a:t>
-            </a:r>
-          </a:p>
-          <a:p>
-            <a:pPr>
-              <a:spcAft>
-                <a:spcPts val="1000"/>
-              </a:spcAft>
-              <a:defRPr sz="2100">
-                <a:latin typeface="Calibri"/>
-              </a:defRPr>
-            </a:pPr>
-            <a:r>
-              <a:t>Качеството е по-добро при изображения, подобни на тези в training частта.</a:t>
-            </a:r>
-          </a:p>
-          <a:p>
-            <a:pPr>
-              <a:spcAft>
-                <a:spcPts val="1000"/>
-              </a:spcAft>
-              <a:defRPr sz="2100">
-                <a:latin typeface="Calibri"/>
-              </a:defRPr>
-            </a:pPr>
-            <a:r>
-              <a:t>Retrieval режимът е по-стабилен за демонстрация, но не създава напълно нов текст.</a:t>
+            <a:off x="822960" y="1234440"/>
+            <a:ext cx="10607040" cy="5074920"/>
+          </a:xfrm>
+          <a:prstGeom prst="rect">
+            <a:avLst/>
+          </a:prstGeom>
+          <a:noFill/>
+        </p:spPr>
+        <p:txBody>
+          <a:bodyPr wrap="square" lIns="45720" rIns="45720">
+            <a:spAutoFit/>
+          </a:bodyPr>
+          <a:lstStyle/>
+          <a:p>
+            <a:pPr>
+              <a:spcAft>
+                <a:spcPts val="1000"/>
+              </a:spcAft>
+              <a:defRPr sz="2000">
+                <a:latin typeface="Calibri"/>
+              </a:defRPr>
+            </a:pPr>
+            <a:r>
+              <a:t>Използвах random horizontal flip.</a:t>
+            </a:r>
+          </a:p>
+          <a:p>
+            <a:pPr>
+              <a:spcAft>
+                <a:spcPts val="1000"/>
+              </a:spcAft>
+              <a:defRPr sz="2000">
+                <a:latin typeface="Calibri"/>
+              </a:defRPr>
+            </a:pPr>
+            <a:r>
+              <a:t>Добавих и малка random rotation.</a:t>
+            </a:r>
+          </a:p>
+          <a:p>
+            <a:pPr>
+              <a:spcAft>
+                <a:spcPts val="1000"/>
+              </a:spcAft>
+              <a:defRPr sz="2000">
+                <a:latin typeface="Calibri"/>
+              </a:defRPr>
+            </a:pPr>
+            <a:r>
+              <a:t>Не използвах твърде силни трансформации, защото могат да променят смисъла на сцената.</a:t>
+            </a:r>
+          </a:p>
+          <a:p>
+            <a:pPr>
+              <a:spcAft>
+                <a:spcPts val="1000"/>
+              </a:spcAft>
+              <a:defRPr sz="2000">
+                <a:latin typeface="Calibri"/>
+              </a:defRPr>
+            </a:pPr>
+            <a:r>
+              <a:t>Идеята не е да направя напълно нов dataset, а леко да разнообразя training изображенията.</a:t>
+            </a:r>
+          </a:p>
+          <a:p>
+            <a:pPr>
+              <a:spcAft>
+                <a:spcPts val="1000"/>
+              </a:spcAft>
+              <a:defRPr sz="2000">
+                <a:latin typeface="Calibri"/>
+              </a:defRPr>
+            </a:pPr>
+            <a:r>
+              <a:t>Augmentation се прилага само върху train частта.</a:t>
             </a:r>
           </a:p>
         </p:txBody>
@@ -4498,8 +4541,8 @@
         </p:nvSpPr>
         <p:spPr>
           <a:xfrm>
-            <a:off x="548640" y="6473952"/>
-            <a:ext cx="5486400" cy="228600"/>
+            <a:off x="502920" y="6473952"/>
+            <a:ext cx="7772400" cy="228600"/>
           </a:xfrm>
           <a:prstGeom prst="rect">
             <a:avLst/>
@@ -4530,8 +4573,8 @@
         </p:nvSpPr>
         <p:spPr>
           <a:xfrm>
-            <a:off x="10972800" y="6473952"/>
-            <a:ext cx="640080" cy="228600"/>
+            <a:off x="10789920" y="6473952"/>
+            <a:ext cx="822960" cy="228600"/>
           </a:xfrm>
           <a:prstGeom prst="rect">
             <a:avLst/>
@@ -4549,7 +4592,7 @@
               <a:rPr sz="800" b="0" i="0">
                 <a:latin typeface="Calibri"/>
               </a:rPr>
-              <a:t>14/15</a:t>
+              <a:t>14/31</a:t>
             </a:r>
           </a:p>
         </p:txBody>
@@ -4580,8 +4623,8 @@
         </p:nvSpPr>
         <p:spPr>
           <a:xfrm>
-            <a:off x="640080" y="411480"/>
-            <a:ext cx="10972800" cy="502920"/>
+            <a:off x="594360" y="347472"/>
+            <a:ext cx="11064240" cy="457200"/>
           </a:xfrm>
           <a:prstGeom prst="rect">
             <a:avLst/>
@@ -4594,12 +4637,11 @@
           </a:bodyPr>
           <a:lstStyle/>
           <a:p>
-            <a:pPr algn="l"/>
-            <a:r>
-              <a:rPr sz="2600" b="1" i="0">
+            <a:r>
+              <a:rPr sz="2500" b="1" i="0">
                 <a:latin typeface="Calibri"/>
               </a:rPr>
-              <a:t>Изводи и бъдещо развитие</a:t>
+              <a:t>Text preprocessing и vocabulary</a:t>
             </a:r>
           </a:p>
         </p:txBody>
@@ -4612,8 +4654,8 @@
         </p:nvSpPr>
         <p:spPr>
           <a:xfrm>
-            <a:off x="640080" y="1005840"/>
-            <a:ext cx="10881360" cy="9144"/>
+            <a:off x="594360" y="932688"/>
+            <a:ext cx="10972800" cy="18288"/>
           </a:xfrm>
           <a:prstGeom prst="rect">
             <a:avLst/>
@@ -4657,69 +4699,82 @@
         </p:nvSpPr>
         <p:spPr>
           <a:xfrm>
-            <a:off x="868680" y="1325880"/>
-            <a:ext cx="10424160" cy="4754880"/>
-          </a:xfrm>
-          <a:prstGeom prst="rect">
-            <a:avLst/>
-          </a:prstGeom>
-          <a:noFill/>
-        </p:spPr>
-        <p:txBody>
-          <a:bodyPr wrap="square">
-            <a:spAutoFit/>
-          </a:bodyPr>
-          <a:lstStyle/>
-          <a:p>
-            <a:pPr>
-              <a:spcAft>
-                <a:spcPts val="1000"/>
-              </a:spcAft>
-              <a:defRPr sz="2100">
-                <a:latin typeface="Calibri"/>
-              </a:defRPr>
-            </a:pPr>
-            <a:r>
-              <a:t>Проектът реализира пълен процес: данни, EDA, preprocessing, модел, оценка, тестове и уеб приложение.</a:t>
-            </a:r>
-          </a:p>
-          <a:p>
-            <a:pPr>
-              <a:spcAft>
-                <a:spcPts val="1000"/>
-              </a:spcAft>
-              <a:defRPr sz="2100">
-                <a:latin typeface="Calibri"/>
-              </a:defRPr>
-            </a:pPr>
-            <a:r>
-              <a:t>Основният модел показва как работи image captioning архитектура от тип CNN + LSTM.</a:t>
-            </a:r>
-          </a:p>
-          <a:p>
-            <a:pPr>
-              <a:spcAft>
-                <a:spcPts val="1000"/>
-              </a:spcAft>
-              <a:defRPr sz="2100">
-                <a:latin typeface="Calibri"/>
-              </a:defRPr>
-            </a:pPr>
-            <a:r>
-              <a:t>За по-високо качество следваща стъпка би била attention или transformer-базиран модел.</a:t>
-            </a:r>
-          </a:p>
-          <a:p>
-            <a:pPr>
-              <a:spcAft>
-                <a:spcPts val="1000"/>
-              </a:spcAft>
-              <a:defRPr sz="2100">
-                <a:latin typeface="Calibri"/>
-              </a:defRPr>
-            </a:pPr>
-            <a:r>
-              <a:t>Могат да се добавят повече данни, по-дълго обучение и по-подробна ръчна оценка на генерираните описания.</a:t>
+            <a:off x="822960" y="1234440"/>
+            <a:ext cx="10607040" cy="5074920"/>
+          </a:xfrm>
+          <a:prstGeom prst="rect">
+            <a:avLst/>
+          </a:prstGeom>
+          <a:noFill/>
+        </p:spPr>
+        <p:txBody>
+          <a:bodyPr wrap="square" lIns="45720" rIns="45720">
+            <a:spAutoFit/>
+          </a:bodyPr>
+          <a:lstStyle/>
+          <a:p>
+            <a:pPr>
+              <a:spcAft>
+                <a:spcPts val="1000"/>
+              </a:spcAft>
+              <a:defRPr sz="2000">
+                <a:latin typeface="Calibri"/>
+              </a:defRPr>
+            </a:pPr>
+            <a:r>
+              <a:t>Captions ги почиствам и разделям на tokens.</a:t>
+            </a:r>
+          </a:p>
+          <a:p>
+            <a:pPr>
+              <a:spcAft>
+                <a:spcPts val="1000"/>
+              </a:spcAft>
+              <a:defRPr sz="2000">
+                <a:latin typeface="Calibri"/>
+              </a:defRPr>
+            </a:pPr>
+            <a:r>
+              <a:t>Vocabulary го изграждам само върху train split-а.</a:t>
+            </a:r>
+          </a:p>
+          <a:p>
+            <a:pPr>
+              <a:spcAft>
+                <a:spcPts val="1000"/>
+              </a:spcAft>
+              <a:defRPr sz="2000">
+                <a:latin typeface="Calibri"/>
+              </a:defRPr>
+            </a:pPr>
+            <a:r>
+              <a:t>Редките думи ги заменям с `&lt;unk&gt;`, за да не стане речникът прекалено шумен.</a:t>
+            </a:r>
+          </a:p>
+          <a:p>
+            <a:pPr>
+              <a:spcAft>
+                <a:spcPts val="1000"/>
+              </a:spcAft>
+              <a:defRPr sz="2000">
+                <a:latin typeface="Calibri"/>
+              </a:defRPr>
+            </a:pPr>
+            <a:r>
+              <a:t>Добавих специални tokens: `&lt;pad&gt;`, `&lt;start&gt;`, `&lt;end&gt;` и `&lt;unk&gt;`.</a:t>
+            </a:r>
+          </a:p>
+          <a:p>
+            <a:pPr>
+              <a:spcAft>
+                <a:spcPts val="1000"/>
+              </a:spcAft>
+              <a:defRPr sz="2000">
+                <a:latin typeface="Calibri"/>
+              </a:defRPr>
+            </a:pPr>
+            <a:r>
+              <a:t>В основния модел думите се представят чрез обучаем Embedding слой.</a:t>
             </a:r>
           </a:p>
         </p:txBody>
@@ -4732,8 +4787,8 @@
         </p:nvSpPr>
         <p:spPr>
           <a:xfrm>
-            <a:off x="548640" y="6473952"/>
-            <a:ext cx="5486400" cy="228600"/>
+            <a:off x="502920" y="6473952"/>
+            <a:ext cx="7772400" cy="228600"/>
           </a:xfrm>
           <a:prstGeom prst="rect">
             <a:avLst/>
@@ -4764,8 +4819,8 @@
         </p:nvSpPr>
         <p:spPr>
           <a:xfrm>
-            <a:off x="10972800" y="6473952"/>
-            <a:ext cx="640080" cy="228600"/>
+            <a:off x="10789920" y="6473952"/>
+            <a:ext cx="822960" cy="228600"/>
           </a:xfrm>
           <a:prstGeom prst="rect">
             <a:avLst/>
@@ -4783,7 +4838,978 @@
               <a:rPr sz="800" b="0" i="0">
                 <a:latin typeface="Calibri"/>
               </a:rPr>
-              <a:t>15/15</a:t>
+              <a:t>15/31</a:t>
+            </a:r>
+          </a:p>
+        </p:txBody>
+      </p:sp>
+    </p:spTree>
+  </p:cSld>
+  <p:clrMapOvr>
+    <a:masterClrMapping/>
+  </p:clrMapOvr>
+</p:sld>
+</file>
+
+<file path=ppt/slides/slide16.xml><?xml version="1.0" encoding="utf-8"?>
+<p:sld xmlns:a="http://schemas.openxmlformats.org/drawingml/2006/main" xmlns:p="http://schemas.openxmlformats.org/presentationml/2006/main" xmlns:r="http://schemas.openxmlformats.org/officeDocument/2006/relationships">
+  <p:cSld>
+    <p:spTree>
+      <p:nvGrpSpPr>
+        <p:cNvPr id="1" name=""/>
+        <p:cNvGrpSpPr/>
+        <p:nvPr/>
+      </p:nvGrpSpPr>
+      <p:grpSpPr/>
+      <p:sp>
+        <p:nvSpPr>
+          <p:cNvPr id="2" name="TextBox 1"/>
+          <p:cNvSpPr txBox="1"/>
+          <p:nvPr/>
+        </p:nvSpPr>
+        <p:spPr>
+          <a:xfrm>
+            <a:off x="594360" y="347472"/>
+            <a:ext cx="11064240" cy="457200"/>
+          </a:xfrm>
+          <a:prstGeom prst="rect">
+            <a:avLst/>
+          </a:prstGeom>
+          <a:noFill/>
+        </p:spPr>
+        <p:txBody>
+          <a:bodyPr wrap="none">
+            <a:spAutoFit/>
+          </a:bodyPr>
+          <a:lstStyle/>
+          <a:p>
+            <a:r>
+              <a:rPr sz="2500" b="1" i="0">
+                <a:latin typeface="Calibri"/>
+              </a:rPr>
+              <a:t>Архитектура на модела</a:t>
+            </a:r>
+          </a:p>
+        </p:txBody>
+      </p:sp>
+      <p:sp>
+        <p:nvSpPr>
+          <p:cNvPr id="3" name="Rectangle 2"/>
+          <p:cNvSpPr/>
+          <p:nvPr/>
+        </p:nvSpPr>
+        <p:spPr>
+          <a:xfrm>
+            <a:off x="594360" y="932688"/>
+            <a:ext cx="10972800" cy="18288"/>
+          </a:xfrm>
+          <a:prstGeom prst="rect">
+            <a:avLst/>
+          </a:prstGeom>
+          <a:solidFill>
+            <a:srgbClr val="000000"/>
+          </a:solidFill>
+          <a:ln>
+            <a:solidFill>
+              <a:srgbClr val="000000"/>
+            </a:solidFill>
+          </a:ln>
+        </p:spPr>
+        <p:style>
+          <a:lnRef idx="1">
+            <a:schemeClr val="accent1"/>
+          </a:lnRef>
+          <a:fillRef idx="3">
+            <a:schemeClr val="accent1"/>
+          </a:fillRef>
+          <a:effectRef idx="2">
+            <a:schemeClr val="accent1"/>
+          </a:effectRef>
+          <a:fontRef idx="minor">
+            <a:schemeClr val="lt1"/>
+          </a:fontRef>
+        </p:style>
+        <p:txBody>
+          <a:bodyPr rtlCol="0" anchor="ctr"/>
+          <a:lstStyle/>
+          <a:p>
+            <a:pPr algn="ctr"/>
+          </a:p>
+        </p:txBody>
+      </p:sp>
+      <p:sp>
+        <p:nvSpPr>
+          <p:cNvPr id="4" name="TextBox 3"/>
+          <p:cNvSpPr txBox="1"/>
+          <p:nvPr/>
+        </p:nvSpPr>
+        <p:spPr>
+          <a:xfrm>
+            <a:off x="822960" y="1234440"/>
+            <a:ext cx="10607040" cy="5074920"/>
+          </a:xfrm>
+          <a:prstGeom prst="rect">
+            <a:avLst/>
+          </a:prstGeom>
+          <a:noFill/>
+        </p:spPr>
+        <p:txBody>
+          <a:bodyPr wrap="square" lIns="45720" rIns="45720">
+            <a:spAutoFit/>
+          </a:bodyPr>
+          <a:lstStyle/>
+          <a:p>
+            <a:pPr>
+              <a:spcAft>
+                <a:spcPts val="1000"/>
+              </a:spcAft>
+              <a:defRPr sz="2000">
+                <a:latin typeface="Calibri"/>
+              </a:defRPr>
+            </a:pPr>
+            <a:r>
+              <a:t>Моделът има две основни части: encoder и decoder.</a:t>
+            </a:r>
+          </a:p>
+          <a:p>
+            <a:pPr>
+              <a:spcAft>
+                <a:spcPts val="1000"/>
+              </a:spcAft>
+              <a:defRPr sz="2000">
+                <a:latin typeface="Calibri"/>
+              </a:defRPr>
+            </a:pPr>
+            <a:r>
+              <a:t>Encoder-ът е VGG16 и извлича features от изображението.</a:t>
+            </a:r>
+          </a:p>
+          <a:p>
+            <a:pPr>
+              <a:spcAft>
+                <a:spcPts val="1000"/>
+              </a:spcAft>
+              <a:defRPr sz="2000">
+                <a:latin typeface="Calibri"/>
+              </a:defRPr>
+            </a:pPr>
+            <a:r>
+              <a:t>Decoder-ът е LSTM и генерира caption последователно.</a:t>
+            </a:r>
+          </a:p>
+          <a:p>
+            <a:pPr>
+              <a:spcAft>
+                <a:spcPts val="1000"/>
+              </a:spcAft>
+              <a:defRPr sz="2000">
+                <a:latin typeface="Calibri"/>
+              </a:defRPr>
+            </a:pPr>
+            <a:r>
+              <a:t>На всяка стъпка LSTM предсказва коя е следващата дума.</a:t>
+            </a:r>
+          </a:p>
+          <a:p>
+            <a:pPr>
+              <a:spcAft>
+                <a:spcPts val="1000"/>
+              </a:spcAft>
+              <a:defRPr sz="2000">
+                <a:latin typeface="Calibri"/>
+              </a:defRPr>
+            </a:pPr>
+            <a:r>
+              <a:t>Loss функцията е cross-entropy върху следващата дума в caption-а.</a:t>
+            </a:r>
+          </a:p>
+        </p:txBody>
+      </p:sp>
+      <p:sp>
+        <p:nvSpPr>
+          <p:cNvPr id="5" name="TextBox 4"/>
+          <p:cNvSpPr txBox="1"/>
+          <p:nvPr/>
+        </p:nvSpPr>
+        <p:spPr>
+          <a:xfrm>
+            <a:off x="502920" y="6473952"/>
+            <a:ext cx="7772400" cy="228600"/>
+          </a:xfrm>
+          <a:prstGeom prst="rect">
+            <a:avLst/>
+          </a:prstGeom>
+          <a:noFill/>
+        </p:spPr>
+        <p:txBody>
+          <a:bodyPr wrap="none">
+            <a:spAutoFit/>
+          </a:bodyPr>
+          <a:lstStyle/>
+          <a:p>
+            <a:pPr algn="l"/>
+            <a:r>
+              <a:rPr sz="800" b="0" i="1">
+                <a:latin typeface="Calibri"/>
+              </a:rPr>
+              <a:t>Генериране на описание за изображение</a:t>
+            </a:r>
+          </a:p>
+        </p:txBody>
+      </p:sp>
+      <p:sp>
+        <p:nvSpPr>
+          <p:cNvPr id="6" name="TextBox 5"/>
+          <p:cNvSpPr txBox="1"/>
+          <p:nvPr/>
+        </p:nvSpPr>
+        <p:spPr>
+          <a:xfrm>
+            <a:off x="10789920" y="6473952"/>
+            <a:ext cx="822960" cy="228600"/>
+          </a:xfrm>
+          <a:prstGeom prst="rect">
+            <a:avLst/>
+          </a:prstGeom>
+          <a:noFill/>
+        </p:spPr>
+        <p:txBody>
+          <a:bodyPr wrap="none">
+            <a:spAutoFit/>
+          </a:bodyPr>
+          <a:lstStyle/>
+          <a:p>
+            <a:pPr algn="r"/>
+            <a:r>
+              <a:rPr sz="800" b="0" i="0">
+                <a:latin typeface="Calibri"/>
+              </a:rPr>
+              <a:t>16/31</a:t>
+            </a:r>
+          </a:p>
+        </p:txBody>
+      </p:sp>
+    </p:spTree>
+  </p:cSld>
+  <p:clrMapOvr>
+    <a:masterClrMapping/>
+  </p:clrMapOvr>
+</p:sld>
+</file>
+
+<file path=ppt/slides/slide17.xml><?xml version="1.0" encoding="utf-8"?>
+<p:sld xmlns:a="http://schemas.openxmlformats.org/drawingml/2006/main" xmlns:p="http://schemas.openxmlformats.org/presentationml/2006/main" xmlns:r="http://schemas.openxmlformats.org/officeDocument/2006/relationships">
+  <p:cSld>
+    <p:spTree>
+      <p:nvGrpSpPr>
+        <p:cNvPr id="1" name=""/>
+        <p:cNvGrpSpPr/>
+        <p:nvPr/>
+      </p:nvGrpSpPr>
+      <p:grpSpPr/>
+      <p:sp>
+        <p:nvSpPr>
+          <p:cNvPr id="2" name="TextBox 1"/>
+          <p:cNvSpPr txBox="1"/>
+          <p:nvPr/>
+        </p:nvSpPr>
+        <p:spPr>
+          <a:xfrm>
+            <a:off x="594360" y="347472"/>
+            <a:ext cx="11064240" cy="457200"/>
+          </a:xfrm>
+          <a:prstGeom prst="rect">
+            <a:avLst/>
+          </a:prstGeom>
+          <a:noFill/>
+        </p:spPr>
+        <p:txBody>
+          <a:bodyPr wrap="none">
+            <a:spAutoFit/>
+          </a:bodyPr>
+          <a:lstStyle/>
+          <a:p>
+            <a:r>
+              <a:rPr sz="2500" b="1" i="0">
+                <a:latin typeface="Calibri"/>
+              </a:rPr>
+              <a:t>Защо кеширах VGG features</a:t>
+            </a:r>
+          </a:p>
+        </p:txBody>
+      </p:sp>
+      <p:sp>
+        <p:nvSpPr>
+          <p:cNvPr id="3" name="Rectangle 2"/>
+          <p:cNvSpPr/>
+          <p:nvPr/>
+        </p:nvSpPr>
+        <p:spPr>
+          <a:xfrm>
+            <a:off x="594360" y="932688"/>
+            <a:ext cx="10972800" cy="18288"/>
+          </a:xfrm>
+          <a:prstGeom prst="rect">
+            <a:avLst/>
+          </a:prstGeom>
+          <a:solidFill>
+            <a:srgbClr val="000000"/>
+          </a:solidFill>
+          <a:ln>
+            <a:solidFill>
+              <a:srgbClr val="000000"/>
+            </a:solidFill>
+          </a:ln>
+        </p:spPr>
+        <p:style>
+          <a:lnRef idx="1">
+            <a:schemeClr val="accent1"/>
+          </a:lnRef>
+          <a:fillRef idx="3">
+            <a:schemeClr val="accent1"/>
+          </a:fillRef>
+          <a:effectRef idx="2">
+            <a:schemeClr val="accent1"/>
+          </a:effectRef>
+          <a:fontRef idx="minor">
+            <a:schemeClr val="lt1"/>
+          </a:fontRef>
+        </p:style>
+        <p:txBody>
+          <a:bodyPr rtlCol="0" anchor="ctr"/>
+          <a:lstStyle/>
+          <a:p>
+            <a:pPr algn="ctr"/>
+          </a:p>
+        </p:txBody>
+      </p:sp>
+      <p:sp>
+        <p:nvSpPr>
+          <p:cNvPr id="4" name="TextBox 3"/>
+          <p:cNvSpPr txBox="1"/>
+          <p:nvPr/>
+        </p:nvSpPr>
+        <p:spPr>
+          <a:xfrm>
+            <a:off x="822960" y="1234440"/>
+            <a:ext cx="10607040" cy="5074920"/>
+          </a:xfrm>
+          <a:prstGeom prst="rect">
+            <a:avLst/>
+          </a:prstGeom>
+          <a:noFill/>
+        </p:spPr>
+        <p:txBody>
+          <a:bodyPr wrap="square" lIns="45720" rIns="45720">
+            <a:spAutoFit/>
+          </a:bodyPr>
+          <a:lstStyle/>
+          <a:p>
+            <a:pPr>
+              <a:spcAft>
+                <a:spcPts val="1000"/>
+              </a:spcAft>
+              <a:defRPr sz="2000">
+                <a:latin typeface="Calibri"/>
+              </a:defRPr>
+            </a:pPr>
+            <a:r>
+              <a:t>VGG16 е тежката част от модела и забавя обучението.</a:t>
+            </a:r>
+          </a:p>
+          <a:p>
+            <a:pPr>
+              <a:spcAft>
+                <a:spcPts val="1000"/>
+              </a:spcAft>
+              <a:defRPr sz="2000">
+                <a:latin typeface="Calibri"/>
+              </a:defRPr>
+            </a:pPr>
+            <a:r>
+              <a:t>Понеже използвам замразен VGG16, features за всяка снимка могат да се изчислят предварително.</a:t>
+            </a:r>
+          </a:p>
+          <a:p>
+            <a:pPr>
+              <a:spcAft>
+                <a:spcPts val="1000"/>
+              </a:spcAft>
+              <a:defRPr sz="2000">
+                <a:latin typeface="Calibri"/>
+              </a:defRPr>
+            </a:pPr>
+            <a:r>
+              <a:t>Така при training не се налага всеки път да минавам цялото изображение през VGG16.</a:t>
+            </a:r>
+          </a:p>
+          <a:p>
+            <a:pPr>
+              <a:spcAft>
+                <a:spcPts val="1000"/>
+              </a:spcAft>
+              <a:defRPr sz="2000">
+                <a:latin typeface="Calibri"/>
+              </a:defRPr>
+            </a:pPr>
+            <a:r>
+              <a:t>Това ми даде възможност по-бързо да пробвам различни LSTM варианти.</a:t>
+            </a:r>
+          </a:p>
+        </p:txBody>
+      </p:sp>
+      <p:sp>
+        <p:nvSpPr>
+          <p:cNvPr id="5" name="TextBox 4"/>
+          <p:cNvSpPr txBox="1"/>
+          <p:nvPr/>
+        </p:nvSpPr>
+        <p:spPr>
+          <a:xfrm>
+            <a:off x="502920" y="6473952"/>
+            <a:ext cx="7772400" cy="228600"/>
+          </a:xfrm>
+          <a:prstGeom prst="rect">
+            <a:avLst/>
+          </a:prstGeom>
+          <a:noFill/>
+        </p:spPr>
+        <p:txBody>
+          <a:bodyPr wrap="none">
+            <a:spAutoFit/>
+          </a:bodyPr>
+          <a:lstStyle/>
+          <a:p>
+            <a:pPr algn="l"/>
+            <a:r>
+              <a:rPr sz="800" b="0" i="1">
+                <a:latin typeface="Calibri"/>
+              </a:rPr>
+              <a:t>Генериране на описание за изображение</a:t>
+            </a:r>
+          </a:p>
+        </p:txBody>
+      </p:sp>
+      <p:sp>
+        <p:nvSpPr>
+          <p:cNvPr id="6" name="TextBox 5"/>
+          <p:cNvSpPr txBox="1"/>
+          <p:nvPr/>
+        </p:nvSpPr>
+        <p:spPr>
+          <a:xfrm>
+            <a:off x="10789920" y="6473952"/>
+            <a:ext cx="822960" cy="228600"/>
+          </a:xfrm>
+          <a:prstGeom prst="rect">
+            <a:avLst/>
+          </a:prstGeom>
+          <a:noFill/>
+        </p:spPr>
+        <p:txBody>
+          <a:bodyPr wrap="none">
+            <a:spAutoFit/>
+          </a:bodyPr>
+          <a:lstStyle/>
+          <a:p>
+            <a:pPr algn="r"/>
+            <a:r>
+              <a:rPr sz="800" b="0" i="0">
+                <a:latin typeface="Calibri"/>
+              </a:rPr>
+              <a:t>17/31</a:t>
+            </a:r>
+          </a:p>
+        </p:txBody>
+      </p:sp>
+    </p:spTree>
+  </p:cSld>
+  <p:clrMapOvr>
+    <a:masterClrMapping/>
+  </p:clrMapOvr>
+</p:sld>
+</file>
+
+<file path=ppt/slides/slide18.xml><?xml version="1.0" encoding="utf-8"?>
+<p:sld xmlns:a="http://schemas.openxmlformats.org/drawingml/2006/main" xmlns:p="http://schemas.openxmlformats.org/presentationml/2006/main" xmlns:r="http://schemas.openxmlformats.org/officeDocument/2006/relationships">
+  <p:cSld>
+    <p:spTree>
+      <p:nvGrpSpPr>
+        <p:cNvPr id="1" name=""/>
+        <p:cNvGrpSpPr/>
+        <p:nvPr/>
+      </p:nvGrpSpPr>
+      <p:grpSpPr/>
+      <p:sp>
+        <p:nvSpPr>
+          <p:cNvPr id="2" name="TextBox 1"/>
+          <p:cNvSpPr txBox="1"/>
+          <p:nvPr/>
+        </p:nvSpPr>
+        <p:spPr>
+          <a:xfrm>
+            <a:off x="594360" y="347472"/>
+            <a:ext cx="11064240" cy="457200"/>
+          </a:xfrm>
+          <a:prstGeom prst="rect">
+            <a:avLst/>
+          </a:prstGeom>
+          <a:noFill/>
+        </p:spPr>
+        <p:txBody>
+          <a:bodyPr wrap="none">
+            <a:spAutoFit/>
+          </a:bodyPr>
+          <a:lstStyle/>
+          <a:p>
+            <a:r>
+              <a:rPr sz="2500" b="1" i="0">
+                <a:latin typeface="Calibri"/>
+              </a:rPr>
+              <a:t>Обучение на модела</a:t>
+            </a:r>
+          </a:p>
+        </p:txBody>
+      </p:sp>
+      <p:sp>
+        <p:nvSpPr>
+          <p:cNvPr id="3" name="Rectangle 2"/>
+          <p:cNvSpPr/>
+          <p:nvPr/>
+        </p:nvSpPr>
+        <p:spPr>
+          <a:xfrm>
+            <a:off x="594360" y="932688"/>
+            <a:ext cx="10972800" cy="18288"/>
+          </a:xfrm>
+          <a:prstGeom prst="rect">
+            <a:avLst/>
+          </a:prstGeom>
+          <a:solidFill>
+            <a:srgbClr val="000000"/>
+          </a:solidFill>
+          <a:ln>
+            <a:solidFill>
+              <a:srgbClr val="000000"/>
+            </a:solidFill>
+          </a:ln>
+        </p:spPr>
+        <p:style>
+          <a:lnRef idx="1">
+            <a:schemeClr val="accent1"/>
+          </a:lnRef>
+          <a:fillRef idx="3">
+            <a:schemeClr val="accent1"/>
+          </a:fillRef>
+          <a:effectRef idx="2">
+            <a:schemeClr val="accent1"/>
+          </a:effectRef>
+          <a:fontRef idx="minor">
+            <a:schemeClr val="lt1"/>
+          </a:fontRef>
+        </p:style>
+        <p:txBody>
+          <a:bodyPr rtlCol="0" anchor="ctr"/>
+          <a:lstStyle/>
+          <a:p>
+            <a:pPr algn="ctr"/>
+          </a:p>
+        </p:txBody>
+      </p:sp>
+      <p:sp>
+        <p:nvSpPr>
+          <p:cNvPr id="4" name="TextBox 3"/>
+          <p:cNvSpPr txBox="1"/>
+          <p:nvPr/>
+        </p:nvSpPr>
+        <p:spPr>
+          <a:xfrm>
+            <a:off x="822960" y="1234440"/>
+            <a:ext cx="10607040" cy="5074920"/>
+          </a:xfrm>
+          <a:prstGeom prst="rect">
+            <a:avLst/>
+          </a:prstGeom>
+          <a:noFill/>
+        </p:spPr>
+        <p:txBody>
+          <a:bodyPr wrap="square" lIns="45720" rIns="45720">
+            <a:spAutoFit/>
+          </a:bodyPr>
+          <a:lstStyle/>
+          <a:p>
+            <a:pPr>
+              <a:spcAft>
+                <a:spcPts val="1000"/>
+              </a:spcAft>
+              <a:defRPr sz="2000">
+                <a:latin typeface="Calibri"/>
+              </a:defRPr>
+            </a:pPr>
+            <a:r>
+              <a:t>Запазвам най-добрия модел в `checkpoints/best_model.pt`.</a:t>
+            </a:r>
+          </a:p>
+          <a:p>
+            <a:pPr>
+              <a:spcAft>
+                <a:spcPts val="1000"/>
+              </a:spcAft>
+              <a:defRPr sz="2000">
+                <a:latin typeface="Calibri"/>
+              </a:defRPr>
+            </a:pPr>
+            <a:r>
+              <a:t>Най-добрият checkpoint го избирам по validation loss.</a:t>
+            </a:r>
+          </a:p>
+          <a:p>
+            <a:pPr>
+              <a:spcAft>
+                <a:spcPts val="1000"/>
+              </a:spcAft>
+              <a:defRPr sz="2000">
+                <a:latin typeface="Calibri"/>
+              </a:defRPr>
+            </a:pPr>
+            <a:r>
+              <a:t>Използвах gradient clipping, scheduler и early stopping.</a:t>
+            </a:r>
+          </a:p>
+          <a:p>
+            <a:pPr>
+              <a:spcAft>
+                <a:spcPts val="1000"/>
+              </a:spcAft>
+              <a:defRPr sz="2000">
+                <a:latin typeface="Calibri"/>
+              </a:defRPr>
+            </a:pPr>
+            <a:r>
+              <a:t>След първоначалното обучение направих resume training с по-нисък learning rate.</a:t>
+            </a:r>
+          </a:p>
+          <a:p>
+            <a:pPr>
+              <a:spcAft>
+                <a:spcPts val="1000"/>
+              </a:spcAft>
+              <a:defRPr sz="2000">
+                <a:latin typeface="Calibri"/>
+              </a:defRPr>
+            </a:pPr>
+            <a:r>
+              <a:t>Най-добрият резултат остана от epoch 5, защото след това validation loss започна да се влошава.</a:t>
+            </a:r>
+          </a:p>
+        </p:txBody>
+      </p:sp>
+      <p:sp>
+        <p:nvSpPr>
+          <p:cNvPr id="5" name="TextBox 4"/>
+          <p:cNvSpPr txBox="1"/>
+          <p:nvPr/>
+        </p:nvSpPr>
+        <p:spPr>
+          <a:xfrm>
+            <a:off x="502920" y="6473952"/>
+            <a:ext cx="7772400" cy="228600"/>
+          </a:xfrm>
+          <a:prstGeom prst="rect">
+            <a:avLst/>
+          </a:prstGeom>
+          <a:noFill/>
+        </p:spPr>
+        <p:txBody>
+          <a:bodyPr wrap="none">
+            <a:spAutoFit/>
+          </a:bodyPr>
+          <a:lstStyle/>
+          <a:p>
+            <a:pPr algn="l"/>
+            <a:r>
+              <a:rPr sz="800" b="0" i="1">
+                <a:latin typeface="Calibri"/>
+              </a:rPr>
+              <a:t>Генериране на описание за изображение</a:t>
+            </a:r>
+          </a:p>
+        </p:txBody>
+      </p:sp>
+      <p:sp>
+        <p:nvSpPr>
+          <p:cNvPr id="6" name="TextBox 5"/>
+          <p:cNvSpPr txBox="1"/>
+          <p:nvPr/>
+        </p:nvSpPr>
+        <p:spPr>
+          <a:xfrm>
+            <a:off x="10789920" y="6473952"/>
+            <a:ext cx="822960" cy="228600"/>
+          </a:xfrm>
+          <a:prstGeom prst="rect">
+            <a:avLst/>
+          </a:prstGeom>
+          <a:noFill/>
+        </p:spPr>
+        <p:txBody>
+          <a:bodyPr wrap="none">
+            <a:spAutoFit/>
+          </a:bodyPr>
+          <a:lstStyle/>
+          <a:p>
+            <a:pPr algn="r"/>
+            <a:r>
+              <a:rPr sz="800" b="0" i="0">
+                <a:latin typeface="Calibri"/>
+              </a:rPr>
+              <a:t>18/31</a:t>
+            </a:r>
+          </a:p>
+        </p:txBody>
+      </p:sp>
+    </p:spTree>
+  </p:cSld>
+  <p:clrMapOvr>
+    <a:masterClrMapping/>
+  </p:clrMapOvr>
+</p:sld>
+</file>
+
+<file path=ppt/slides/slide19.xml><?xml version="1.0" encoding="utf-8"?>
+<p:sld xmlns:a="http://schemas.openxmlformats.org/drawingml/2006/main" xmlns:p="http://schemas.openxmlformats.org/presentationml/2006/main" xmlns:r="http://schemas.openxmlformats.org/officeDocument/2006/relationships">
+  <p:cSld>
+    <p:spTree>
+      <p:nvGrpSpPr>
+        <p:cNvPr id="1" name=""/>
+        <p:cNvGrpSpPr/>
+        <p:nvPr/>
+      </p:nvGrpSpPr>
+      <p:grpSpPr/>
+      <p:sp>
+        <p:nvSpPr>
+          <p:cNvPr id="2" name="TextBox 1"/>
+          <p:cNvSpPr txBox="1"/>
+          <p:nvPr/>
+        </p:nvSpPr>
+        <p:spPr>
+          <a:xfrm>
+            <a:off x="594360" y="347472"/>
+            <a:ext cx="11064240" cy="457200"/>
+          </a:xfrm>
+          <a:prstGeom prst="rect">
+            <a:avLst/>
+          </a:prstGeom>
+          <a:noFill/>
+        </p:spPr>
+        <p:txBody>
+          <a:bodyPr wrap="none">
+            <a:spAutoFit/>
+          </a:bodyPr>
+          <a:lstStyle/>
+          <a:p>
+            <a:r>
+              <a:rPr sz="2500" b="1" i="0">
+                <a:latin typeface="Calibri"/>
+              </a:rPr>
+              <a:t>Как оценявам резултатите</a:t>
+            </a:r>
+          </a:p>
+        </p:txBody>
+      </p:sp>
+      <p:sp>
+        <p:nvSpPr>
+          <p:cNvPr id="3" name="Rectangle 2"/>
+          <p:cNvSpPr/>
+          <p:nvPr/>
+        </p:nvSpPr>
+        <p:spPr>
+          <a:xfrm>
+            <a:off x="594360" y="932688"/>
+            <a:ext cx="10972800" cy="18288"/>
+          </a:xfrm>
+          <a:prstGeom prst="rect">
+            <a:avLst/>
+          </a:prstGeom>
+          <a:solidFill>
+            <a:srgbClr val="000000"/>
+          </a:solidFill>
+          <a:ln>
+            <a:solidFill>
+              <a:srgbClr val="000000"/>
+            </a:solidFill>
+          </a:ln>
+        </p:spPr>
+        <p:style>
+          <a:lnRef idx="1">
+            <a:schemeClr val="accent1"/>
+          </a:lnRef>
+          <a:fillRef idx="3">
+            <a:schemeClr val="accent1"/>
+          </a:fillRef>
+          <a:effectRef idx="2">
+            <a:schemeClr val="accent1"/>
+          </a:effectRef>
+          <a:fontRef idx="minor">
+            <a:schemeClr val="lt1"/>
+          </a:fontRef>
+        </p:style>
+        <p:txBody>
+          <a:bodyPr rtlCol="0" anchor="ctr"/>
+          <a:lstStyle/>
+          <a:p>
+            <a:pPr algn="ctr"/>
+          </a:p>
+        </p:txBody>
+      </p:sp>
+      <p:sp>
+        <p:nvSpPr>
+          <p:cNvPr id="4" name="TextBox 3"/>
+          <p:cNvSpPr txBox="1"/>
+          <p:nvPr/>
+        </p:nvSpPr>
+        <p:spPr>
+          <a:xfrm>
+            <a:off x="822960" y="1234440"/>
+            <a:ext cx="10607040" cy="5074920"/>
+          </a:xfrm>
+          <a:prstGeom prst="rect">
+            <a:avLst/>
+          </a:prstGeom>
+          <a:noFill/>
+        </p:spPr>
+        <p:txBody>
+          <a:bodyPr wrap="square" lIns="45720" rIns="45720">
+            <a:spAutoFit/>
+          </a:bodyPr>
+          <a:lstStyle/>
+          <a:p>
+            <a:pPr>
+              <a:spcAft>
+                <a:spcPts val="1000"/>
+              </a:spcAft>
+              <a:defRPr sz="2000">
+                <a:latin typeface="Calibri"/>
+              </a:defRPr>
+            </a:pPr>
+            <a:r>
+              <a:t>Първо гледам test loss, за да видя как се държи моделът върху невиждани изображения.</a:t>
+            </a:r>
+          </a:p>
+          <a:p>
+            <a:pPr>
+              <a:spcAft>
+                <a:spcPts val="1000"/>
+              </a:spcAft>
+              <a:defRPr sz="2000">
+                <a:latin typeface="Calibri"/>
+              </a:defRPr>
+            </a:pPr>
+            <a:r>
+              <a:t>След това използвам BLEU-1, BLEU-4 и ROUGE-L.</a:t>
+            </a:r>
+          </a:p>
+          <a:p>
+            <a:pPr>
+              <a:spcAft>
+                <a:spcPts val="1000"/>
+              </a:spcAft>
+              <a:defRPr sz="2000">
+                <a:latin typeface="Calibri"/>
+              </a:defRPr>
+            </a:pPr>
+            <a:r>
+              <a:t>BLEU-1 е по-мека метрика, защото гледа съвпадения на отделни думи.</a:t>
+            </a:r>
+          </a:p>
+          <a:p>
+            <a:pPr>
+              <a:spcAft>
+                <a:spcPts val="1000"/>
+              </a:spcAft>
+              <a:defRPr sz="2000">
+                <a:latin typeface="Calibri"/>
+              </a:defRPr>
+            </a:pPr>
+            <a:r>
+              <a:t>BLEU-4 е по-строга, защото гледа по-дълги фрази.</a:t>
+            </a:r>
+          </a:p>
+          <a:p>
+            <a:pPr>
+              <a:spcAft>
+                <a:spcPts val="1000"/>
+              </a:spcAft>
+              <a:defRPr sz="2000">
+                <a:latin typeface="Calibri"/>
+              </a:defRPr>
+            </a:pPr>
+            <a:r>
+              <a:t>ROUGE-L сравнява последователността на думите чрез най-дълга обща подпоследователност.</a:t>
+            </a:r>
+          </a:p>
+        </p:txBody>
+      </p:sp>
+      <p:sp>
+        <p:nvSpPr>
+          <p:cNvPr id="5" name="TextBox 4"/>
+          <p:cNvSpPr txBox="1"/>
+          <p:nvPr/>
+        </p:nvSpPr>
+        <p:spPr>
+          <a:xfrm>
+            <a:off x="502920" y="6473952"/>
+            <a:ext cx="7772400" cy="228600"/>
+          </a:xfrm>
+          <a:prstGeom prst="rect">
+            <a:avLst/>
+          </a:prstGeom>
+          <a:noFill/>
+        </p:spPr>
+        <p:txBody>
+          <a:bodyPr wrap="none">
+            <a:spAutoFit/>
+          </a:bodyPr>
+          <a:lstStyle/>
+          <a:p>
+            <a:pPr algn="l"/>
+            <a:r>
+              <a:rPr sz="800" b="0" i="1">
+                <a:latin typeface="Calibri"/>
+              </a:rPr>
+              <a:t>Генериране на описание за изображение</a:t>
+            </a:r>
+          </a:p>
+        </p:txBody>
+      </p:sp>
+      <p:sp>
+        <p:nvSpPr>
+          <p:cNvPr id="6" name="TextBox 5"/>
+          <p:cNvSpPr txBox="1"/>
+          <p:nvPr/>
+        </p:nvSpPr>
+        <p:spPr>
+          <a:xfrm>
+            <a:off x="10789920" y="6473952"/>
+            <a:ext cx="822960" cy="228600"/>
+          </a:xfrm>
+          <a:prstGeom prst="rect">
+            <a:avLst/>
+          </a:prstGeom>
+          <a:noFill/>
+        </p:spPr>
+        <p:txBody>
+          <a:bodyPr wrap="none">
+            <a:spAutoFit/>
+          </a:bodyPr>
+          <a:lstStyle/>
+          <a:p>
+            <a:pPr algn="r"/>
+            <a:r>
+              <a:rPr sz="800" b="0" i="0">
+                <a:latin typeface="Calibri"/>
+              </a:rPr>
+              <a:t>19/31</a:t>
             </a:r>
           </a:p>
         </p:txBody>
@@ -4814,8 +5840,8 @@
         </p:nvSpPr>
         <p:spPr>
           <a:xfrm>
-            <a:off x="640080" y="411480"/>
-            <a:ext cx="10972800" cy="502920"/>
+            <a:off x="594360" y="347472"/>
+            <a:ext cx="11064240" cy="457200"/>
           </a:xfrm>
           <a:prstGeom prst="rect">
             <a:avLst/>
@@ -4828,12 +5854,11 @@
           </a:bodyPr>
           <a:lstStyle/>
           <a:p>
-            <a:pPr algn="l"/>
-            <a:r>
-              <a:rPr sz="2600" b="1" i="0">
+            <a:r>
+              <a:rPr sz="2500" b="1" i="0">
                 <a:latin typeface="Calibri"/>
               </a:rPr>
-              <a:t>Съдържание</a:t>
+              <a:t>Какво ще покажа</a:t>
             </a:r>
           </a:p>
         </p:txBody>
@@ -4846,8 +5871,8 @@
         </p:nvSpPr>
         <p:spPr>
           <a:xfrm>
-            <a:off x="640080" y="1005840"/>
-            <a:ext cx="10881360" cy="9144"/>
+            <a:off x="594360" y="932688"/>
+            <a:ext cx="10972800" cy="18288"/>
           </a:xfrm>
           <a:prstGeom prst="rect">
             <a:avLst/>
@@ -4891,82 +5916,69 @@
         </p:nvSpPr>
         <p:spPr>
           <a:xfrm>
-            <a:off x="868680" y="1325880"/>
-            <a:ext cx="10424160" cy="4754880"/>
-          </a:xfrm>
-          <a:prstGeom prst="rect">
-            <a:avLst/>
-          </a:prstGeom>
-          <a:noFill/>
-        </p:spPr>
-        <p:txBody>
-          <a:bodyPr wrap="square">
-            <a:spAutoFit/>
-          </a:bodyPr>
-          <a:lstStyle/>
-          <a:p>
-            <a:pPr>
-              <a:spcAft>
-                <a:spcPts val="1000"/>
-              </a:spcAft>
-              <a:defRPr sz="2100">
-                <a:latin typeface="Calibri"/>
-              </a:defRPr>
-            </a:pPr>
-            <a:r>
-              <a:t>Цел на проекта и описание на задачата</a:t>
-            </a:r>
-          </a:p>
-          <a:p>
-            <a:pPr>
-              <a:spcAft>
-                <a:spcPts val="1000"/>
-              </a:spcAft>
-              <a:defRPr sz="2100">
-                <a:latin typeface="Calibri"/>
-              </a:defRPr>
-            </a:pPr>
-            <a:r>
-              <a:t>Използван набор от данни</a:t>
-            </a:r>
-          </a:p>
-          <a:p>
-            <a:pPr>
-              <a:spcAft>
-                <a:spcPts val="1000"/>
-              </a:spcAft>
-              <a:defRPr sz="2100">
-                <a:latin typeface="Calibri"/>
-              </a:defRPr>
-            </a:pPr>
-            <a:r>
-              <a:t>Разглеждане и предварителна обработка на данните</a:t>
-            </a:r>
-          </a:p>
-          <a:p>
-            <a:pPr>
-              <a:spcAft>
-                <a:spcPts val="1000"/>
-              </a:spcAft>
-              <a:defRPr sz="2100">
-                <a:latin typeface="Calibri"/>
-              </a:defRPr>
-            </a:pPr>
-            <a:r>
-              <a:t>Модел, обучение и експерименти</a:t>
-            </a:r>
-          </a:p>
-          <a:p>
-            <a:pPr>
-              <a:spcAft>
-                <a:spcPts val="1000"/>
-              </a:spcAft>
-              <a:defRPr sz="2100">
-                <a:latin typeface="Calibri"/>
-              </a:defRPr>
-            </a:pPr>
-            <a:r>
-              <a:t>Потребителски интерфейс, резултати и изводи</a:t>
+            <a:off x="822960" y="1234440"/>
+            <a:ext cx="10607040" cy="5074920"/>
+          </a:xfrm>
+          <a:prstGeom prst="rect">
+            <a:avLst/>
+          </a:prstGeom>
+          <a:noFill/>
+        </p:spPr>
+        <p:txBody>
+          <a:bodyPr wrap="square" lIns="45720" rIns="45720">
+            <a:spAutoFit/>
+          </a:bodyPr>
+          <a:lstStyle/>
+          <a:p>
+            <a:pPr>
+              <a:spcAft>
+                <a:spcPts val="1000"/>
+              </a:spcAft>
+              <a:defRPr sz="2000">
+                <a:latin typeface="Calibri"/>
+              </a:defRPr>
+            </a:pPr>
+            <a:r>
+              <a:t>Първо ще обясня каква е задачата и защо не е обикновена classification задача.</a:t>
+            </a:r>
+          </a:p>
+          <a:p>
+            <a:pPr>
+              <a:spcAft>
+                <a:spcPts val="1000"/>
+              </a:spcAft>
+              <a:defRPr sz="2000">
+                <a:latin typeface="Calibri"/>
+              </a:defRPr>
+            </a:pPr>
+            <a:r>
+              <a:t>След това ще покажа какви данни използвам и какво видях при EDA анализа.</a:t>
+            </a:r>
+          </a:p>
+          <a:p>
+            <a:pPr>
+              <a:spcAft>
+                <a:spcPts val="1000"/>
+              </a:spcAft>
+              <a:defRPr sz="2000">
+                <a:latin typeface="Calibri"/>
+              </a:defRPr>
+            </a:pPr>
+            <a:r>
+              <a:t>После минавам през preprocessing-а, модела и обучението.</a:t>
+            </a:r>
+          </a:p>
+          <a:p>
+            <a:pPr>
+              <a:spcAft>
+                <a:spcPts val="1000"/>
+              </a:spcAft>
+              <a:defRPr sz="2000">
+                <a:latin typeface="Calibri"/>
+              </a:defRPr>
+            </a:pPr>
+            <a:r>
+              <a:t>Накрая показвам резултатите, Streamlit приложението, ограниченията и идеите за подобрение.</a:t>
             </a:r>
           </a:p>
         </p:txBody>
@@ -4979,8 +5991,8 @@
         </p:nvSpPr>
         <p:spPr>
           <a:xfrm>
-            <a:off x="548640" y="6473952"/>
-            <a:ext cx="5486400" cy="228600"/>
+            <a:off x="502920" y="6473952"/>
+            <a:ext cx="7772400" cy="228600"/>
           </a:xfrm>
           <a:prstGeom prst="rect">
             <a:avLst/>
@@ -5011,8 +6023,8 @@
         </p:nvSpPr>
         <p:spPr>
           <a:xfrm>
-            <a:off x="10972800" y="6473952"/>
-            <a:ext cx="640080" cy="228600"/>
+            <a:off x="10789920" y="6473952"/>
+            <a:ext cx="822960" cy="228600"/>
           </a:xfrm>
           <a:prstGeom prst="rect">
             <a:avLst/>
@@ -5030,7 +6042,2454 @@
               <a:rPr sz="800" b="0" i="0">
                 <a:latin typeface="Calibri"/>
               </a:rPr>
-              <a:t>2/15</a:t>
+              <a:t>2/31</a:t>
+            </a:r>
+          </a:p>
+        </p:txBody>
+      </p:sp>
+    </p:spTree>
+  </p:cSld>
+  <p:clrMapOvr>
+    <a:masterClrMapping/>
+  </p:clrMapOvr>
+</p:sld>
+</file>
+
+<file path=ppt/slides/slide20.xml><?xml version="1.0" encoding="utf-8"?>
+<p:sld xmlns:a="http://schemas.openxmlformats.org/drawingml/2006/main" xmlns:p="http://schemas.openxmlformats.org/presentationml/2006/main" xmlns:r="http://schemas.openxmlformats.org/officeDocument/2006/relationships">
+  <p:cSld>
+    <p:spTree>
+      <p:nvGrpSpPr>
+        <p:cNvPr id="1" name=""/>
+        <p:cNvGrpSpPr/>
+        <p:nvPr/>
+      </p:nvGrpSpPr>
+      <p:grpSpPr/>
+      <p:sp>
+        <p:nvSpPr>
+          <p:cNvPr id="2" name="TextBox 1"/>
+          <p:cNvSpPr txBox="1"/>
+          <p:nvPr/>
+        </p:nvSpPr>
+        <p:spPr>
+          <a:xfrm>
+            <a:off x="594360" y="347472"/>
+            <a:ext cx="11064240" cy="457200"/>
+          </a:xfrm>
+          <a:prstGeom prst="rect">
+            <a:avLst/>
+          </a:prstGeom>
+          <a:noFill/>
+        </p:spPr>
+        <p:txBody>
+          <a:bodyPr wrap="none">
+            <a:spAutoFit/>
+          </a:bodyPr>
+          <a:lstStyle/>
+          <a:p>
+            <a:r>
+              <a:rPr sz="2500" b="1" i="0">
+                <a:latin typeface="Calibri"/>
+              </a:rPr>
+              <a:t>Получени резултати</a:t>
+            </a:r>
+          </a:p>
+        </p:txBody>
+      </p:sp>
+      <p:sp>
+        <p:nvSpPr>
+          <p:cNvPr id="3" name="Rectangle 2"/>
+          <p:cNvSpPr/>
+          <p:nvPr/>
+        </p:nvSpPr>
+        <p:spPr>
+          <a:xfrm>
+            <a:off x="594360" y="932688"/>
+            <a:ext cx="10972800" cy="18288"/>
+          </a:xfrm>
+          <a:prstGeom prst="rect">
+            <a:avLst/>
+          </a:prstGeom>
+          <a:solidFill>
+            <a:srgbClr val="000000"/>
+          </a:solidFill>
+          <a:ln>
+            <a:solidFill>
+              <a:srgbClr val="000000"/>
+            </a:solidFill>
+          </a:ln>
+        </p:spPr>
+        <p:style>
+          <a:lnRef idx="1">
+            <a:schemeClr val="accent1"/>
+          </a:lnRef>
+          <a:fillRef idx="3">
+            <a:schemeClr val="accent1"/>
+          </a:fillRef>
+          <a:effectRef idx="2">
+            <a:schemeClr val="accent1"/>
+          </a:effectRef>
+          <a:fontRef idx="minor">
+            <a:schemeClr val="lt1"/>
+          </a:fontRef>
+        </p:style>
+        <p:txBody>
+          <a:bodyPr rtlCol="0" anchor="ctr"/>
+          <a:lstStyle/>
+          <a:p>
+            <a:pPr algn="ctr"/>
+          </a:p>
+        </p:txBody>
+      </p:sp>
+      <p:sp>
+        <p:nvSpPr>
+          <p:cNvPr id="4" name="TextBox 3"/>
+          <p:cNvSpPr txBox="1"/>
+          <p:nvPr/>
+        </p:nvSpPr>
+        <p:spPr>
+          <a:xfrm>
+            <a:off x="822960" y="1234440"/>
+            <a:ext cx="10607040" cy="5074920"/>
+          </a:xfrm>
+          <a:prstGeom prst="rect">
+            <a:avLst/>
+          </a:prstGeom>
+          <a:noFill/>
+        </p:spPr>
+        <p:txBody>
+          <a:bodyPr wrap="square" lIns="45720" rIns="45720">
+            <a:spAutoFit/>
+          </a:bodyPr>
+          <a:lstStyle/>
+          <a:p>
+            <a:pPr>
+              <a:spcAft>
+                <a:spcPts val="600"/>
+              </a:spcAft>
+              <a:defRPr sz="1800">
+                <a:latin typeface="Calibri"/>
+              </a:defRPr>
+            </a:pPr>
+            <a:r>
+              <a:t>Validation loss получих 2.7857.</a:t>
+            </a:r>
+          </a:p>
+          <a:p>
+            <a:pPr>
+              <a:spcAft>
+                <a:spcPts val="600"/>
+              </a:spcAft>
+              <a:defRPr sz="1800">
+                <a:latin typeface="Calibri"/>
+              </a:defRPr>
+            </a:pPr>
+            <a:r>
+              <a:t>Test loss получих 2.7643.</a:t>
+            </a:r>
+          </a:p>
+          <a:p>
+            <a:pPr>
+              <a:spcAft>
+                <a:spcPts val="600"/>
+              </a:spcAft>
+              <a:defRPr sz="1800">
+                <a:latin typeface="Calibri"/>
+              </a:defRPr>
+            </a:pPr>
+            <a:r>
+              <a:t>BLEU-1 е 0.5386.</a:t>
+            </a:r>
+          </a:p>
+          <a:p>
+            <a:pPr>
+              <a:spcAft>
+                <a:spcPts val="600"/>
+              </a:spcAft>
+              <a:defRPr sz="1800">
+                <a:latin typeface="Calibri"/>
+              </a:defRPr>
+            </a:pPr>
+            <a:r>
+              <a:t>BLEU-4 е 0.1392.</a:t>
+            </a:r>
+          </a:p>
+          <a:p>
+            <a:pPr>
+              <a:spcAft>
+                <a:spcPts val="600"/>
+              </a:spcAft>
+              <a:defRPr sz="1800">
+                <a:latin typeface="Calibri"/>
+              </a:defRPr>
+            </a:pPr>
+            <a:r>
+              <a:t>ROUGE-L е 0.3918.</a:t>
+            </a:r>
+          </a:p>
+          <a:p>
+            <a:pPr>
+              <a:spcAft>
+                <a:spcPts val="600"/>
+              </a:spcAft>
+              <a:defRPr sz="1800">
+                <a:latin typeface="Calibri"/>
+              </a:defRPr>
+            </a:pPr>
+            <a:r>
+              <a:t>За мен това показва работещ baseline, но не модел, на който може да се вярва за всякакви произволни снимки.</a:t>
+            </a:r>
+          </a:p>
+        </p:txBody>
+      </p:sp>
+      <p:sp>
+        <p:nvSpPr>
+          <p:cNvPr id="5" name="TextBox 4"/>
+          <p:cNvSpPr txBox="1"/>
+          <p:nvPr/>
+        </p:nvSpPr>
+        <p:spPr>
+          <a:xfrm>
+            <a:off x="502920" y="6473952"/>
+            <a:ext cx="7772400" cy="228600"/>
+          </a:xfrm>
+          <a:prstGeom prst="rect">
+            <a:avLst/>
+          </a:prstGeom>
+          <a:noFill/>
+        </p:spPr>
+        <p:txBody>
+          <a:bodyPr wrap="none">
+            <a:spAutoFit/>
+          </a:bodyPr>
+          <a:lstStyle/>
+          <a:p>
+            <a:pPr algn="l"/>
+            <a:r>
+              <a:rPr sz="800" b="0" i="1">
+                <a:latin typeface="Calibri"/>
+              </a:rPr>
+              <a:t>Генериране на описание за изображение</a:t>
+            </a:r>
+          </a:p>
+        </p:txBody>
+      </p:sp>
+      <p:sp>
+        <p:nvSpPr>
+          <p:cNvPr id="6" name="TextBox 5"/>
+          <p:cNvSpPr txBox="1"/>
+          <p:nvPr/>
+        </p:nvSpPr>
+        <p:spPr>
+          <a:xfrm>
+            <a:off x="10789920" y="6473952"/>
+            <a:ext cx="822960" cy="228600"/>
+          </a:xfrm>
+          <a:prstGeom prst="rect">
+            <a:avLst/>
+          </a:prstGeom>
+          <a:noFill/>
+        </p:spPr>
+        <p:txBody>
+          <a:bodyPr wrap="none">
+            <a:spAutoFit/>
+          </a:bodyPr>
+          <a:lstStyle/>
+          <a:p>
+            <a:pPr algn="r"/>
+            <a:r>
+              <a:rPr sz="800" b="0" i="0">
+                <a:latin typeface="Calibri"/>
+              </a:rPr>
+              <a:t>20/31</a:t>
+            </a:r>
+          </a:p>
+        </p:txBody>
+      </p:sp>
+    </p:spTree>
+  </p:cSld>
+  <p:clrMapOvr>
+    <a:masterClrMapping/>
+  </p:clrMapOvr>
+</p:sld>
+</file>
+
+<file path=ppt/slides/slide21.xml><?xml version="1.0" encoding="utf-8"?>
+<p:sld xmlns:a="http://schemas.openxmlformats.org/drawingml/2006/main" xmlns:p="http://schemas.openxmlformats.org/presentationml/2006/main" xmlns:r="http://schemas.openxmlformats.org/officeDocument/2006/relationships">
+  <p:cSld>
+    <p:spTree>
+      <p:nvGrpSpPr>
+        <p:cNvPr id="1" name=""/>
+        <p:cNvGrpSpPr/>
+        <p:nvPr/>
+      </p:nvGrpSpPr>
+      <p:grpSpPr/>
+      <p:sp>
+        <p:nvSpPr>
+          <p:cNvPr id="2" name="TextBox 1"/>
+          <p:cNvSpPr txBox="1"/>
+          <p:nvPr/>
+        </p:nvSpPr>
+        <p:spPr>
+          <a:xfrm>
+            <a:off x="594360" y="347472"/>
+            <a:ext cx="11064240" cy="457200"/>
+          </a:xfrm>
+          <a:prstGeom prst="rect">
+            <a:avLst/>
+          </a:prstGeom>
+          <a:noFill/>
+        </p:spPr>
+        <p:txBody>
+          <a:bodyPr wrap="none">
+            <a:spAutoFit/>
+          </a:bodyPr>
+          <a:lstStyle/>
+          <a:p>
+            <a:r>
+              <a:rPr sz="2500" b="1" i="0">
+                <a:latin typeface="Calibri"/>
+              </a:rPr>
+              <a:t>TF-IDF експеримент</a:t>
+            </a:r>
+          </a:p>
+        </p:txBody>
+      </p:sp>
+      <p:sp>
+        <p:nvSpPr>
+          <p:cNvPr id="3" name="Rectangle 2"/>
+          <p:cNvSpPr/>
+          <p:nvPr/>
+        </p:nvSpPr>
+        <p:spPr>
+          <a:xfrm>
+            <a:off x="594360" y="932688"/>
+            <a:ext cx="10972800" cy="18288"/>
+          </a:xfrm>
+          <a:prstGeom prst="rect">
+            <a:avLst/>
+          </a:prstGeom>
+          <a:solidFill>
+            <a:srgbClr val="000000"/>
+          </a:solidFill>
+          <a:ln>
+            <a:solidFill>
+              <a:srgbClr val="000000"/>
+            </a:solidFill>
+          </a:ln>
+        </p:spPr>
+        <p:style>
+          <a:lnRef idx="1">
+            <a:schemeClr val="accent1"/>
+          </a:lnRef>
+          <a:fillRef idx="3">
+            <a:schemeClr val="accent1"/>
+          </a:fillRef>
+          <a:effectRef idx="2">
+            <a:schemeClr val="accent1"/>
+          </a:effectRef>
+          <a:fontRef idx="minor">
+            <a:schemeClr val="lt1"/>
+          </a:fontRef>
+        </p:style>
+        <p:txBody>
+          <a:bodyPr rtlCol="0" anchor="ctr"/>
+          <a:lstStyle/>
+          <a:p>
+            <a:pPr algn="ctr"/>
+          </a:p>
+        </p:txBody>
+      </p:sp>
+      <p:sp>
+        <p:nvSpPr>
+          <p:cNvPr id="4" name="TextBox 3"/>
+          <p:cNvSpPr txBox="1"/>
+          <p:nvPr/>
+        </p:nvSpPr>
+        <p:spPr>
+          <a:xfrm>
+            <a:off x="822960" y="1234440"/>
+            <a:ext cx="10607040" cy="5074920"/>
+          </a:xfrm>
+          <a:prstGeom prst="rect">
+            <a:avLst/>
+          </a:prstGeom>
+          <a:noFill/>
+        </p:spPr>
+        <p:txBody>
+          <a:bodyPr wrap="square" lIns="45720" rIns="45720">
+            <a:spAutoFit/>
+          </a:bodyPr>
+          <a:lstStyle/>
+          <a:p>
+            <a:pPr>
+              <a:spcAft>
+                <a:spcPts val="1000"/>
+              </a:spcAft>
+              <a:defRPr sz="2000">
+                <a:latin typeface="Calibri"/>
+              </a:defRPr>
+            </a:pPr>
+            <a:r>
+              <a:t>Направих и TF-IDF експеримент върху captions.</a:t>
+            </a:r>
+          </a:p>
+          <a:p>
+            <a:pPr>
+              <a:spcAft>
+                <a:spcPts val="1000"/>
+              </a:spcAft>
+              <a:defRPr sz="2000">
+                <a:latin typeface="Calibri"/>
+              </a:defRPr>
+            </a:pPr>
+            <a:r>
+              <a:t>Идеята беше да видя кои думи най-силно характеризират dataset-а.</a:t>
+            </a:r>
+          </a:p>
+          <a:p>
+            <a:pPr>
+              <a:spcAft>
+                <a:spcPts val="1000"/>
+              </a:spcAft>
+              <a:defRPr sz="2000">
+                <a:latin typeface="Calibri"/>
+              </a:defRPr>
+            </a:pPr>
+            <a:r>
+              <a:t>Сред най-важните думи излязоха `dog`, `man`, `two`, `black`, `white`, `boy`, `woman`, `girl`, `wearing` и `people`.</a:t>
+            </a:r>
+          </a:p>
+          <a:p>
+            <a:pPr>
+              <a:spcAft>
+                <a:spcPts val="1000"/>
+              </a:spcAft>
+              <a:defRPr sz="2000">
+                <a:latin typeface="Calibri"/>
+              </a:defRPr>
+            </a:pPr>
+            <a:r>
+              <a:t>Това съвпада с наблюденията от EDA и обяснява защо моделът често генерира описания около хора и кучета.</a:t>
+            </a:r>
+          </a:p>
+        </p:txBody>
+      </p:sp>
+      <p:sp>
+        <p:nvSpPr>
+          <p:cNvPr id="5" name="TextBox 4"/>
+          <p:cNvSpPr txBox="1"/>
+          <p:nvPr/>
+        </p:nvSpPr>
+        <p:spPr>
+          <a:xfrm>
+            <a:off x="502920" y="6473952"/>
+            <a:ext cx="7772400" cy="228600"/>
+          </a:xfrm>
+          <a:prstGeom prst="rect">
+            <a:avLst/>
+          </a:prstGeom>
+          <a:noFill/>
+        </p:spPr>
+        <p:txBody>
+          <a:bodyPr wrap="none">
+            <a:spAutoFit/>
+          </a:bodyPr>
+          <a:lstStyle/>
+          <a:p>
+            <a:pPr algn="l"/>
+            <a:r>
+              <a:rPr sz="800" b="0" i="1">
+                <a:latin typeface="Calibri"/>
+              </a:rPr>
+              <a:t>Генериране на описание за изображение</a:t>
+            </a:r>
+          </a:p>
+        </p:txBody>
+      </p:sp>
+      <p:sp>
+        <p:nvSpPr>
+          <p:cNvPr id="6" name="TextBox 5"/>
+          <p:cNvSpPr txBox="1"/>
+          <p:nvPr/>
+        </p:nvSpPr>
+        <p:spPr>
+          <a:xfrm>
+            <a:off x="10789920" y="6473952"/>
+            <a:ext cx="822960" cy="228600"/>
+          </a:xfrm>
+          <a:prstGeom prst="rect">
+            <a:avLst/>
+          </a:prstGeom>
+          <a:noFill/>
+        </p:spPr>
+        <p:txBody>
+          <a:bodyPr wrap="none">
+            <a:spAutoFit/>
+          </a:bodyPr>
+          <a:lstStyle/>
+          <a:p>
+            <a:pPr algn="r"/>
+            <a:r>
+              <a:rPr sz="800" b="0" i="0">
+                <a:latin typeface="Calibri"/>
+              </a:rPr>
+              <a:t>21/31</a:t>
+            </a:r>
+          </a:p>
+        </p:txBody>
+      </p:sp>
+    </p:spTree>
+  </p:cSld>
+  <p:clrMapOvr>
+    <a:masterClrMapping/>
+  </p:clrMapOvr>
+</p:sld>
+</file>
+
+<file path=ppt/slides/slide22.xml><?xml version="1.0" encoding="utf-8"?>
+<p:sld xmlns:a="http://schemas.openxmlformats.org/drawingml/2006/main" xmlns:p="http://schemas.openxmlformats.org/presentationml/2006/main" xmlns:r="http://schemas.openxmlformats.org/officeDocument/2006/relationships">
+  <p:cSld>
+    <p:spTree>
+      <p:nvGrpSpPr>
+        <p:cNvPr id="1" name=""/>
+        <p:cNvGrpSpPr/>
+        <p:nvPr/>
+      </p:nvGrpSpPr>
+      <p:grpSpPr/>
+      <p:sp>
+        <p:nvSpPr>
+          <p:cNvPr id="2" name="TextBox 1"/>
+          <p:cNvSpPr txBox="1"/>
+          <p:nvPr/>
+        </p:nvSpPr>
+        <p:spPr>
+          <a:xfrm>
+            <a:off x="594360" y="347472"/>
+            <a:ext cx="11064240" cy="457200"/>
+          </a:xfrm>
+          <a:prstGeom prst="rect">
+            <a:avLst/>
+          </a:prstGeom>
+          <a:noFill/>
+        </p:spPr>
+        <p:txBody>
+          <a:bodyPr wrap="none">
+            <a:spAutoFit/>
+          </a:bodyPr>
+          <a:lstStyle/>
+          <a:p>
+            <a:r>
+              <a:rPr sz="2500" b="1" i="0">
+                <a:latin typeface="Calibri"/>
+              </a:rPr>
+              <a:t>Architecture experiments</a:t>
+            </a:r>
+          </a:p>
+        </p:txBody>
+      </p:sp>
+      <p:sp>
+        <p:nvSpPr>
+          <p:cNvPr id="3" name="Rectangle 2"/>
+          <p:cNvSpPr/>
+          <p:nvPr/>
+        </p:nvSpPr>
+        <p:spPr>
+          <a:xfrm>
+            <a:off x="594360" y="932688"/>
+            <a:ext cx="10972800" cy="18288"/>
+          </a:xfrm>
+          <a:prstGeom prst="rect">
+            <a:avLst/>
+          </a:prstGeom>
+          <a:solidFill>
+            <a:srgbClr val="000000"/>
+          </a:solidFill>
+          <a:ln>
+            <a:solidFill>
+              <a:srgbClr val="000000"/>
+            </a:solidFill>
+          </a:ln>
+        </p:spPr>
+        <p:style>
+          <a:lnRef idx="1">
+            <a:schemeClr val="accent1"/>
+          </a:lnRef>
+          <a:fillRef idx="3">
+            <a:schemeClr val="accent1"/>
+          </a:fillRef>
+          <a:effectRef idx="2">
+            <a:schemeClr val="accent1"/>
+          </a:effectRef>
+          <a:fontRef idx="minor">
+            <a:schemeClr val="lt1"/>
+          </a:fontRef>
+        </p:style>
+        <p:txBody>
+          <a:bodyPr rtlCol="0" anchor="ctr"/>
+          <a:lstStyle/>
+          <a:p>
+            <a:pPr algn="ctr"/>
+          </a:p>
+        </p:txBody>
+      </p:sp>
+      <p:sp>
+        <p:nvSpPr>
+          <p:cNvPr id="4" name="TextBox 3"/>
+          <p:cNvSpPr txBox="1"/>
+          <p:nvPr/>
+        </p:nvSpPr>
+        <p:spPr>
+          <a:xfrm>
+            <a:off x="822960" y="1234440"/>
+            <a:ext cx="10607040" cy="5074920"/>
+          </a:xfrm>
+          <a:prstGeom prst="rect">
+            <a:avLst/>
+          </a:prstGeom>
+          <a:noFill/>
+        </p:spPr>
+        <p:txBody>
+          <a:bodyPr wrap="square" lIns="45720" rIns="45720">
+            <a:spAutoFit/>
+          </a:bodyPr>
+          <a:lstStyle/>
+          <a:p>
+            <a:pPr>
+              <a:spcAft>
+                <a:spcPts val="1000"/>
+              </a:spcAft>
+              <a:defRPr sz="2000">
+                <a:latin typeface="Calibri"/>
+              </a:defRPr>
+            </a:pPr>
+            <a:r>
+              <a:t>Пробвах няколко LSTM варианта, за да не остане само една настройка.</a:t>
+            </a:r>
+          </a:p>
+          <a:p>
+            <a:pPr>
+              <a:spcAft>
+                <a:spcPts val="1000"/>
+              </a:spcAft>
+              <a:defRPr sz="2000">
+                <a:latin typeface="Calibri"/>
+              </a:defRPr>
+            </a:pPr>
+            <a:r>
+              <a:t>`small_lstm_256` беше по-малък модел.</a:t>
+            </a:r>
+          </a:p>
+          <a:p>
+            <a:pPr>
+              <a:spcAft>
+                <a:spcPts val="1000"/>
+              </a:spcAft>
+              <a:defRPr sz="2000">
+                <a:latin typeface="Calibri"/>
+              </a:defRPr>
+            </a:pPr>
+            <a:r>
+              <a:t>`baseline_lstm_512` беше основният вариант.</a:t>
+            </a:r>
+          </a:p>
+          <a:p>
+            <a:pPr>
+              <a:spcAft>
+                <a:spcPts val="1000"/>
+              </a:spcAft>
+              <a:defRPr sz="2000">
+                <a:latin typeface="Calibri"/>
+              </a:defRPr>
+            </a:pPr>
+            <a:r>
+              <a:t>`two_layer_lstm_dropout` добавя втори LSTM слой и dropout.</a:t>
+            </a:r>
+          </a:p>
+          <a:p>
+            <a:pPr>
+              <a:spcAft>
+                <a:spcPts val="1000"/>
+              </a:spcAft>
+              <a:defRPr sz="2000">
+                <a:latin typeface="Calibri"/>
+              </a:defRPr>
+            </a:pPr>
+            <a:r>
+              <a:t>При краткия training budget най-добре се държа baseline вариантът с hidden size 512.</a:t>
+            </a:r>
+          </a:p>
+        </p:txBody>
+      </p:sp>
+      <p:sp>
+        <p:nvSpPr>
+          <p:cNvPr id="5" name="TextBox 4"/>
+          <p:cNvSpPr txBox="1"/>
+          <p:nvPr/>
+        </p:nvSpPr>
+        <p:spPr>
+          <a:xfrm>
+            <a:off x="502920" y="6473952"/>
+            <a:ext cx="7772400" cy="228600"/>
+          </a:xfrm>
+          <a:prstGeom prst="rect">
+            <a:avLst/>
+          </a:prstGeom>
+          <a:noFill/>
+        </p:spPr>
+        <p:txBody>
+          <a:bodyPr wrap="none">
+            <a:spAutoFit/>
+          </a:bodyPr>
+          <a:lstStyle/>
+          <a:p>
+            <a:pPr algn="l"/>
+            <a:r>
+              <a:rPr sz="800" b="0" i="1">
+                <a:latin typeface="Calibri"/>
+              </a:rPr>
+              <a:t>Генериране на описание за изображение</a:t>
+            </a:r>
+          </a:p>
+        </p:txBody>
+      </p:sp>
+      <p:sp>
+        <p:nvSpPr>
+          <p:cNvPr id="6" name="TextBox 5"/>
+          <p:cNvSpPr txBox="1"/>
+          <p:nvPr/>
+        </p:nvSpPr>
+        <p:spPr>
+          <a:xfrm>
+            <a:off x="10789920" y="6473952"/>
+            <a:ext cx="822960" cy="228600"/>
+          </a:xfrm>
+          <a:prstGeom prst="rect">
+            <a:avLst/>
+          </a:prstGeom>
+          <a:noFill/>
+        </p:spPr>
+        <p:txBody>
+          <a:bodyPr wrap="none">
+            <a:spAutoFit/>
+          </a:bodyPr>
+          <a:lstStyle/>
+          <a:p>
+            <a:pPr algn="r"/>
+            <a:r>
+              <a:rPr sz="800" b="0" i="0">
+                <a:latin typeface="Calibri"/>
+              </a:rPr>
+              <a:t>22/31</a:t>
+            </a:r>
+          </a:p>
+        </p:txBody>
+      </p:sp>
+    </p:spTree>
+  </p:cSld>
+  <p:clrMapOvr>
+    <a:masterClrMapping/>
+  </p:clrMapOvr>
+</p:sld>
+</file>
+
+<file path=ppt/slides/slide23.xml><?xml version="1.0" encoding="utf-8"?>
+<p:sld xmlns:a="http://schemas.openxmlformats.org/drawingml/2006/main" xmlns:p="http://schemas.openxmlformats.org/presentationml/2006/main" xmlns:r="http://schemas.openxmlformats.org/officeDocument/2006/relationships">
+  <p:cSld>
+    <p:spTree>
+      <p:nvGrpSpPr>
+        <p:cNvPr id="1" name=""/>
+        <p:cNvGrpSpPr/>
+        <p:nvPr/>
+      </p:nvGrpSpPr>
+      <p:grpSpPr/>
+      <p:sp>
+        <p:nvSpPr>
+          <p:cNvPr id="2" name="TextBox 1"/>
+          <p:cNvSpPr txBox="1"/>
+          <p:nvPr/>
+        </p:nvSpPr>
+        <p:spPr>
+          <a:xfrm>
+            <a:off x="594360" y="347472"/>
+            <a:ext cx="11064240" cy="457200"/>
+          </a:xfrm>
+          <a:prstGeom prst="rect">
+            <a:avLst/>
+          </a:prstGeom>
+          <a:noFill/>
+        </p:spPr>
+        <p:txBody>
+          <a:bodyPr wrap="none">
+            <a:spAutoFit/>
+          </a:bodyPr>
+          <a:lstStyle/>
+          <a:p>
+            <a:r>
+              <a:rPr sz="2500" b="1" i="0">
+                <a:latin typeface="Calibri"/>
+              </a:rPr>
+              <a:t>VGG retrieval режим</a:t>
+            </a:r>
+          </a:p>
+        </p:txBody>
+      </p:sp>
+      <p:sp>
+        <p:nvSpPr>
+          <p:cNvPr id="3" name="Rectangle 2"/>
+          <p:cNvSpPr/>
+          <p:nvPr/>
+        </p:nvSpPr>
+        <p:spPr>
+          <a:xfrm>
+            <a:off x="594360" y="932688"/>
+            <a:ext cx="10972800" cy="18288"/>
+          </a:xfrm>
+          <a:prstGeom prst="rect">
+            <a:avLst/>
+          </a:prstGeom>
+          <a:solidFill>
+            <a:srgbClr val="000000"/>
+          </a:solidFill>
+          <a:ln>
+            <a:solidFill>
+              <a:srgbClr val="000000"/>
+            </a:solidFill>
+          </a:ln>
+        </p:spPr>
+        <p:style>
+          <a:lnRef idx="1">
+            <a:schemeClr val="accent1"/>
+          </a:lnRef>
+          <a:fillRef idx="3">
+            <a:schemeClr val="accent1"/>
+          </a:fillRef>
+          <a:effectRef idx="2">
+            <a:schemeClr val="accent1"/>
+          </a:effectRef>
+          <a:fontRef idx="minor">
+            <a:schemeClr val="lt1"/>
+          </a:fontRef>
+        </p:style>
+        <p:txBody>
+          <a:bodyPr rtlCol="0" anchor="ctr"/>
+          <a:lstStyle/>
+          <a:p>
+            <a:pPr algn="ctr"/>
+          </a:p>
+        </p:txBody>
+      </p:sp>
+      <p:sp>
+        <p:nvSpPr>
+          <p:cNvPr id="4" name="TextBox 3"/>
+          <p:cNvSpPr txBox="1"/>
+          <p:nvPr/>
+        </p:nvSpPr>
+        <p:spPr>
+          <a:xfrm>
+            <a:off x="822960" y="1234440"/>
+            <a:ext cx="10607040" cy="5074920"/>
+          </a:xfrm>
+          <a:prstGeom prst="rect">
+            <a:avLst/>
+          </a:prstGeom>
+          <a:noFill/>
+        </p:spPr>
+        <p:txBody>
+          <a:bodyPr wrap="square" lIns="45720" rIns="45720">
+            <a:spAutoFit/>
+          </a:bodyPr>
+          <a:lstStyle/>
+          <a:p>
+            <a:pPr>
+              <a:spcAft>
+                <a:spcPts val="1000"/>
+              </a:spcAft>
+              <a:defRPr sz="2000">
+                <a:latin typeface="Calibri"/>
+              </a:defRPr>
+            </a:pPr>
+            <a:r>
+              <a:t>Добавих VGG retrieval като допълнителен проектен режим.</a:t>
+            </a:r>
+          </a:p>
+          <a:p>
+            <a:pPr>
+              <a:spcAft>
+                <a:spcPts val="1000"/>
+              </a:spcAft>
+              <a:defRPr sz="2000">
+                <a:latin typeface="Calibri"/>
+              </a:defRPr>
+            </a:pPr>
+            <a:r>
+              <a:t>При него не генерирам caption изцяло от LSTM.</a:t>
+            </a:r>
+          </a:p>
+          <a:p>
+            <a:pPr>
+              <a:spcAft>
+                <a:spcPts val="1000"/>
+              </a:spcAft>
+              <a:defRPr sz="2000">
+                <a:latin typeface="Calibri"/>
+              </a:defRPr>
+            </a:pPr>
+            <a:r>
+              <a:t>Вместо това извличам VGG features за входната снимка.</a:t>
+            </a:r>
+          </a:p>
+          <a:p>
+            <a:pPr>
+              <a:spcAft>
+                <a:spcPts val="1000"/>
+              </a:spcAft>
+              <a:defRPr sz="2000">
+                <a:latin typeface="Calibri"/>
+              </a:defRPr>
+            </a:pPr>
+            <a:r>
+              <a:t>После ги сравнявам с features на training изображенията.</a:t>
+            </a:r>
+          </a:p>
+          <a:p>
+            <a:pPr>
+              <a:spcAft>
+                <a:spcPts val="1000"/>
+              </a:spcAft>
+              <a:defRPr sz="2000">
+                <a:latin typeface="Calibri"/>
+              </a:defRPr>
+            </a:pPr>
+            <a:r>
+              <a:t>Накрая връщам caption от визуално най-близкия пример.</a:t>
+            </a:r>
+          </a:p>
+        </p:txBody>
+      </p:sp>
+      <p:sp>
+        <p:nvSpPr>
+          <p:cNvPr id="5" name="TextBox 4"/>
+          <p:cNvSpPr txBox="1"/>
+          <p:nvPr/>
+        </p:nvSpPr>
+        <p:spPr>
+          <a:xfrm>
+            <a:off x="502920" y="6473952"/>
+            <a:ext cx="7772400" cy="228600"/>
+          </a:xfrm>
+          <a:prstGeom prst="rect">
+            <a:avLst/>
+          </a:prstGeom>
+          <a:noFill/>
+        </p:spPr>
+        <p:txBody>
+          <a:bodyPr wrap="none">
+            <a:spAutoFit/>
+          </a:bodyPr>
+          <a:lstStyle/>
+          <a:p>
+            <a:pPr algn="l"/>
+            <a:r>
+              <a:rPr sz="800" b="0" i="1">
+                <a:latin typeface="Calibri"/>
+              </a:rPr>
+              <a:t>Генериране на описание за изображение</a:t>
+            </a:r>
+          </a:p>
+        </p:txBody>
+      </p:sp>
+      <p:sp>
+        <p:nvSpPr>
+          <p:cNvPr id="6" name="TextBox 5"/>
+          <p:cNvSpPr txBox="1"/>
+          <p:nvPr/>
+        </p:nvSpPr>
+        <p:spPr>
+          <a:xfrm>
+            <a:off x="10789920" y="6473952"/>
+            <a:ext cx="822960" cy="228600"/>
+          </a:xfrm>
+          <a:prstGeom prst="rect">
+            <a:avLst/>
+          </a:prstGeom>
+          <a:noFill/>
+        </p:spPr>
+        <p:txBody>
+          <a:bodyPr wrap="none">
+            <a:spAutoFit/>
+          </a:bodyPr>
+          <a:lstStyle/>
+          <a:p>
+            <a:pPr algn="r"/>
+            <a:r>
+              <a:rPr sz="800" b="0" i="0">
+                <a:latin typeface="Calibri"/>
+              </a:rPr>
+              <a:t>23/31</a:t>
+            </a:r>
+          </a:p>
+        </p:txBody>
+      </p:sp>
+    </p:spTree>
+  </p:cSld>
+  <p:clrMapOvr>
+    <a:masterClrMapping/>
+  </p:clrMapOvr>
+</p:sld>
+</file>
+
+<file path=ppt/slides/slide24.xml><?xml version="1.0" encoding="utf-8"?>
+<p:sld xmlns:a="http://schemas.openxmlformats.org/drawingml/2006/main" xmlns:p="http://schemas.openxmlformats.org/presentationml/2006/main" xmlns:r="http://schemas.openxmlformats.org/officeDocument/2006/relationships">
+  <p:cSld>
+    <p:spTree>
+      <p:nvGrpSpPr>
+        <p:cNvPr id="1" name=""/>
+        <p:cNvGrpSpPr/>
+        <p:nvPr/>
+      </p:nvGrpSpPr>
+      <p:grpSpPr/>
+      <p:sp>
+        <p:nvSpPr>
+          <p:cNvPr id="2" name="TextBox 1"/>
+          <p:cNvSpPr txBox="1"/>
+          <p:nvPr/>
+        </p:nvSpPr>
+        <p:spPr>
+          <a:xfrm>
+            <a:off x="594360" y="347472"/>
+            <a:ext cx="11064240" cy="457200"/>
+          </a:xfrm>
+          <a:prstGeom prst="rect">
+            <a:avLst/>
+          </a:prstGeom>
+          <a:noFill/>
+        </p:spPr>
+        <p:txBody>
+          <a:bodyPr wrap="none">
+            <a:spAutoFit/>
+          </a:bodyPr>
+          <a:lstStyle/>
+          <a:p>
+            <a:r>
+              <a:rPr sz="2500" b="1" i="0">
+                <a:latin typeface="Calibri"/>
+              </a:rPr>
+              <a:t>Защо ми трябваше retrieval</a:t>
+            </a:r>
+          </a:p>
+        </p:txBody>
+      </p:sp>
+      <p:sp>
+        <p:nvSpPr>
+          <p:cNvPr id="3" name="Rectangle 2"/>
+          <p:cNvSpPr/>
+          <p:nvPr/>
+        </p:nvSpPr>
+        <p:spPr>
+          <a:xfrm>
+            <a:off x="594360" y="932688"/>
+            <a:ext cx="10972800" cy="18288"/>
+          </a:xfrm>
+          <a:prstGeom prst="rect">
+            <a:avLst/>
+          </a:prstGeom>
+          <a:solidFill>
+            <a:srgbClr val="000000"/>
+          </a:solidFill>
+          <a:ln>
+            <a:solidFill>
+              <a:srgbClr val="000000"/>
+            </a:solidFill>
+          </a:ln>
+        </p:spPr>
+        <p:style>
+          <a:lnRef idx="1">
+            <a:schemeClr val="accent1"/>
+          </a:lnRef>
+          <a:fillRef idx="3">
+            <a:schemeClr val="accent1"/>
+          </a:fillRef>
+          <a:effectRef idx="2">
+            <a:schemeClr val="accent1"/>
+          </a:effectRef>
+          <a:fontRef idx="minor">
+            <a:schemeClr val="lt1"/>
+          </a:fontRef>
+        </p:style>
+        <p:txBody>
+          <a:bodyPr rtlCol="0" anchor="ctr"/>
+          <a:lstStyle/>
+          <a:p>
+            <a:pPr algn="ctr"/>
+          </a:p>
+        </p:txBody>
+      </p:sp>
+      <p:sp>
+        <p:nvSpPr>
+          <p:cNvPr id="4" name="TextBox 3"/>
+          <p:cNvSpPr txBox="1"/>
+          <p:nvPr/>
+        </p:nvSpPr>
+        <p:spPr>
+          <a:xfrm>
+            <a:off x="822960" y="1234440"/>
+            <a:ext cx="10607040" cy="5074920"/>
+          </a:xfrm>
+          <a:prstGeom prst="rect">
+            <a:avLst/>
+          </a:prstGeom>
+          <a:noFill/>
+        </p:spPr>
+        <p:txBody>
+          <a:bodyPr wrap="square" lIns="45720" rIns="45720">
+            <a:spAutoFit/>
+          </a:bodyPr>
+          <a:lstStyle/>
+          <a:p>
+            <a:pPr>
+              <a:spcAft>
+                <a:spcPts val="1000"/>
+              </a:spcAft>
+              <a:defRPr sz="2000">
+                <a:latin typeface="Calibri"/>
+              </a:defRPr>
+            </a:pPr>
+            <a:r>
+              <a:t>Когато пробвах произволни снимки, LSTM моделът понякога даваше много странни captions.</a:t>
+            </a:r>
+          </a:p>
+          <a:p>
+            <a:pPr>
+              <a:spcAft>
+                <a:spcPts val="1000"/>
+              </a:spcAft>
+              <a:defRPr sz="2000">
+                <a:latin typeface="Calibri"/>
+              </a:defRPr>
+            </a:pPr>
+            <a:r>
+              <a:t>Това е нормално за малък dataset и baseline архитектура, но не изглежда добре в приложение.</a:t>
+            </a:r>
+          </a:p>
+          <a:p>
+            <a:pPr>
+              <a:spcAft>
+                <a:spcPts val="1000"/>
+              </a:spcAft>
+              <a:defRPr sz="2000">
+                <a:latin typeface="Calibri"/>
+              </a:defRPr>
+            </a:pPr>
+            <a:r>
+              <a:t>Retrieval режимът е по-заземен, защото caption-ът идва от реална подобна снимка от training set-а.</a:t>
+            </a:r>
+          </a:p>
+          <a:p>
+            <a:pPr>
+              <a:spcAft>
+                <a:spcPts val="1000"/>
+              </a:spcAft>
+              <a:defRPr sz="2000">
+                <a:latin typeface="Calibri"/>
+              </a:defRPr>
+            </a:pPr>
+            <a:r>
+              <a:t>Той не е толкова гъвкав, но за демонстрация често е по-стабилен.</a:t>
+            </a:r>
+          </a:p>
+        </p:txBody>
+      </p:sp>
+      <p:sp>
+        <p:nvSpPr>
+          <p:cNvPr id="5" name="TextBox 4"/>
+          <p:cNvSpPr txBox="1"/>
+          <p:nvPr/>
+        </p:nvSpPr>
+        <p:spPr>
+          <a:xfrm>
+            <a:off x="502920" y="6473952"/>
+            <a:ext cx="7772400" cy="228600"/>
+          </a:xfrm>
+          <a:prstGeom prst="rect">
+            <a:avLst/>
+          </a:prstGeom>
+          <a:noFill/>
+        </p:spPr>
+        <p:txBody>
+          <a:bodyPr wrap="none">
+            <a:spAutoFit/>
+          </a:bodyPr>
+          <a:lstStyle/>
+          <a:p>
+            <a:pPr algn="l"/>
+            <a:r>
+              <a:rPr sz="800" b="0" i="1">
+                <a:latin typeface="Calibri"/>
+              </a:rPr>
+              <a:t>Генериране на описание за изображение</a:t>
+            </a:r>
+          </a:p>
+        </p:txBody>
+      </p:sp>
+      <p:sp>
+        <p:nvSpPr>
+          <p:cNvPr id="6" name="TextBox 5"/>
+          <p:cNvSpPr txBox="1"/>
+          <p:nvPr/>
+        </p:nvSpPr>
+        <p:spPr>
+          <a:xfrm>
+            <a:off x="10789920" y="6473952"/>
+            <a:ext cx="822960" cy="228600"/>
+          </a:xfrm>
+          <a:prstGeom prst="rect">
+            <a:avLst/>
+          </a:prstGeom>
+          <a:noFill/>
+        </p:spPr>
+        <p:txBody>
+          <a:bodyPr wrap="none">
+            <a:spAutoFit/>
+          </a:bodyPr>
+          <a:lstStyle/>
+          <a:p>
+            <a:pPr algn="r"/>
+            <a:r>
+              <a:rPr sz="800" b="0" i="0">
+                <a:latin typeface="Calibri"/>
+              </a:rPr>
+              <a:t>24/31</a:t>
+            </a:r>
+          </a:p>
+        </p:txBody>
+      </p:sp>
+    </p:spTree>
+  </p:cSld>
+  <p:clrMapOvr>
+    <a:masterClrMapping/>
+  </p:clrMapOvr>
+</p:sld>
+</file>
+
+<file path=ppt/slides/slide25.xml><?xml version="1.0" encoding="utf-8"?>
+<p:sld xmlns:a="http://schemas.openxmlformats.org/drawingml/2006/main" xmlns:p="http://schemas.openxmlformats.org/presentationml/2006/main" xmlns:r="http://schemas.openxmlformats.org/officeDocument/2006/relationships">
+  <p:cSld>
+    <p:spTree>
+      <p:nvGrpSpPr>
+        <p:cNvPr id="1" name=""/>
+        <p:cNvGrpSpPr/>
+        <p:nvPr/>
+      </p:nvGrpSpPr>
+      <p:grpSpPr/>
+      <p:sp>
+        <p:nvSpPr>
+          <p:cNvPr id="2" name="TextBox 1"/>
+          <p:cNvSpPr txBox="1"/>
+          <p:nvPr/>
+        </p:nvSpPr>
+        <p:spPr>
+          <a:xfrm>
+            <a:off x="594360" y="347472"/>
+            <a:ext cx="11064240" cy="457200"/>
+          </a:xfrm>
+          <a:prstGeom prst="rect">
+            <a:avLst/>
+          </a:prstGeom>
+          <a:noFill/>
+        </p:spPr>
+        <p:txBody>
+          <a:bodyPr wrap="none">
+            <a:spAutoFit/>
+          </a:bodyPr>
+          <a:lstStyle/>
+          <a:p>
+            <a:r>
+              <a:rPr sz="2500" b="1" i="0">
+                <a:latin typeface="Calibri"/>
+              </a:rPr>
+              <a:t>BLIP режим</a:t>
+            </a:r>
+          </a:p>
+        </p:txBody>
+      </p:sp>
+      <p:sp>
+        <p:nvSpPr>
+          <p:cNvPr id="3" name="Rectangle 2"/>
+          <p:cNvSpPr/>
+          <p:nvPr/>
+        </p:nvSpPr>
+        <p:spPr>
+          <a:xfrm>
+            <a:off x="594360" y="932688"/>
+            <a:ext cx="10972800" cy="18288"/>
+          </a:xfrm>
+          <a:prstGeom prst="rect">
+            <a:avLst/>
+          </a:prstGeom>
+          <a:solidFill>
+            <a:srgbClr val="000000"/>
+          </a:solidFill>
+          <a:ln>
+            <a:solidFill>
+              <a:srgbClr val="000000"/>
+            </a:solidFill>
+          </a:ln>
+        </p:spPr>
+        <p:style>
+          <a:lnRef idx="1">
+            <a:schemeClr val="accent1"/>
+          </a:lnRef>
+          <a:fillRef idx="3">
+            <a:schemeClr val="accent1"/>
+          </a:fillRef>
+          <a:effectRef idx="2">
+            <a:schemeClr val="accent1"/>
+          </a:effectRef>
+          <a:fontRef idx="minor">
+            <a:schemeClr val="lt1"/>
+          </a:fontRef>
+        </p:style>
+        <p:txBody>
+          <a:bodyPr rtlCol="0" anchor="ctr"/>
+          <a:lstStyle/>
+          <a:p>
+            <a:pPr algn="ctr"/>
+          </a:p>
+        </p:txBody>
+      </p:sp>
+      <p:sp>
+        <p:nvSpPr>
+          <p:cNvPr id="4" name="TextBox 3"/>
+          <p:cNvSpPr txBox="1"/>
+          <p:nvPr/>
+        </p:nvSpPr>
+        <p:spPr>
+          <a:xfrm>
+            <a:off x="822960" y="1234440"/>
+            <a:ext cx="10607040" cy="5074920"/>
+          </a:xfrm>
+          <a:prstGeom prst="rect">
+            <a:avLst/>
+          </a:prstGeom>
+          <a:noFill/>
+        </p:spPr>
+        <p:txBody>
+          <a:bodyPr wrap="square" lIns="45720" rIns="45720">
+            <a:spAutoFit/>
+          </a:bodyPr>
+          <a:lstStyle/>
+          <a:p>
+            <a:pPr>
+              <a:spcAft>
+                <a:spcPts val="1000"/>
+              </a:spcAft>
+              <a:defRPr sz="2000">
+                <a:latin typeface="Calibri"/>
+              </a:defRPr>
+            </a:pPr>
+            <a:r>
+              <a:t>Добавих и `Pretrained BLIP` режим за сравнение.</a:t>
+            </a:r>
+          </a:p>
+          <a:p>
+            <a:pPr>
+              <a:spcAft>
+                <a:spcPts val="1000"/>
+              </a:spcAft>
+              <a:defRPr sz="2000">
+                <a:latin typeface="Calibri"/>
+              </a:defRPr>
+            </a:pPr>
+            <a:r>
+              <a:t>BLIP не е моделът, който обучавам в проекта.</a:t>
+            </a:r>
+          </a:p>
+          <a:p>
+            <a:pPr>
+              <a:spcAft>
+                <a:spcPts val="1000"/>
+              </a:spcAft>
+              <a:defRPr sz="2000">
+                <a:latin typeface="Calibri"/>
+              </a:defRPr>
+            </a:pPr>
+            <a:r>
+              <a:t>Използвам го, за да покажа как се държи по-силен pretrained vision-language модел.</a:t>
+            </a:r>
+          </a:p>
+          <a:p>
+            <a:pPr>
+              <a:spcAft>
+                <a:spcPts val="1000"/>
+              </a:spcAft>
+              <a:defRPr sz="2000">
+                <a:latin typeface="Calibri"/>
+              </a:defRPr>
+            </a:pPr>
+            <a:r>
+              <a:t>Това помага да се види разликата между собствен baseline и модел, обучаван върху много повече данни.</a:t>
+            </a:r>
+          </a:p>
+        </p:txBody>
+      </p:sp>
+      <p:sp>
+        <p:nvSpPr>
+          <p:cNvPr id="5" name="TextBox 4"/>
+          <p:cNvSpPr txBox="1"/>
+          <p:nvPr/>
+        </p:nvSpPr>
+        <p:spPr>
+          <a:xfrm>
+            <a:off x="502920" y="6473952"/>
+            <a:ext cx="7772400" cy="228600"/>
+          </a:xfrm>
+          <a:prstGeom prst="rect">
+            <a:avLst/>
+          </a:prstGeom>
+          <a:noFill/>
+        </p:spPr>
+        <p:txBody>
+          <a:bodyPr wrap="none">
+            <a:spAutoFit/>
+          </a:bodyPr>
+          <a:lstStyle/>
+          <a:p>
+            <a:pPr algn="l"/>
+            <a:r>
+              <a:rPr sz="800" b="0" i="1">
+                <a:latin typeface="Calibri"/>
+              </a:rPr>
+              <a:t>Генериране на описание за изображение</a:t>
+            </a:r>
+          </a:p>
+        </p:txBody>
+      </p:sp>
+      <p:sp>
+        <p:nvSpPr>
+          <p:cNvPr id="6" name="TextBox 5"/>
+          <p:cNvSpPr txBox="1"/>
+          <p:nvPr/>
+        </p:nvSpPr>
+        <p:spPr>
+          <a:xfrm>
+            <a:off x="10789920" y="6473952"/>
+            <a:ext cx="822960" cy="228600"/>
+          </a:xfrm>
+          <a:prstGeom prst="rect">
+            <a:avLst/>
+          </a:prstGeom>
+          <a:noFill/>
+        </p:spPr>
+        <p:txBody>
+          <a:bodyPr wrap="none">
+            <a:spAutoFit/>
+          </a:bodyPr>
+          <a:lstStyle/>
+          <a:p>
+            <a:pPr algn="r"/>
+            <a:r>
+              <a:rPr sz="800" b="0" i="0">
+                <a:latin typeface="Calibri"/>
+              </a:rPr>
+              <a:t>25/31</a:t>
+            </a:r>
+          </a:p>
+        </p:txBody>
+      </p:sp>
+    </p:spTree>
+  </p:cSld>
+  <p:clrMapOvr>
+    <a:masterClrMapping/>
+  </p:clrMapOvr>
+</p:sld>
+</file>
+
+<file path=ppt/slides/slide26.xml><?xml version="1.0" encoding="utf-8"?>
+<p:sld xmlns:a="http://schemas.openxmlformats.org/drawingml/2006/main" xmlns:p="http://schemas.openxmlformats.org/presentationml/2006/main" xmlns:r="http://schemas.openxmlformats.org/officeDocument/2006/relationships">
+  <p:cSld>
+    <p:spTree>
+      <p:nvGrpSpPr>
+        <p:cNvPr id="1" name=""/>
+        <p:cNvGrpSpPr/>
+        <p:nvPr/>
+      </p:nvGrpSpPr>
+      <p:grpSpPr/>
+      <p:sp>
+        <p:nvSpPr>
+          <p:cNvPr id="2" name="TextBox 1"/>
+          <p:cNvSpPr txBox="1"/>
+          <p:nvPr/>
+        </p:nvSpPr>
+        <p:spPr>
+          <a:xfrm>
+            <a:off x="594360" y="347472"/>
+            <a:ext cx="11064240" cy="457200"/>
+          </a:xfrm>
+          <a:prstGeom prst="rect">
+            <a:avLst/>
+          </a:prstGeom>
+          <a:noFill/>
+        </p:spPr>
+        <p:txBody>
+          <a:bodyPr wrap="none">
+            <a:spAutoFit/>
+          </a:bodyPr>
+          <a:lstStyle/>
+          <a:p>
+            <a:r>
+              <a:rPr sz="2500" b="1" i="0">
+                <a:latin typeface="Calibri"/>
+              </a:rPr>
+              <a:t>Streamlit приложение</a:t>
+            </a:r>
+          </a:p>
+        </p:txBody>
+      </p:sp>
+      <p:sp>
+        <p:nvSpPr>
+          <p:cNvPr id="3" name="Rectangle 2"/>
+          <p:cNvSpPr/>
+          <p:nvPr/>
+        </p:nvSpPr>
+        <p:spPr>
+          <a:xfrm>
+            <a:off x="594360" y="932688"/>
+            <a:ext cx="10972800" cy="18288"/>
+          </a:xfrm>
+          <a:prstGeom prst="rect">
+            <a:avLst/>
+          </a:prstGeom>
+          <a:solidFill>
+            <a:srgbClr val="000000"/>
+          </a:solidFill>
+          <a:ln>
+            <a:solidFill>
+              <a:srgbClr val="000000"/>
+            </a:solidFill>
+          </a:ln>
+        </p:spPr>
+        <p:style>
+          <a:lnRef idx="1">
+            <a:schemeClr val="accent1"/>
+          </a:lnRef>
+          <a:fillRef idx="3">
+            <a:schemeClr val="accent1"/>
+          </a:fillRef>
+          <a:effectRef idx="2">
+            <a:schemeClr val="accent1"/>
+          </a:effectRef>
+          <a:fontRef idx="minor">
+            <a:schemeClr val="lt1"/>
+          </a:fontRef>
+        </p:style>
+        <p:txBody>
+          <a:bodyPr rtlCol="0" anchor="ctr"/>
+          <a:lstStyle/>
+          <a:p>
+            <a:pPr algn="ctr"/>
+          </a:p>
+        </p:txBody>
+      </p:sp>
+      <p:sp>
+        <p:nvSpPr>
+          <p:cNvPr id="4" name="TextBox 3"/>
+          <p:cNvSpPr txBox="1"/>
+          <p:nvPr/>
+        </p:nvSpPr>
+        <p:spPr>
+          <a:xfrm>
+            <a:off x="822960" y="1234440"/>
+            <a:ext cx="10607040" cy="5074920"/>
+          </a:xfrm>
+          <a:prstGeom prst="rect">
+            <a:avLst/>
+          </a:prstGeom>
+          <a:noFill/>
+        </p:spPr>
+        <p:txBody>
+          <a:bodyPr wrap="square" lIns="45720" rIns="45720">
+            <a:spAutoFit/>
+          </a:bodyPr>
+          <a:lstStyle/>
+          <a:p>
+            <a:pPr>
+              <a:spcAft>
+                <a:spcPts val="1000"/>
+              </a:spcAft>
+              <a:defRPr sz="2000">
+                <a:latin typeface="Calibri"/>
+              </a:defRPr>
+            </a:pPr>
+            <a:r>
+              <a:t>Приложението позволява да кача изображение и да избера режим.</a:t>
+            </a:r>
+          </a:p>
+          <a:p>
+            <a:pPr>
+              <a:spcAft>
+                <a:spcPts val="1000"/>
+              </a:spcAft>
+              <a:defRPr sz="2000">
+                <a:latin typeface="Calibri"/>
+              </a:defRPr>
+            </a:pPr>
+            <a:r>
+              <a:t>То показва входната снимка и генерираното описание.</a:t>
+            </a:r>
+          </a:p>
+          <a:p>
+            <a:pPr>
+              <a:spcAft>
+                <a:spcPts val="1000"/>
+              </a:spcAft>
+              <a:defRPr sz="2000">
+                <a:latin typeface="Calibri"/>
+              </a:defRPr>
+            </a:pPr>
+            <a:r>
+              <a:t>Режимите са `Project VGG retrieval`, `Project baseline VGG16 + LSTM` и `Pretrained BLIP`.</a:t>
+            </a:r>
+          </a:p>
+          <a:p>
+            <a:pPr>
+              <a:spcAft>
+                <a:spcPts val="1000"/>
+              </a:spcAft>
+              <a:defRPr sz="2000">
+                <a:latin typeface="Calibri"/>
+              </a:defRPr>
+            </a:pPr>
+            <a:r>
+              <a:t>Така мога директно да сравня трите подхода върху една и съща снимка.</a:t>
+            </a:r>
+          </a:p>
+          <a:p>
+            <a:pPr>
+              <a:spcAft>
+                <a:spcPts val="1000"/>
+              </a:spcAft>
+              <a:defRPr sz="2000">
+                <a:latin typeface="Calibri"/>
+              </a:defRPr>
+            </a:pPr>
+            <a:r>
+              <a:t>Стартирам го с `python -m streamlit run streamlit_app/app.py`.</a:t>
+            </a:r>
+          </a:p>
+        </p:txBody>
+      </p:sp>
+      <p:sp>
+        <p:nvSpPr>
+          <p:cNvPr id="5" name="TextBox 4"/>
+          <p:cNvSpPr txBox="1"/>
+          <p:nvPr/>
+        </p:nvSpPr>
+        <p:spPr>
+          <a:xfrm>
+            <a:off x="502920" y="6473952"/>
+            <a:ext cx="7772400" cy="228600"/>
+          </a:xfrm>
+          <a:prstGeom prst="rect">
+            <a:avLst/>
+          </a:prstGeom>
+          <a:noFill/>
+        </p:spPr>
+        <p:txBody>
+          <a:bodyPr wrap="none">
+            <a:spAutoFit/>
+          </a:bodyPr>
+          <a:lstStyle/>
+          <a:p>
+            <a:pPr algn="l"/>
+            <a:r>
+              <a:rPr sz="800" b="0" i="1">
+                <a:latin typeface="Calibri"/>
+              </a:rPr>
+              <a:t>Генериране на описание за изображение</a:t>
+            </a:r>
+          </a:p>
+        </p:txBody>
+      </p:sp>
+      <p:sp>
+        <p:nvSpPr>
+          <p:cNvPr id="6" name="TextBox 5"/>
+          <p:cNvSpPr txBox="1"/>
+          <p:nvPr/>
+        </p:nvSpPr>
+        <p:spPr>
+          <a:xfrm>
+            <a:off x="10789920" y="6473952"/>
+            <a:ext cx="822960" cy="228600"/>
+          </a:xfrm>
+          <a:prstGeom prst="rect">
+            <a:avLst/>
+          </a:prstGeom>
+          <a:noFill/>
+        </p:spPr>
+        <p:txBody>
+          <a:bodyPr wrap="none">
+            <a:spAutoFit/>
+          </a:bodyPr>
+          <a:lstStyle/>
+          <a:p>
+            <a:pPr algn="r"/>
+            <a:r>
+              <a:rPr sz="800" b="0" i="0">
+                <a:latin typeface="Calibri"/>
+              </a:rPr>
+              <a:t>26/31</a:t>
+            </a:r>
+          </a:p>
+        </p:txBody>
+      </p:sp>
+    </p:spTree>
+  </p:cSld>
+  <p:clrMapOvr>
+    <a:masterClrMapping/>
+  </p:clrMapOvr>
+</p:sld>
+</file>
+
+<file path=ppt/slides/slide27.xml><?xml version="1.0" encoding="utf-8"?>
+<p:sld xmlns:a="http://schemas.openxmlformats.org/drawingml/2006/main" xmlns:p="http://schemas.openxmlformats.org/presentationml/2006/main" xmlns:r="http://schemas.openxmlformats.org/officeDocument/2006/relationships">
+  <p:cSld>
+    <p:spTree>
+      <p:nvGrpSpPr>
+        <p:cNvPr id="1" name=""/>
+        <p:cNvGrpSpPr/>
+        <p:nvPr/>
+      </p:nvGrpSpPr>
+      <p:grpSpPr/>
+      <p:sp>
+        <p:nvSpPr>
+          <p:cNvPr id="2" name="TextBox 1"/>
+          <p:cNvSpPr txBox="1"/>
+          <p:nvPr/>
+        </p:nvSpPr>
+        <p:spPr>
+          <a:xfrm>
+            <a:off x="594360" y="347472"/>
+            <a:ext cx="11064240" cy="457200"/>
+          </a:xfrm>
+          <a:prstGeom prst="rect">
+            <a:avLst/>
+          </a:prstGeom>
+          <a:noFill/>
+        </p:spPr>
+        <p:txBody>
+          <a:bodyPr wrap="none">
+            <a:spAutoFit/>
+          </a:bodyPr>
+          <a:lstStyle/>
+          <a:p>
+            <a:r>
+              <a:rPr sz="2500" b="1" i="0">
+                <a:latin typeface="Calibri"/>
+              </a:rPr>
+              <a:t>Тестове</a:t>
+            </a:r>
+          </a:p>
+        </p:txBody>
+      </p:sp>
+      <p:sp>
+        <p:nvSpPr>
+          <p:cNvPr id="3" name="Rectangle 2"/>
+          <p:cNvSpPr/>
+          <p:nvPr/>
+        </p:nvSpPr>
+        <p:spPr>
+          <a:xfrm>
+            <a:off x="594360" y="932688"/>
+            <a:ext cx="10972800" cy="18288"/>
+          </a:xfrm>
+          <a:prstGeom prst="rect">
+            <a:avLst/>
+          </a:prstGeom>
+          <a:solidFill>
+            <a:srgbClr val="000000"/>
+          </a:solidFill>
+          <a:ln>
+            <a:solidFill>
+              <a:srgbClr val="000000"/>
+            </a:solidFill>
+          </a:ln>
+        </p:spPr>
+        <p:style>
+          <a:lnRef idx="1">
+            <a:schemeClr val="accent1"/>
+          </a:lnRef>
+          <a:fillRef idx="3">
+            <a:schemeClr val="accent1"/>
+          </a:fillRef>
+          <a:effectRef idx="2">
+            <a:schemeClr val="accent1"/>
+          </a:effectRef>
+          <a:fontRef idx="minor">
+            <a:schemeClr val="lt1"/>
+          </a:fontRef>
+        </p:style>
+        <p:txBody>
+          <a:bodyPr rtlCol="0" anchor="ctr"/>
+          <a:lstStyle/>
+          <a:p>
+            <a:pPr algn="ctr"/>
+          </a:p>
+        </p:txBody>
+      </p:sp>
+      <p:sp>
+        <p:nvSpPr>
+          <p:cNvPr id="4" name="TextBox 3"/>
+          <p:cNvSpPr txBox="1"/>
+          <p:nvPr/>
+        </p:nvSpPr>
+        <p:spPr>
+          <a:xfrm>
+            <a:off x="822960" y="1234440"/>
+            <a:ext cx="10607040" cy="5074920"/>
+          </a:xfrm>
+          <a:prstGeom prst="rect">
+            <a:avLst/>
+          </a:prstGeom>
+          <a:noFill/>
+        </p:spPr>
+        <p:txBody>
+          <a:bodyPr wrap="square" lIns="45720" rIns="45720">
+            <a:spAutoFit/>
+          </a:bodyPr>
+          <a:lstStyle/>
+          <a:p>
+            <a:pPr>
+              <a:spcAft>
+                <a:spcPts val="1000"/>
+              </a:spcAft>
+              <a:defRPr sz="2000">
+                <a:latin typeface="Calibri"/>
+              </a:defRPr>
+            </a:pPr>
+            <a:r>
+              <a:t>Добавих тестове, за да проверявам основните части на проекта.</a:t>
+            </a:r>
+          </a:p>
+          <a:p>
+            <a:pPr>
+              <a:spcAft>
+                <a:spcPts val="1000"/>
+              </a:spcAft>
+              <a:defRPr sz="2000">
+                <a:latin typeface="Calibri"/>
+              </a:defRPr>
+            </a:pPr>
+            <a:r>
+              <a:t>Има тестове за vocabulary, dataset, split логика, модел, training и evaluation.</a:t>
+            </a:r>
+          </a:p>
+          <a:p>
+            <a:pPr>
+              <a:spcAft>
+                <a:spcPts val="1000"/>
+              </a:spcAft>
+              <a:defRPr sz="2000">
+                <a:latin typeface="Calibri"/>
+              </a:defRPr>
+            </a:pPr>
+            <a:r>
+              <a:t>Проверяват се и retrieval, TF-IDF, BLIP wrapper и presentation builder.</a:t>
+            </a:r>
+          </a:p>
+          <a:p>
+            <a:pPr>
+              <a:spcAft>
+                <a:spcPts val="1000"/>
+              </a:spcAft>
+              <a:defRPr sz="2000">
+                <a:latin typeface="Calibri"/>
+              </a:defRPr>
+            </a:pPr>
+            <a:r>
+              <a:t>Последната пълна проверка мина с 31 успешни теста.</a:t>
+            </a:r>
+          </a:p>
+          <a:p>
+            <a:pPr>
+              <a:spcAft>
+                <a:spcPts val="1000"/>
+              </a:spcAft>
+              <a:defRPr sz="2000">
+                <a:latin typeface="Calibri"/>
+              </a:defRPr>
+            </a:pPr>
+            <a:r>
+              <a:t>Това ми дава сигурност, че промените по проекта не чупят основната функционалност.</a:t>
+            </a:r>
+          </a:p>
+        </p:txBody>
+      </p:sp>
+      <p:sp>
+        <p:nvSpPr>
+          <p:cNvPr id="5" name="TextBox 4"/>
+          <p:cNvSpPr txBox="1"/>
+          <p:nvPr/>
+        </p:nvSpPr>
+        <p:spPr>
+          <a:xfrm>
+            <a:off x="502920" y="6473952"/>
+            <a:ext cx="7772400" cy="228600"/>
+          </a:xfrm>
+          <a:prstGeom prst="rect">
+            <a:avLst/>
+          </a:prstGeom>
+          <a:noFill/>
+        </p:spPr>
+        <p:txBody>
+          <a:bodyPr wrap="none">
+            <a:spAutoFit/>
+          </a:bodyPr>
+          <a:lstStyle/>
+          <a:p>
+            <a:pPr algn="l"/>
+            <a:r>
+              <a:rPr sz="800" b="0" i="1">
+                <a:latin typeface="Calibri"/>
+              </a:rPr>
+              <a:t>Генериране на описание за изображение</a:t>
+            </a:r>
+          </a:p>
+        </p:txBody>
+      </p:sp>
+      <p:sp>
+        <p:nvSpPr>
+          <p:cNvPr id="6" name="TextBox 5"/>
+          <p:cNvSpPr txBox="1"/>
+          <p:nvPr/>
+        </p:nvSpPr>
+        <p:spPr>
+          <a:xfrm>
+            <a:off x="10789920" y="6473952"/>
+            <a:ext cx="822960" cy="228600"/>
+          </a:xfrm>
+          <a:prstGeom prst="rect">
+            <a:avLst/>
+          </a:prstGeom>
+          <a:noFill/>
+        </p:spPr>
+        <p:txBody>
+          <a:bodyPr wrap="none">
+            <a:spAutoFit/>
+          </a:bodyPr>
+          <a:lstStyle/>
+          <a:p>
+            <a:pPr algn="r"/>
+            <a:r>
+              <a:rPr sz="800" b="0" i="0">
+                <a:latin typeface="Calibri"/>
+              </a:rPr>
+              <a:t>27/31</a:t>
+            </a:r>
+          </a:p>
+        </p:txBody>
+      </p:sp>
+    </p:spTree>
+  </p:cSld>
+  <p:clrMapOvr>
+    <a:masterClrMapping/>
+  </p:clrMapOvr>
+</p:sld>
+</file>
+
+<file path=ppt/slides/slide28.xml><?xml version="1.0" encoding="utf-8"?>
+<p:sld xmlns:a="http://schemas.openxmlformats.org/drawingml/2006/main" xmlns:p="http://schemas.openxmlformats.org/presentationml/2006/main" xmlns:r="http://schemas.openxmlformats.org/officeDocument/2006/relationships">
+  <p:cSld>
+    <p:spTree>
+      <p:nvGrpSpPr>
+        <p:cNvPr id="1" name=""/>
+        <p:cNvGrpSpPr/>
+        <p:nvPr/>
+      </p:nvGrpSpPr>
+      <p:grpSpPr/>
+      <p:sp>
+        <p:nvSpPr>
+          <p:cNvPr id="2" name="TextBox 1"/>
+          <p:cNvSpPr txBox="1"/>
+          <p:nvPr/>
+        </p:nvSpPr>
+        <p:spPr>
+          <a:xfrm>
+            <a:off x="594360" y="347472"/>
+            <a:ext cx="11064240" cy="457200"/>
+          </a:xfrm>
+          <a:prstGeom prst="rect">
+            <a:avLst/>
+          </a:prstGeom>
+          <a:noFill/>
+        </p:spPr>
+        <p:txBody>
+          <a:bodyPr wrap="none">
+            <a:spAutoFit/>
+          </a:bodyPr>
+          <a:lstStyle/>
+          <a:p>
+            <a:r>
+              <a:rPr sz="2500" b="1" i="0">
+                <a:latin typeface="Calibri"/>
+              </a:rPr>
+              <a:t>Покритие на изискванията</a:t>
+            </a:r>
+          </a:p>
+        </p:txBody>
+      </p:sp>
+      <p:sp>
+        <p:nvSpPr>
+          <p:cNvPr id="3" name="Rectangle 2"/>
+          <p:cNvSpPr/>
+          <p:nvPr/>
+        </p:nvSpPr>
+        <p:spPr>
+          <a:xfrm>
+            <a:off x="594360" y="932688"/>
+            <a:ext cx="10972800" cy="18288"/>
+          </a:xfrm>
+          <a:prstGeom prst="rect">
+            <a:avLst/>
+          </a:prstGeom>
+          <a:solidFill>
+            <a:srgbClr val="000000"/>
+          </a:solidFill>
+          <a:ln>
+            <a:solidFill>
+              <a:srgbClr val="000000"/>
+            </a:solidFill>
+          </a:ln>
+        </p:spPr>
+        <p:style>
+          <a:lnRef idx="1">
+            <a:schemeClr val="accent1"/>
+          </a:lnRef>
+          <a:fillRef idx="3">
+            <a:schemeClr val="accent1"/>
+          </a:fillRef>
+          <a:effectRef idx="2">
+            <a:schemeClr val="accent1"/>
+          </a:effectRef>
+          <a:fontRef idx="minor">
+            <a:schemeClr val="lt1"/>
+          </a:fontRef>
+        </p:style>
+        <p:txBody>
+          <a:bodyPr rtlCol="0" anchor="ctr"/>
+          <a:lstStyle/>
+          <a:p>
+            <a:pPr algn="ctr"/>
+          </a:p>
+        </p:txBody>
+      </p:sp>
+      <p:sp>
+        <p:nvSpPr>
+          <p:cNvPr id="4" name="TextBox 3"/>
+          <p:cNvSpPr txBox="1"/>
+          <p:nvPr/>
+        </p:nvSpPr>
+        <p:spPr>
+          <a:xfrm>
+            <a:off x="822960" y="1234440"/>
+            <a:ext cx="10607040" cy="5074920"/>
+          </a:xfrm>
+          <a:prstGeom prst="rect">
+            <a:avLst/>
+          </a:prstGeom>
+          <a:noFill/>
+        </p:spPr>
+        <p:txBody>
+          <a:bodyPr wrap="square" lIns="45720" rIns="45720">
+            <a:spAutoFit/>
+          </a:bodyPr>
+          <a:lstStyle/>
+          <a:p>
+            <a:pPr>
+              <a:spcAft>
+                <a:spcPts val="600"/>
+              </a:spcAft>
+              <a:defRPr sz="1800">
+                <a:latin typeface="Calibri"/>
+              </a:defRPr>
+            </a:pPr>
+            <a:r>
+              <a:t>Разгледах encoder-decoder, attention, transformer и retrieval подходи.</a:t>
+            </a:r>
+          </a:p>
+          <a:p>
+            <a:pPr>
+              <a:spcAft>
+                <a:spcPts val="600"/>
+              </a:spcAft>
+              <a:defRPr sz="1800">
+                <a:latin typeface="Calibri"/>
+              </a:defRPr>
+            </a:pPr>
+            <a:r>
+              <a:t>Направих EDA анализ с таблици, визуализации и коментари.</a:t>
+            </a:r>
+          </a:p>
+          <a:p>
+            <a:pPr>
+              <a:spcAft>
+                <a:spcPts val="600"/>
+              </a:spcAft>
+              <a:defRPr sz="1800">
+                <a:latin typeface="Calibri"/>
+              </a:defRPr>
+            </a:pPr>
+            <a:r>
+              <a:t>Реализирах preprocessing и augmentation за изображенията.</a:t>
+            </a:r>
+          </a:p>
+          <a:p>
+            <a:pPr>
+              <a:spcAft>
+                <a:spcPts val="600"/>
+              </a:spcAft>
+              <a:defRPr sz="1800">
+                <a:latin typeface="Calibri"/>
+              </a:defRPr>
+            </a:pPr>
+            <a:r>
+              <a:t>Използвах trainable Embedding слой и добавих TF-IDF експеримент.</a:t>
+            </a:r>
+          </a:p>
+          <a:p>
+            <a:pPr>
+              <a:spcAft>
+                <a:spcPts val="600"/>
+              </a:spcAft>
+              <a:defRPr sz="1800">
+                <a:latin typeface="Calibri"/>
+              </a:defRPr>
+            </a:pPr>
+            <a:r>
+              <a:t>Реализирах VGG16 + LSTM и пробвах няколко architecture варианта.</a:t>
+            </a:r>
+          </a:p>
+          <a:p>
+            <a:pPr>
+              <a:spcAft>
+                <a:spcPts val="600"/>
+              </a:spcAft>
+              <a:defRPr sz="1800">
+                <a:latin typeface="Calibri"/>
+              </a:defRPr>
+            </a:pPr>
+            <a:r>
+              <a:t>Направих Streamlit приложение и автоматични тестове.</a:t>
+            </a:r>
+          </a:p>
+        </p:txBody>
+      </p:sp>
+      <p:sp>
+        <p:nvSpPr>
+          <p:cNvPr id="5" name="TextBox 4"/>
+          <p:cNvSpPr txBox="1"/>
+          <p:nvPr/>
+        </p:nvSpPr>
+        <p:spPr>
+          <a:xfrm>
+            <a:off x="502920" y="6473952"/>
+            <a:ext cx="7772400" cy="228600"/>
+          </a:xfrm>
+          <a:prstGeom prst="rect">
+            <a:avLst/>
+          </a:prstGeom>
+          <a:noFill/>
+        </p:spPr>
+        <p:txBody>
+          <a:bodyPr wrap="none">
+            <a:spAutoFit/>
+          </a:bodyPr>
+          <a:lstStyle/>
+          <a:p>
+            <a:pPr algn="l"/>
+            <a:r>
+              <a:rPr sz="800" b="0" i="1">
+                <a:latin typeface="Calibri"/>
+              </a:rPr>
+              <a:t>Генериране на описание за изображение</a:t>
+            </a:r>
+          </a:p>
+        </p:txBody>
+      </p:sp>
+      <p:sp>
+        <p:nvSpPr>
+          <p:cNvPr id="6" name="TextBox 5"/>
+          <p:cNvSpPr txBox="1"/>
+          <p:nvPr/>
+        </p:nvSpPr>
+        <p:spPr>
+          <a:xfrm>
+            <a:off x="10789920" y="6473952"/>
+            <a:ext cx="822960" cy="228600"/>
+          </a:xfrm>
+          <a:prstGeom prst="rect">
+            <a:avLst/>
+          </a:prstGeom>
+          <a:noFill/>
+        </p:spPr>
+        <p:txBody>
+          <a:bodyPr wrap="none">
+            <a:spAutoFit/>
+          </a:bodyPr>
+          <a:lstStyle/>
+          <a:p>
+            <a:pPr algn="r"/>
+            <a:r>
+              <a:rPr sz="800" b="0" i="0">
+                <a:latin typeface="Calibri"/>
+              </a:rPr>
+              <a:t>28/31</a:t>
+            </a:r>
+          </a:p>
+        </p:txBody>
+      </p:sp>
+    </p:spTree>
+  </p:cSld>
+  <p:clrMapOvr>
+    <a:masterClrMapping/>
+  </p:clrMapOvr>
+</p:sld>
+</file>
+
+<file path=ppt/slides/slide29.xml><?xml version="1.0" encoding="utf-8"?>
+<p:sld xmlns:a="http://schemas.openxmlformats.org/drawingml/2006/main" xmlns:p="http://schemas.openxmlformats.org/presentationml/2006/main" xmlns:r="http://schemas.openxmlformats.org/officeDocument/2006/relationships">
+  <p:cSld>
+    <p:spTree>
+      <p:nvGrpSpPr>
+        <p:cNvPr id="1" name=""/>
+        <p:cNvGrpSpPr/>
+        <p:nvPr/>
+      </p:nvGrpSpPr>
+      <p:grpSpPr/>
+      <p:sp>
+        <p:nvSpPr>
+          <p:cNvPr id="2" name="TextBox 1"/>
+          <p:cNvSpPr txBox="1"/>
+          <p:nvPr/>
+        </p:nvSpPr>
+        <p:spPr>
+          <a:xfrm>
+            <a:off x="594360" y="347472"/>
+            <a:ext cx="11064240" cy="457200"/>
+          </a:xfrm>
+          <a:prstGeom prst="rect">
+            <a:avLst/>
+          </a:prstGeom>
+          <a:noFill/>
+        </p:spPr>
+        <p:txBody>
+          <a:bodyPr wrap="none">
+            <a:spAutoFit/>
+          </a:bodyPr>
+          <a:lstStyle/>
+          <a:p>
+            <a:r>
+              <a:rPr sz="2500" b="1" i="0">
+                <a:latin typeface="Calibri"/>
+              </a:rPr>
+              <a:t>Основни ограничения</a:t>
+            </a:r>
+          </a:p>
+        </p:txBody>
+      </p:sp>
+      <p:sp>
+        <p:nvSpPr>
+          <p:cNvPr id="3" name="Rectangle 2"/>
+          <p:cNvSpPr/>
+          <p:nvPr/>
+        </p:nvSpPr>
+        <p:spPr>
+          <a:xfrm>
+            <a:off x="594360" y="932688"/>
+            <a:ext cx="10972800" cy="18288"/>
+          </a:xfrm>
+          <a:prstGeom prst="rect">
+            <a:avLst/>
+          </a:prstGeom>
+          <a:solidFill>
+            <a:srgbClr val="000000"/>
+          </a:solidFill>
+          <a:ln>
+            <a:solidFill>
+              <a:srgbClr val="000000"/>
+            </a:solidFill>
+          </a:ln>
+        </p:spPr>
+        <p:style>
+          <a:lnRef idx="1">
+            <a:schemeClr val="accent1"/>
+          </a:lnRef>
+          <a:fillRef idx="3">
+            <a:schemeClr val="accent1"/>
+          </a:fillRef>
+          <a:effectRef idx="2">
+            <a:schemeClr val="accent1"/>
+          </a:effectRef>
+          <a:fontRef idx="minor">
+            <a:schemeClr val="lt1"/>
+          </a:fontRef>
+        </p:style>
+        <p:txBody>
+          <a:bodyPr rtlCol="0" anchor="ctr"/>
+          <a:lstStyle/>
+          <a:p>
+            <a:pPr algn="ctr"/>
+          </a:p>
+        </p:txBody>
+      </p:sp>
+      <p:sp>
+        <p:nvSpPr>
+          <p:cNvPr id="4" name="TextBox 3"/>
+          <p:cNvSpPr txBox="1"/>
+          <p:nvPr/>
+        </p:nvSpPr>
+        <p:spPr>
+          <a:xfrm>
+            <a:off x="822960" y="1234440"/>
+            <a:ext cx="10607040" cy="5074920"/>
+          </a:xfrm>
+          <a:prstGeom prst="rect">
+            <a:avLst/>
+          </a:prstGeom>
+          <a:noFill/>
+        </p:spPr>
+        <p:txBody>
+          <a:bodyPr wrap="square" lIns="45720" rIns="45720">
+            <a:spAutoFit/>
+          </a:bodyPr>
+          <a:lstStyle/>
+          <a:p>
+            <a:pPr>
+              <a:spcAft>
+                <a:spcPts val="1000"/>
+              </a:spcAft>
+              <a:defRPr sz="2000">
+                <a:latin typeface="Calibri"/>
+              </a:defRPr>
+            </a:pPr>
+            <a:r>
+              <a:t>Най-голямото ограничение е размерът и съдържанието на Flickr8k.</a:t>
+            </a:r>
+          </a:p>
+          <a:p>
+            <a:pPr>
+              <a:spcAft>
+                <a:spcPts val="1000"/>
+              </a:spcAft>
+              <a:defRPr sz="2000">
+                <a:latin typeface="Calibri"/>
+              </a:defRPr>
+            </a:pPr>
+            <a:r>
+              <a:t>Dataset-ът не покрива всички сцени, които човек може да качи в приложението.</a:t>
+            </a:r>
+          </a:p>
+          <a:p>
+            <a:pPr>
+              <a:spcAft>
+                <a:spcPts val="1000"/>
+              </a:spcAft>
+              <a:defRPr sz="2000">
+                <a:latin typeface="Calibri"/>
+              </a:defRPr>
+            </a:pPr>
+            <a:r>
+              <a:t>VGG16 + LSTM без attention често избира по-общи captions.</a:t>
+            </a:r>
+          </a:p>
+          <a:p>
+            <a:pPr>
+              <a:spcAft>
+                <a:spcPts val="1000"/>
+              </a:spcAft>
+              <a:defRPr sz="2000">
+                <a:latin typeface="Calibri"/>
+              </a:defRPr>
+            </a:pPr>
+            <a:r>
+              <a:t>Beam search помага малко при decoding-а, но не променя знанията на модела.</a:t>
+            </a:r>
+          </a:p>
+          <a:p>
+            <a:pPr>
+              <a:spcAft>
+                <a:spcPts val="1000"/>
+              </a:spcAft>
+              <a:defRPr sz="2000">
+                <a:latin typeface="Calibri"/>
+              </a:defRPr>
+            </a:pPr>
+            <a:r>
+              <a:t>Затова при произволни лични снимки резултатът не винаги е надежден.</a:t>
+            </a:r>
+          </a:p>
+        </p:txBody>
+      </p:sp>
+      <p:sp>
+        <p:nvSpPr>
+          <p:cNvPr id="5" name="TextBox 4"/>
+          <p:cNvSpPr txBox="1"/>
+          <p:nvPr/>
+        </p:nvSpPr>
+        <p:spPr>
+          <a:xfrm>
+            <a:off x="502920" y="6473952"/>
+            <a:ext cx="7772400" cy="228600"/>
+          </a:xfrm>
+          <a:prstGeom prst="rect">
+            <a:avLst/>
+          </a:prstGeom>
+          <a:noFill/>
+        </p:spPr>
+        <p:txBody>
+          <a:bodyPr wrap="none">
+            <a:spAutoFit/>
+          </a:bodyPr>
+          <a:lstStyle/>
+          <a:p>
+            <a:pPr algn="l"/>
+            <a:r>
+              <a:rPr sz="800" b="0" i="1">
+                <a:latin typeface="Calibri"/>
+              </a:rPr>
+              <a:t>Генериране на описание за изображение</a:t>
+            </a:r>
+          </a:p>
+        </p:txBody>
+      </p:sp>
+      <p:sp>
+        <p:nvSpPr>
+          <p:cNvPr id="6" name="TextBox 5"/>
+          <p:cNvSpPr txBox="1"/>
+          <p:nvPr/>
+        </p:nvSpPr>
+        <p:spPr>
+          <a:xfrm>
+            <a:off x="10789920" y="6473952"/>
+            <a:ext cx="822960" cy="228600"/>
+          </a:xfrm>
+          <a:prstGeom prst="rect">
+            <a:avLst/>
+          </a:prstGeom>
+          <a:noFill/>
+        </p:spPr>
+        <p:txBody>
+          <a:bodyPr wrap="none">
+            <a:spAutoFit/>
+          </a:bodyPr>
+          <a:lstStyle/>
+          <a:p>
+            <a:pPr algn="r"/>
+            <a:r>
+              <a:rPr sz="800" b="0" i="0">
+                <a:latin typeface="Calibri"/>
+              </a:rPr>
+              <a:t>29/31</a:t>
             </a:r>
           </a:p>
         </p:txBody>
@@ -5061,8 +8520,8 @@
         </p:nvSpPr>
         <p:spPr>
           <a:xfrm>
-            <a:off x="640080" y="411480"/>
-            <a:ext cx="10972800" cy="502920"/>
+            <a:off x="594360" y="347472"/>
+            <a:ext cx="11064240" cy="457200"/>
           </a:xfrm>
           <a:prstGeom prst="rect">
             <a:avLst/>
@@ -5075,9 +8534,8 @@
           </a:bodyPr>
           <a:lstStyle/>
           <a:p>
-            <a:pPr algn="l"/>
-            <a:r>
-              <a:rPr sz="2600" b="1" i="0">
+            <a:r>
+              <a:rPr sz="2500" b="1" i="0">
                 <a:latin typeface="Calibri"/>
               </a:rPr>
               <a:t>Цел на проекта</a:t>
@@ -5093,8 +8551,8 @@
         </p:nvSpPr>
         <p:spPr>
           <a:xfrm>
-            <a:off x="640080" y="1005840"/>
-            <a:ext cx="10881360" cy="9144"/>
+            <a:off x="594360" y="932688"/>
+            <a:ext cx="10972800" cy="18288"/>
           </a:xfrm>
           <a:prstGeom prst="rect">
             <a:avLst/>
@@ -5138,69 +8596,69 @@
         </p:nvSpPr>
         <p:spPr>
           <a:xfrm>
-            <a:off x="868680" y="1325880"/>
-            <a:ext cx="10424160" cy="4754880"/>
-          </a:xfrm>
-          <a:prstGeom prst="rect">
-            <a:avLst/>
-          </a:prstGeom>
-          <a:noFill/>
-        </p:spPr>
-        <p:txBody>
-          <a:bodyPr wrap="square">
-            <a:spAutoFit/>
-          </a:bodyPr>
-          <a:lstStyle/>
-          <a:p>
-            <a:pPr>
-              <a:spcAft>
-                <a:spcPts val="1000"/>
-              </a:spcAft>
-              <a:defRPr sz="2100">
-                <a:latin typeface="Calibri"/>
-              </a:defRPr>
-            </a:pPr>
-            <a:r>
-              <a:t>Да се разработи уеб приложение, което приема изображение и генерира кратко текстово описание.</a:t>
-            </a:r>
-          </a:p>
-          <a:p>
-            <a:pPr>
-              <a:spcAft>
-                <a:spcPts val="1000"/>
-              </a:spcAft>
-              <a:defRPr sz="2100">
-                <a:latin typeface="Calibri"/>
-              </a:defRPr>
-            </a:pPr>
-            <a:r>
-              <a:t>Проектът комбинира обработка на изображения и обработка на естествен език.</a:t>
-            </a:r>
-          </a:p>
-          <a:p>
-            <a:pPr>
-              <a:spcAft>
-                <a:spcPts val="1000"/>
-              </a:spcAft>
-              <a:defRPr sz="2100">
-                <a:latin typeface="Calibri"/>
-              </a:defRPr>
-            </a:pPr>
-            <a:r>
-              <a:t>Основният модел е реализиран като encoder-decoder архитектура с VGG16 и LSTM.</a:t>
-            </a:r>
-          </a:p>
-          <a:p>
-            <a:pPr>
-              <a:spcAft>
-                <a:spcPts val="1000"/>
-              </a:spcAft>
-              <a:defRPr sz="2100">
-                <a:latin typeface="Calibri"/>
-              </a:defRPr>
-            </a:pPr>
-            <a:r>
-              <a:t>Като допълнение са направени сравнения с retrieval подход и предварително обучен модел.</a:t>
+            <a:off x="822960" y="1234440"/>
+            <a:ext cx="10607040" cy="5074920"/>
+          </a:xfrm>
+          <a:prstGeom prst="rect">
+            <a:avLst/>
+          </a:prstGeom>
+          <a:noFill/>
+        </p:spPr>
+        <p:txBody>
+          <a:bodyPr wrap="square" lIns="45720" rIns="45720">
+            <a:spAutoFit/>
+          </a:bodyPr>
+          <a:lstStyle/>
+          <a:p>
+            <a:pPr>
+              <a:spcAft>
+                <a:spcPts val="1000"/>
+              </a:spcAft>
+              <a:defRPr sz="2000">
+                <a:latin typeface="Calibri"/>
+              </a:defRPr>
+            </a:pPr>
+            <a:r>
+              <a:t>Целта ми беше да направя работещ проект от край до край, а не само отделен модел.</a:t>
+            </a:r>
+          </a:p>
+          <a:p>
+            <a:pPr>
+              <a:spcAft>
+                <a:spcPts val="1000"/>
+              </a:spcAft>
+              <a:defRPr sz="2000">
+                <a:latin typeface="Calibri"/>
+              </a:defRPr>
+            </a:pPr>
+            <a:r>
+              <a:t>Затова включих всички основни части: dataset, EDA, split, preprocessing, vocabulary, model, training, evaluation и приложение.</a:t>
+            </a:r>
+          </a:p>
+          <a:p>
+            <a:pPr>
+              <a:spcAft>
+                <a:spcPts val="1000"/>
+              </a:spcAft>
+              <a:defRPr sz="2000">
+                <a:latin typeface="Calibri"/>
+              </a:defRPr>
+            </a:pPr>
+            <a:r>
+              <a:t>Исках също да мога да видя резултата визуално, затова направих Streamlit app за качване на снимки.</a:t>
+            </a:r>
+          </a:p>
+          <a:p>
+            <a:pPr>
+              <a:spcAft>
+                <a:spcPts val="1000"/>
+              </a:spcAft>
+              <a:defRPr sz="2000">
+                <a:latin typeface="Calibri"/>
+              </a:defRPr>
+            </a:pPr>
+            <a:r>
+              <a:t>Проектът не цели да бъде перфектен captioning модел, а да покаже целия процес и реалните ограничения.</a:t>
             </a:r>
           </a:p>
         </p:txBody>
@@ -5213,8 +8671,8 @@
         </p:nvSpPr>
         <p:spPr>
           <a:xfrm>
-            <a:off x="548640" y="6473952"/>
-            <a:ext cx="5486400" cy="228600"/>
+            <a:off x="502920" y="6473952"/>
+            <a:ext cx="7772400" cy="228600"/>
           </a:xfrm>
           <a:prstGeom prst="rect">
             <a:avLst/>
@@ -5245,8 +8703,8 @@
         </p:nvSpPr>
         <p:spPr>
           <a:xfrm>
-            <a:off x="10972800" y="6473952"/>
-            <a:ext cx="640080" cy="228600"/>
+            <a:off x="10789920" y="6473952"/>
+            <a:ext cx="822960" cy="228600"/>
           </a:xfrm>
           <a:prstGeom prst="rect">
             <a:avLst/>
@@ -5264,7 +8722,499 @@
               <a:rPr sz="800" b="0" i="0">
                 <a:latin typeface="Calibri"/>
               </a:rPr>
-              <a:t>3/15</a:t>
+              <a:t>3/31</a:t>
+            </a:r>
+          </a:p>
+        </p:txBody>
+      </p:sp>
+    </p:spTree>
+  </p:cSld>
+  <p:clrMapOvr>
+    <a:masterClrMapping/>
+  </p:clrMapOvr>
+</p:sld>
+</file>
+
+<file path=ppt/slides/slide30.xml><?xml version="1.0" encoding="utf-8"?>
+<p:sld xmlns:a="http://schemas.openxmlformats.org/drawingml/2006/main" xmlns:p="http://schemas.openxmlformats.org/presentationml/2006/main" xmlns:r="http://schemas.openxmlformats.org/officeDocument/2006/relationships">
+  <p:cSld>
+    <p:spTree>
+      <p:nvGrpSpPr>
+        <p:cNvPr id="1" name=""/>
+        <p:cNvGrpSpPr/>
+        <p:nvPr/>
+      </p:nvGrpSpPr>
+      <p:grpSpPr/>
+      <p:sp>
+        <p:nvSpPr>
+          <p:cNvPr id="2" name="TextBox 1"/>
+          <p:cNvSpPr txBox="1"/>
+          <p:nvPr/>
+        </p:nvSpPr>
+        <p:spPr>
+          <a:xfrm>
+            <a:off x="594360" y="347472"/>
+            <a:ext cx="11064240" cy="457200"/>
+          </a:xfrm>
+          <a:prstGeom prst="rect">
+            <a:avLst/>
+          </a:prstGeom>
+          <a:noFill/>
+        </p:spPr>
+        <p:txBody>
+          <a:bodyPr wrap="none">
+            <a:spAutoFit/>
+          </a:bodyPr>
+          <a:lstStyle/>
+          <a:p>
+            <a:r>
+              <a:rPr sz="2500" b="1" i="0">
+                <a:latin typeface="Calibri"/>
+              </a:rPr>
+              <a:t>Какво бих подобрил</a:t>
+            </a:r>
+          </a:p>
+        </p:txBody>
+      </p:sp>
+      <p:sp>
+        <p:nvSpPr>
+          <p:cNvPr id="3" name="Rectangle 2"/>
+          <p:cNvSpPr/>
+          <p:nvPr/>
+        </p:nvSpPr>
+        <p:spPr>
+          <a:xfrm>
+            <a:off x="594360" y="932688"/>
+            <a:ext cx="10972800" cy="18288"/>
+          </a:xfrm>
+          <a:prstGeom prst="rect">
+            <a:avLst/>
+          </a:prstGeom>
+          <a:solidFill>
+            <a:srgbClr val="000000"/>
+          </a:solidFill>
+          <a:ln>
+            <a:solidFill>
+              <a:srgbClr val="000000"/>
+            </a:solidFill>
+          </a:ln>
+        </p:spPr>
+        <p:style>
+          <a:lnRef idx="1">
+            <a:schemeClr val="accent1"/>
+          </a:lnRef>
+          <a:fillRef idx="3">
+            <a:schemeClr val="accent1"/>
+          </a:fillRef>
+          <a:effectRef idx="2">
+            <a:schemeClr val="accent1"/>
+          </a:effectRef>
+          <a:fontRef idx="minor">
+            <a:schemeClr val="lt1"/>
+          </a:fontRef>
+        </p:style>
+        <p:txBody>
+          <a:bodyPr rtlCol="0" anchor="ctr"/>
+          <a:lstStyle/>
+          <a:p>
+            <a:pPr algn="ctr"/>
+          </a:p>
+        </p:txBody>
+      </p:sp>
+      <p:sp>
+        <p:nvSpPr>
+          <p:cNvPr id="4" name="TextBox 3"/>
+          <p:cNvSpPr txBox="1"/>
+          <p:nvPr/>
+        </p:nvSpPr>
+        <p:spPr>
+          <a:xfrm>
+            <a:off x="822960" y="1234440"/>
+            <a:ext cx="10607040" cy="5074920"/>
+          </a:xfrm>
+          <a:prstGeom prst="rect">
+            <a:avLst/>
+          </a:prstGeom>
+          <a:noFill/>
+        </p:spPr>
+        <p:txBody>
+          <a:bodyPr wrap="square" lIns="45720" rIns="45720">
+            <a:spAutoFit/>
+          </a:bodyPr>
+          <a:lstStyle/>
+          <a:p>
+            <a:pPr>
+              <a:spcAft>
+                <a:spcPts val="1000"/>
+              </a:spcAft>
+              <a:defRPr sz="2000">
+                <a:latin typeface="Calibri"/>
+              </a:defRPr>
+            </a:pPr>
+            <a:r>
+              <a:t>Бих добавил attention decoder, за да може моделът да използва по-добре различни части от изображението.</a:t>
+            </a:r>
+          </a:p>
+          <a:p>
+            <a:pPr>
+              <a:spcAft>
+                <a:spcPts val="1000"/>
+              </a:spcAft>
+              <a:defRPr sz="2000">
+                <a:latin typeface="Calibri"/>
+              </a:defRPr>
+            </a:pPr>
+            <a:r>
+              <a:t>Бих пробвал обучение върху по-голям dataset като MS COCO.</a:t>
+            </a:r>
+          </a:p>
+          <a:p>
+            <a:pPr>
+              <a:spcAft>
+                <a:spcPts val="1000"/>
+              </a:spcAft>
+              <a:defRPr sz="2000">
+                <a:latin typeface="Calibri"/>
+              </a:defRPr>
+            </a:pPr>
+            <a:r>
+              <a:t>Бих тествал pretrained word embeddings като GloVe или FastText.</a:t>
+            </a:r>
+          </a:p>
+          <a:p>
+            <a:pPr>
+              <a:spcAft>
+                <a:spcPts val="1000"/>
+              </a:spcAft>
+              <a:defRPr sz="2000">
+                <a:latin typeface="Calibri"/>
+              </a:defRPr>
+            </a:pPr>
+            <a:r>
+              <a:t>Бих размразил част от VGG16 и бих обучавал по-дълго.</a:t>
+            </a:r>
+          </a:p>
+          <a:p>
+            <a:pPr>
+              <a:spcAft>
+                <a:spcPts val="1000"/>
+              </a:spcAft>
+              <a:defRPr sz="2000">
+                <a:latin typeface="Calibri"/>
+              </a:defRPr>
+            </a:pPr>
+            <a:r>
+              <a:t>Бих добавил и повече ръчна оценка с реални примерни изображения.</a:t>
+            </a:r>
+          </a:p>
+        </p:txBody>
+      </p:sp>
+      <p:sp>
+        <p:nvSpPr>
+          <p:cNvPr id="5" name="TextBox 4"/>
+          <p:cNvSpPr txBox="1"/>
+          <p:nvPr/>
+        </p:nvSpPr>
+        <p:spPr>
+          <a:xfrm>
+            <a:off x="502920" y="6473952"/>
+            <a:ext cx="7772400" cy="228600"/>
+          </a:xfrm>
+          <a:prstGeom prst="rect">
+            <a:avLst/>
+          </a:prstGeom>
+          <a:noFill/>
+        </p:spPr>
+        <p:txBody>
+          <a:bodyPr wrap="none">
+            <a:spAutoFit/>
+          </a:bodyPr>
+          <a:lstStyle/>
+          <a:p>
+            <a:pPr algn="l"/>
+            <a:r>
+              <a:rPr sz="800" b="0" i="1">
+                <a:latin typeface="Calibri"/>
+              </a:rPr>
+              <a:t>Генериране на описание за изображение</a:t>
+            </a:r>
+          </a:p>
+        </p:txBody>
+      </p:sp>
+      <p:sp>
+        <p:nvSpPr>
+          <p:cNvPr id="6" name="TextBox 5"/>
+          <p:cNvSpPr txBox="1"/>
+          <p:nvPr/>
+        </p:nvSpPr>
+        <p:spPr>
+          <a:xfrm>
+            <a:off x="10789920" y="6473952"/>
+            <a:ext cx="822960" cy="228600"/>
+          </a:xfrm>
+          <a:prstGeom prst="rect">
+            <a:avLst/>
+          </a:prstGeom>
+          <a:noFill/>
+        </p:spPr>
+        <p:txBody>
+          <a:bodyPr wrap="none">
+            <a:spAutoFit/>
+          </a:bodyPr>
+          <a:lstStyle/>
+          <a:p>
+            <a:pPr algn="r"/>
+            <a:r>
+              <a:rPr sz="800" b="0" i="0">
+                <a:latin typeface="Calibri"/>
+              </a:rPr>
+              <a:t>30/31</a:t>
+            </a:r>
+          </a:p>
+        </p:txBody>
+      </p:sp>
+    </p:spTree>
+  </p:cSld>
+  <p:clrMapOvr>
+    <a:masterClrMapping/>
+  </p:clrMapOvr>
+</p:sld>
+</file>
+
+<file path=ppt/slides/slide31.xml><?xml version="1.0" encoding="utf-8"?>
+<p:sld xmlns:a="http://schemas.openxmlformats.org/drawingml/2006/main" xmlns:p="http://schemas.openxmlformats.org/presentationml/2006/main" xmlns:r="http://schemas.openxmlformats.org/officeDocument/2006/relationships">
+  <p:cSld>
+    <p:spTree>
+      <p:nvGrpSpPr>
+        <p:cNvPr id="1" name=""/>
+        <p:cNvGrpSpPr/>
+        <p:nvPr/>
+      </p:nvGrpSpPr>
+      <p:grpSpPr/>
+      <p:sp>
+        <p:nvSpPr>
+          <p:cNvPr id="2" name="TextBox 1"/>
+          <p:cNvSpPr txBox="1"/>
+          <p:nvPr/>
+        </p:nvSpPr>
+        <p:spPr>
+          <a:xfrm>
+            <a:off x="594360" y="347472"/>
+            <a:ext cx="11064240" cy="457200"/>
+          </a:xfrm>
+          <a:prstGeom prst="rect">
+            <a:avLst/>
+          </a:prstGeom>
+          <a:noFill/>
+        </p:spPr>
+        <p:txBody>
+          <a:bodyPr wrap="none">
+            <a:spAutoFit/>
+          </a:bodyPr>
+          <a:lstStyle/>
+          <a:p>
+            <a:r>
+              <a:rPr sz="2500" b="1" i="0">
+                <a:latin typeface="Calibri"/>
+              </a:rPr>
+              <a:t>Изводи</a:t>
+            </a:r>
+          </a:p>
+        </p:txBody>
+      </p:sp>
+      <p:sp>
+        <p:nvSpPr>
+          <p:cNvPr id="3" name="Rectangle 2"/>
+          <p:cNvSpPr/>
+          <p:nvPr/>
+        </p:nvSpPr>
+        <p:spPr>
+          <a:xfrm>
+            <a:off x="594360" y="932688"/>
+            <a:ext cx="10972800" cy="18288"/>
+          </a:xfrm>
+          <a:prstGeom prst="rect">
+            <a:avLst/>
+          </a:prstGeom>
+          <a:solidFill>
+            <a:srgbClr val="000000"/>
+          </a:solidFill>
+          <a:ln>
+            <a:solidFill>
+              <a:srgbClr val="000000"/>
+            </a:solidFill>
+          </a:ln>
+        </p:spPr>
+        <p:style>
+          <a:lnRef idx="1">
+            <a:schemeClr val="accent1"/>
+          </a:lnRef>
+          <a:fillRef idx="3">
+            <a:schemeClr val="accent1"/>
+          </a:fillRef>
+          <a:effectRef idx="2">
+            <a:schemeClr val="accent1"/>
+          </a:effectRef>
+          <a:fontRef idx="minor">
+            <a:schemeClr val="lt1"/>
+          </a:fontRef>
+        </p:style>
+        <p:txBody>
+          <a:bodyPr rtlCol="0" anchor="ctr"/>
+          <a:lstStyle/>
+          <a:p>
+            <a:pPr algn="ctr"/>
+          </a:p>
+        </p:txBody>
+      </p:sp>
+      <p:sp>
+        <p:nvSpPr>
+          <p:cNvPr id="4" name="TextBox 3"/>
+          <p:cNvSpPr txBox="1"/>
+          <p:nvPr/>
+        </p:nvSpPr>
+        <p:spPr>
+          <a:xfrm>
+            <a:off x="822960" y="1234440"/>
+            <a:ext cx="10607040" cy="5074920"/>
+          </a:xfrm>
+          <a:prstGeom prst="rect">
+            <a:avLst/>
+          </a:prstGeom>
+          <a:noFill/>
+        </p:spPr>
+        <p:txBody>
+          <a:bodyPr wrap="square" lIns="45720" rIns="45720">
+            <a:spAutoFit/>
+          </a:bodyPr>
+          <a:lstStyle/>
+          <a:p>
+            <a:pPr>
+              <a:spcAft>
+                <a:spcPts val="1000"/>
+              </a:spcAft>
+              <a:defRPr sz="2000">
+                <a:latin typeface="Calibri"/>
+              </a:defRPr>
+            </a:pPr>
+            <a:r>
+              <a:t>Проектът ми показва целия процес за image captioning — от данни до приложение.</a:t>
+            </a:r>
+          </a:p>
+          <a:p>
+            <a:pPr>
+              <a:spcAft>
+                <a:spcPts val="1000"/>
+              </a:spcAft>
+              <a:defRPr sz="2000">
+                <a:latin typeface="Calibri"/>
+              </a:defRPr>
+            </a:pPr>
+            <a:r>
+              <a:t>VGG16 + LSTM работи като baseline и е полезен за разбиране на задачата.</a:t>
+            </a:r>
+          </a:p>
+          <a:p>
+            <a:pPr>
+              <a:spcAft>
+                <a:spcPts val="1000"/>
+              </a:spcAft>
+              <a:defRPr sz="2000">
+                <a:latin typeface="Calibri"/>
+              </a:defRPr>
+            </a:pPr>
+            <a:r>
+              <a:t>EDA анализът обяснява защо моделът се справя по-добре с едни снимки и по-зле с други.</a:t>
+            </a:r>
+          </a:p>
+          <a:p>
+            <a:pPr>
+              <a:spcAft>
+                <a:spcPts val="1000"/>
+              </a:spcAft>
+              <a:defRPr sz="2000">
+                <a:latin typeface="Calibri"/>
+              </a:defRPr>
+            </a:pPr>
+            <a:r>
+              <a:t>Retrieval и BLIP режимите ми помагат да сравня различни нива на сложност.</a:t>
+            </a:r>
+          </a:p>
+          <a:p>
+            <a:pPr>
+              <a:spcAft>
+                <a:spcPts val="1000"/>
+              </a:spcAft>
+              <a:defRPr sz="2000">
+                <a:latin typeface="Calibri"/>
+              </a:defRPr>
+            </a:pPr>
+            <a:r>
+              <a:t>Най-важният ми извод е, че качеството зависи не само от модела, а и много силно от данните.</a:t>
+            </a:r>
+          </a:p>
+        </p:txBody>
+      </p:sp>
+      <p:sp>
+        <p:nvSpPr>
+          <p:cNvPr id="5" name="TextBox 4"/>
+          <p:cNvSpPr txBox="1"/>
+          <p:nvPr/>
+        </p:nvSpPr>
+        <p:spPr>
+          <a:xfrm>
+            <a:off x="502920" y="6473952"/>
+            <a:ext cx="7772400" cy="228600"/>
+          </a:xfrm>
+          <a:prstGeom prst="rect">
+            <a:avLst/>
+          </a:prstGeom>
+          <a:noFill/>
+        </p:spPr>
+        <p:txBody>
+          <a:bodyPr wrap="none">
+            <a:spAutoFit/>
+          </a:bodyPr>
+          <a:lstStyle/>
+          <a:p>
+            <a:pPr algn="l"/>
+            <a:r>
+              <a:rPr sz="800" b="0" i="1">
+                <a:latin typeface="Calibri"/>
+              </a:rPr>
+              <a:t>Генериране на описание за изображение</a:t>
+            </a:r>
+          </a:p>
+        </p:txBody>
+      </p:sp>
+      <p:sp>
+        <p:nvSpPr>
+          <p:cNvPr id="6" name="TextBox 5"/>
+          <p:cNvSpPr txBox="1"/>
+          <p:nvPr/>
+        </p:nvSpPr>
+        <p:spPr>
+          <a:xfrm>
+            <a:off x="10789920" y="6473952"/>
+            <a:ext cx="822960" cy="228600"/>
+          </a:xfrm>
+          <a:prstGeom prst="rect">
+            <a:avLst/>
+          </a:prstGeom>
+          <a:noFill/>
+        </p:spPr>
+        <p:txBody>
+          <a:bodyPr wrap="none">
+            <a:spAutoFit/>
+          </a:bodyPr>
+          <a:lstStyle/>
+          <a:p>
+            <a:pPr algn="r"/>
+            <a:r>
+              <a:rPr sz="800" b="0" i="0">
+                <a:latin typeface="Calibri"/>
+              </a:rPr>
+              <a:t>31/31</a:t>
             </a:r>
           </a:p>
         </p:txBody>
@@ -5295,8 +9245,8 @@
         </p:nvSpPr>
         <p:spPr>
           <a:xfrm>
-            <a:off x="640080" y="411480"/>
-            <a:ext cx="10972800" cy="502920"/>
+            <a:off x="594360" y="347472"/>
+            <a:ext cx="11064240" cy="457200"/>
           </a:xfrm>
           <a:prstGeom prst="rect">
             <a:avLst/>
@@ -5309,12 +9259,11 @@
           </a:bodyPr>
           <a:lstStyle/>
           <a:p>
-            <a:pPr algn="l"/>
-            <a:r>
-              <a:rPr sz="2600" b="1" i="0">
+            <a:r>
+              <a:rPr sz="2500" b="1" i="0">
                 <a:latin typeface="Calibri"/>
               </a:rPr>
-              <a:t>Разучени подходи</a:t>
+              <a:t>Какво е image captioning</a:t>
             </a:r>
           </a:p>
         </p:txBody>
@@ -5327,8 +9276,8 @@
         </p:nvSpPr>
         <p:spPr>
           <a:xfrm>
-            <a:off x="640080" y="1005840"/>
-            <a:ext cx="10881360" cy="9144"/>
+            <a:off x="594360" y="932688"/>
+            <a:ext cx="10972800" cy="18288"/>
           </a:xfrm>
           <a:prstGeom prst="rect">
             <a:avLst/>
@@ -5372,69 +9321,69 @@
         </p:nvSpPr>
         <p:spPr>
           <a:xfrm>
-            <a:off x="868680" y="1325880"/>
-            <a:ext cx="10424160" cy="4754880"/>
-          </a:xfrm>
-          <a:prstGeom prst="rect">
-            <a:avLst/>
-          </a:prstGeom>
-          <a:noFill/>
-        </p:spPr>
-        <p:txBody>
-          <a:bodyPr wrap="square">
-            <a:spAutoFit/>
-          </a:bodyPr>
-          <a:lstStyle/>
-          <a:p>
-            <a:pPr>
-              <a:spcAft>
-                <a:spcPts val="1000"/>
-              </a:spcAft>
-              <a:defRPr sz="2100">
-                <a:latin typeface="Calibri"/>
-              </a:defRPr>
-            </a:pPr>
-            <a:r>
-              <a:t>Класически подход: CNN извлича визуални характеристики, а RNN/LSTM генерира изречение дума по дума.</a:t>
-            </a:r>
-          </a:p>
-          <a:p>
-            <a:pPr>
-              <a:spcAft>
-                <a:spcPts val="1000"/>
-              </a:spcAft>
-              <a:defRPr sz="2100">
-                <a:latin typeface="Calibri"/>
-              </a:defRPr>
-            </a:pPr>
-            <a:r>
-              <a:t>Attention механизмите подобряват връзката между отделни части от изображението и отделни думи.</a:t>
-            </a:r>
-          </a:p>
-          <a:p>
-            <a:pPr>
-              <a:spcAft>
-                <a:spcPts val="1000"/>
-              </a:spcAft>
-              <a:defRPr sz="2100">
-                <a:latin typeface="Calibri"/>
-              </a:defRPr>
-            </a:pPr>
-            <a:r>
-              <a:t>Transformer-базираните vision-language модели обикновено дават по-добри резултати, но са по-тежки.</a:t>
-            </a:r>
-          </a:p>
-          <a:p>
-            <a:pPr>
-              <a:spcAft>
-                <a:spcPts val="1000"/>
-              </a:spcAft>
-              <a:defRPr sz="2100">
-                <a:latin typeface="Calibri"/>
-              </a:defRPr>
-            </a:pPr>
-            <a:r>
-              <a:t>За оценка се използват автоматични метрики като BLEU и ROUGE-L, както и качествен преглед на примери.</a:t>
+            <a:off x="822960" y="1234440"/>
+            <a:ext cx="10607040" cy="5074920"/>
+          </a:xfrm>
+          <a:prstGeom prst="rect">
+            <a:avLst/>
+          </a:prstGeom>
+          <a:noFill/>
+        </p:spPr>
+        <p:txBody>
+          <a:bodyPr wrap="square" lIns="45720" rIns="45720">
+            <a:spAutoFit/>
+          </a:bodyPr>
+          <a:lstStyle/>
+          <a:p>
+            <a:pPr>
+              <a:spcAft>
+                <a:spcPts val="1000"/>
+              </a:spcAft>
+              <a:defRPr sz="2000">
+                <a:latin typeface="Calibri"/>
+              </a:defRPr>
+            </a:pPr>
+            <a:r>
+              <a:t>Image captioning стои между computer vision и обработка на естествен език.</a:t>
+            </a:r>
+          </a:p>
+          <a:p>
+            <a:pPr>
+              <a:spcAft>
+                <a:spcPts val="1000"/>
+              </a:spcAft>
+              <a:defRPr sz="2000">
+                <a:latin typeface="Calibri"/>
+              </a:defRPr>
+            </a:pPr>
+            <a:r>
+              <a:t>При classification моделът избира етикет, например “dog” или “car”.</a:t>
+            </a:r>
+          </a:p>
+          <a:p>
+            <a:pPr>
+              <a:spcAft>
+                <a:spcPts val="1000"/>
+              </a:spcAft>
+              <a:defRPr sz="2000">
+                <a:latin typeface="Calibri"/>
+              </a:defRPr>
+            </a:pPr>
+            <a:r>
+              <a:t>Тук изходът е цяло изречение, например “a dog is running through grass”.</a:t>
+            </a:r>
+          </a:p>
+          <a:p>
+            <a:pPr>
+              <a:spcAft>
+                <a:spcPts val="1000"/>
+              </a:spcAft>
+              <a:defRPr sz="2000">
+                <a:latin typeface="Calibri"/>
+              </a:defRPr>
+            </a:pPr>
+            <a:r>
+              <a:t>Това прави задачата по-трудна, защото една снимка може да има няколко правилни описания.</a:t>
             </a:r>
           </a:p>
         </p:txBody>
@@ -5447,8 +9396,8 @@
         </p:nvSpPr>
         <p:spPr>
           <a:xfrm>
-            <a:off x="548640" y="6473952"/>
-            <a:ext cx="5486400" cy="228600"/>
+            <a:off x="502920" y="6473952"/>
+            <a:ext cx="7772400" cy="228600"/>
           </a:xfrm>
           <a:prstGeom prst="rect">
             <a:avLst/>
@@ -5479,8 +9428,8 @@
         </p:nvSpPr>
         <p:spPr>
           <a:xfrm>
-            <a:off x="10972800" y="6473952"/>
-            <a:ext cx="640080" cy="228600"/>
+            <a:off x="10789920" y="6473952"/>
+            <a:ext cx="822960" cy="228600"/>
           </a:xfrm>
           <a:prstGeom prst="rect">
             <a:avLst/>
@@ -5498,7 +9447,7 @@
               <a:rPr sz="800" b="0" i="0">
                 <a:latin typeface="Calibri"/>
               </a:rPr>
-              <a:t>4/15</a:t>
+              <a:t>4/31</a:t>
             </a:r>
           </a:p>
         </p:txBody>
@@ -5529,8 +9478,8 @@
         </p:nvSpPr>
         <p:spPr>
           <a:xfrm>
-            <a:off x="640080" y="411480"/>
-            <a:ext cx="10972800" cy="502920"/>
+            <a:off x="594360" y="347472"/>
+            <a:ext cx="11064240" cy="457200"/>
           </a:xfrm>
           <a:prstGeom prst="rect">
             <a:avLst/>
@@ -5543,12 +9492,11 @@
           </a:bodyPr>
           <a:lstStyle/>
           <a:p>
-            <a:pPr algn="l"/>
-            <a:r>
-              <a:rPr sz="2600" b="1" i="0">
+            <a:r>
+              <a:rPr sz="2500" b="1" i="0">
                 <a:latin typeface="Calibri"/>
               </a:rPr>
-              <a:t>Набор от данни</a:t>
+              <a:t>Какви подходи разгледах</a:t>
             </a:r>
           </a:p>
         </p:txBody>
@@ -5561,8 +9509,8 @@
         </p:nvSpPr>
         <p:spPr>
           <a:xfrm>
-            <a:off x="640080" y="1005840"/>
-            <a:ext cx="10881360" cy="9144"/>
+            <a:off x="594360" y="932688"/>
+            <a:ext cx="10972800" cy="18288"/>
           </a:xfrm>
           <a:prstGeom prst="rect">
             <a:avLst/>
@@ -5606,69 +9554,69 @@
         </p:nvSpPr>
         <p:spPr>
           <a:xfrm>
-            <a:off x="868680" y="1325880"/>
-            <a:ext cx="10424160" cy="4754880"/>
-          </a:xfrm>
-          <a:prstGeom prst="rect">
-            <a:avLst/>
-          </a:prstGeom>
-          <a:noFill/>
-        </p:spPr>
-        <p:txBody>
-          <a:bodyPr wrap="square">
-            <a:spAutoFit/>
-          </a:bodyPr>
-          <a:lstStyle/>
-          <a:p>
-            <a:pPr>
-              <a:spcAft>
-                <a:spcPts val="1000"/>
-              </a:spcAft>
-              <a:defRPr sz="2100">
-                <a:latin typeface="Calibri"/>
-              </a:defRPr>
-            </a:pPr>
-            <a:r>
-              <a:t>Използван е Flickr8k.</a:t>
-            </a:r>
-          </a:p>
-          <a:p>
-            <a:pPr>
-              <a:spcAft>
-                <a:spcPts val="1000"/>
-              </a:spcAft>
-              <a:defRPr sz="2100">
-                <a:latin typeface="Calibri"/>
-              </a:defRPr>
-            </a:pPr>
-            <a:r>
-              <a:t>Наборът съдържа 8091 изображения от ежедневни сцени.</a:t>
-            </a:r>
-          </a:p>
-          <a:p>
-            <a:pPr>
-              <a:spcAft>
-                <a:spcPts val="1000"/>
-              </a:spcAft>
-              <a:defRPr sz="2100">
-                <a:latin typeface="Calibri"/>
-              </a:defRPr>
-            </a:pPr>
-            <a:r>
-              <a:t>За всяко изображение има приблизително пет човешки описания.</a:t>
-            </a:r>
-          </a:p>
-          <a:p>
-            <a:pPr>
-              <a:spcAft>
-                <a:spcPts val="1000"/>
-              </a:spcAft>
-              <a:defRPr sz="2100">
-                <a:latin typeface="Calibri"/>
-              </a:defRPr>
-            </a:pPr>
-            <a:r>
-              <a:t>Данните са разделени на train, validation и test по уникални изображения, за да няма изтичане между частите.</a:t>
+            <a:off x="822960" y="1234440"/>
+            <a:ext cx="10607040" cy="5074920"/>
+          </a:xfrm>
+          <a:prstGeom prst="rect">
+            <a:avLst/>
+          </a:prstGeom>
+          <a:noFill/>
+        </p:spPr>
+        <p:txBody>
+          <a:bodyPr wrap="square" lIns="45720" rIns="45720">
+            <a:spAutoFit/>
+          </a:bodyPr>
+          <a:lstStyle/>
+          <a:p>
+            <a:pPr>
+              <a:spcAft>
+                <a:spcPts val="1000"/>
+              </a:spcAft>
+              <a:defRPr sz="2000">
+                <a:latin typeface="Calibri"/>
+              </a:defRPr>
+            </a:pPr>
+            <a:r>
+              <a:t>Най-класическият подход е CNN + RNN/LSTM: CNN частта гледа изображението, а LSTM частта пише текста.</a:t>
+            </a:r>
+          </a:p>
+          <a:p>
+            <a:pPr>
+              <a:spcAft>
+                <a:spcPts val="1000"/>
+              </a:spcAft>
+              <a:defRPr sz="2000">
+                <a:latin typeface="Calibri"/>
+              </a:defRPr>
+            </a:pPr>
+            <a:r>
+              <a:t>Разгледах и attention подходи, при които моделът може да “обръща внимание” на различни части от снимката.</a:t>
+            </a:r>
+          </a:p>
+          <a:p>
+            <a:pPr>
+              <a:spcAft>
+                <a:spcPts val="1000"/>
+              </a:spcAft>
+              <a:defRPr sz="2000">
+                <a:latin typeface="Calibri"/>
+              </a:defRPr>
+            </a:pPr>
+            <a:r>
+              <a:t>Видях и по-съвременни transformer vision-language модели, които обикновено са обучени върху много повече данни.</a:t>
+            </a:r>
+          </a:p>
+          <a:p>
+            <a:pPr>
+              <a:spcAft>
+                <a:spcPts val="1000"/>
+              </a:spcAft>
+              <a:defRPr sz="2000">
+                <a:latin typeface="Calibri"/>
+              </a:defRPr>
+            </a:pPr>
+            <a:r>
+              <a:t>Добавих и retrieval идея, защото при малък dataset понякога е по-надеждно да се избере caption от подобна снимка.</a:t>
             </a:r>
           </a:p>
         </p:txBody>
@@ -5681,8 +9629,8 @@
         </p:nvSpPr>
         <p:spPr>
           <a:xfrm>
-            <a:off x="548640" y="6473952"/>
-            <a:ext cx="5486400" cy="228600"/>
+            <a:off x="502920" y="6473952"/>
+            <a:ext cx="7772400" cy="228600"/>
           </a:xfrm>
           <a:prstGeom prst="rect">
             <a:avLst/>
@@ -5713,8 +9661,8 @@
         </p:nvSpPr>
         <p:spPr>
           <a:xfrm>
-            <a:off x="10972800" y="6473952"/>
-            <a:ext cx="640080" cy="228600"/>
+            <a:off x="10789920" y="6473952"/>
+            <a:ext cx="822960" cy="228600"/>
           </a:xfrm>
           <a:prstGeom prst="rect">
             <a:avLst/>
@@ -5732,7 +9680,7 @@
               <a:rPr sz="800" b="0" i="0">
                 <a:latin typeface="Calibri"/>
               </a:rPr>
-              <a:t>5/15</a:t>
+              <a:t>5/31</a:t>
             </a:r>
           </a:p>
         </p:txBody>
@@ -5763,8 +9711,8 @@
         </p:nvSpPr>
         <p:spPr>
           <a:xfrm>
-            <a:off x="640080" y="411480"/>
-            <a:ext cx="10972800" cy="502920"/>
+            <a:off x="594360" y="347472"/>
+            <a:ext cx="11064240" cy="457200"/>
           </a:xfrm>
           <a:prstGeom prst="rect">
             <a:avLst/>
@@ -5777,12 +9725,11 @@
           </a:bodyPr>
           <a:lstStyle/>
           <a:p>
-            <a:pPr algn="l"/>
-            <a:r>
-              <a:rPr sz="2600" b="1" i="0">
+            <a:r>
+              <a:rPr sz="2500" b="1" i="0">
                 <a:latin typeface="Calibri"/>
               </a:rPr>
-              <a:t>Разглеждане на данните</a:t>
+              <a:t>Защо избрах VGG16 + LSTM</a:t>
             </a:r>
           </a:p>
         </p:txBody>
@@ -5795,8 +9742,8 @@
         </p:nvSpPr>
         <p:spPr>
           <a:xfrm>
-            <a:off x="640080" y="1005840"/>
-            <a:ext cx="10881360" cy="9144"/>
+            <a:off x="594360" y="932688"/>
+            <a:ext cx="10972800" cy="18288"/>
           </a:xfrm>
           <a:prstGeom prst="rect">
             <a:avLst/>
@@ -5840,69 +9787,69 @@
         </p:nvSpPr>
         <p:spPr>
           <a:xfrm>
-            <a:off x="868680" y="1325880"/>
-            <a:ext cx="10424160" cy="4754880"/>
-          </a:xfrm>
-          <a:prstGeom prst="rect">
-            <a:avLst/>
-          </a:prstGeom>
-          <a:noFill/>
-        </p:spPr>
-        <p:txBody>
-          <a:bodyPr wrap="square">
-            <a:spAutoFit/>
-          </a:bodyPr>
-          <a:lstStyle/>
-          <a:p>
-            <a:pPr>
-              <a:spcAft>
-                <a:spcPts val="1000"/>
-              </a:spcAft>
-              <a:defRPr sz="2100">
-                <a:latin typeface="Calibri"/>
-              </a:defRPr>
-            </a:pPr>
-            <a:r>
-              <a:t>Проверени са липсващи изображения, празни описания и повторения.</a:t>
-            </a:r>
-          </a:p>
-          <a:p>
-            <a:pPr>
-              <a:spcAft>
-                <a:spcPts val="1000"/>
-              </a:spcAft>
-              <a:defRPr sz="2100">
-                <a:latin typeface="Calibri"/>
-              </a:defRPr>
-            </a:pPr>
-            <a:r>
-              <a:t>Анализирана е дължината на описанията и най-често срещаните думи.</a:t>
-            </a:r>
-          </a:p>
-          <a:p>
-            <a:pPr>
-              <a:spcAft>
-                <a:spcPts val="1000"/>
-              </a:spcAft>
-              <a:defRPr sz="2100">
-                <a:latin typeface="Calibri"/>
-              </a:defRPr>
-            </a:pPr>
-            <a:r>
-              <a:t>Разгледани са размерите на изображенията и съотношението ширина към височина.</a:t>
-            </a:r>
-          </a:p>
-          <a:p>
-            <a:pPr>
-              <a:spcAft>
-                <a:spcPts val="1000"/>
-              </a:spcAft>
-              <a:defRPr sz="2100">
-                <a:latin typeface="Calibri"/>
-              </a:defRPr>
-            </a:pPr>
-            <a:r>
-              <a:t>Визуализациите са използвани, за да се види дали има очевидни аномалии в данните.</a:t>
+            <a:off x="822960" y="1234440"/>
+            <a:ext cx="10607040" cy="5074920"/>
+          </a:xfrm>
+          <a:prstGeom prst="rect">
+            <a:avLst/>
+          </a:prstGeom>
+          <a:noFill/>
+        </p:spPr>
+        <p:txBody>
+          <a:bodyPr wrap="square" lIns="45720" rIns="45720">
+            <a:spAutoFit/>
+          </a:bodyPr>
+          <a:lstStyle/>
+          <a:p>
+            <a:pPr>
+              <a:spcAft>
+                <a:spcPts val="1000"/>
+              </a:spcAft>
+              <a:defRPr sz="2000">
+                <a:latin typeface="Calibri"/>
+              </a:defRPr>
+            </a:pPr>
+            <a:r>
+              <a:t>Избрах VGG16 + LSTM, защото архитектурата е ясна и лесна за обяснение.</a:t>
+            </a:r>
+          </a:p>
+          <a:p>
+            <a:pPr>
+              <a:spcAft>
+                <a:spcPts val="1000"/>
+              </a:spcAft>
+              <a:defRPr sz="2000">
+                <a:latin typeface="Calibri"/>
+              </a:defRPr>
+            </a:pPr>
+            <a:r>
+              <a:t>VGG16 ми дава визуално представяне на изображението.</a:t>
+            </a:r>
+          </a:p>
+          <a:p>
+            <a:pPr>
+              <a:spcAft>
+                <a:spcPts val="1000"/>
+              </a:spcAft>
+              <a:defRPr sz="2000">
+                <a:latin typeface="Calibri"/>
+              </a:defRPr>
+            </a:pPr>
+            <a:r>
+              <a:t>LSTM използва това представяне и генерира caption дума по дума.</a:t>
+            </a:r>
+          </a:p>
+          <a:p>
+            <a:pPr>
+              <a:spcAft>
+                <a:spcPts val="1000"/>
+              </a:spcAft>
+              <a:defRPr sz="2000">
+                <a:latin typeface="Calibri"/>
+              </a:defRPr>
+            </a:pPr>
+            <a:r>
+              <a:t>Това е добър baseline: не е най-модерният вариант, но показва добре как работи image captioning процесът.</a:t>
             </a:r>
           </a:p>
         </p:txBody>
@@ -5915,8 +9862,8 @@
         </p:nvSpPr>
         <p:spPr>
           <a:xfrm>
-            <a:off x="548640" y="6473952"/>
-            <a:ext cx="5486400" cy="228600"/>
+            <a:off x="502920" y="6473952"/>
+            <a:ext cx="7772400" cy="228600"/>
           </a:xfrm>
           <a:prstGeom prst="rect">
             <a:avLst/>
@@ -5947,8 +9894,8 @@
         </p:nvSpPr>
         <p:spPr>
           <a:xfrm>
-            <a:off x="10972800" y="6473952"/>
-            <a:ext cx="640080" cy="228600"/>
+            <a:off x="10789920" y="6473952"/>
+            <a:ext cx="822960" cy="228600"/>
           </a:xfrm>
           <a:prstGeom prst="rect">
             <a:avLst/>
@@ -5966,7 +9913,7 @@
               <a:rPr sz="800" b="0" i="0">
                 <a:latin typeface="Calibri"/>
               </a:rPr>
-              <a:t>6/15</a:t>
+              <a:t>6/31</a:t>
             </a:r>
           </a:p>
         </p:txBody>
@@ -5997,8 +9944,8 @@
         </p:nvSpPr>
         <p:spPr>
           <a:xfrm>
-            <a:off x="640080" y="411480"/>
-            <a:ext cx="10972800" cy="502920"/>
+            <a:off x="594360" y="347472"/>
+            <a:ext cx="11064240" cy="457200"/>
           </a:xfrm>
           <a:prstGeom prst="rect">
             <a:avLst/>
@@ -6011,12 +9958,11 @@
           </a:bodyPr>
           <a:lstStyle/>
           <a:p>
-            <a:pPr algn="l"/>
-            <a:r>
-              <a:rPr sz="2600" b="1" i="0">
+            <a:r>
+              <a:rPr sz="2500" b="1" i="0">
                 <a:latin typeface="Calibri"/>
               </a:rPr>
-              <a:t>Предварителна обработка</a:t>
+              <a:t>Dataset Flickr8k</a:t>
             </a:r>
           </a:p>
         </p:txBody>
@@ -6029,8 +9975,8 @@
         </p:nvSpPr>
         <p:spPr>
           <a:xfrm>
-            <a:off x="640080" y="1005840"/>
-            <a:ext cx="10881360" cy="9144"/>
+            <a:off x="594360" y="932688"/>
+            <a:ext cx="10972800" cy="18288"/>
           </a:xfrm>
           <a:prstGeom prst="rect">
             <a:avLst/>
@@ -6074,69 +10020,82 @@
         </p:nvSpPr>
         <p:spPr>
           <a:xfrm>
-            <a:off x="868680" y="1325880"/>
-            <a:ext cx="10424160" cy="4754880"/>
-          </a:xfrm>
-          <a:prstGeom prst="rect">
-            <a:avLst/>
-          </a:prstGeom>
-          <a:noFill/>
-        </p:spPr>
-        <p:txBody>
-          <a:bodyPr wrap="square">
-            <a:spAutoFit/>
-          </a:bodyPr>
-          <a:lstStyle/>
-          <a:p>
-            <a:pPr>
-              <a:spcAft>
-                <a:spcPts val="1000"/>
-              </a:spcAft>
-              <a:defRPr sz="2100">
-                <a:latin typeface="Calibri"/>
-              </a:defRPr>
-            </a:pPr>
-            <a:r>
-              <a:t>Изображенията се преоразмеряват до 224 x 224 пиксела.</a:t>
-            </a:r>
-          </a:p>
-          <a:p>
-            <a:pPr>
-              <a:spcAft>
-                <a:spcPts val="1000"/>
-              </a:spcAft>
-              <a:defRPr sz="2100">
-                <a:latin typeface="Calibri"/>
-              </a:defRPr>
-            </a:pPr>
-            <a:r>
-              <a:t>Използва се нормализация със средни стойности и стандартни отклонения от ImageNet.</a:t>
-            </a:r>
-          </a:p>
-          <a:p>
-            <a:pPr>
-              <a:spcAft>
-                <a:spcPts val="1000"/>
-              </a:spcAft>
-              <a:defRPr sz="2100">
-                <a:latin typeface="Calibri"/>
-              </a:defRPr>
-            </a:pPr>
-            <a:r>
-              <a:t>При обучението се използват леки augmentation операции като обръщане по хоризонтала и ротация.</a:t>
-            </a:r>
-          </a:p>
-          <a:p>
-            <a:pPr>
-              <a:spcAft>
-                <a:spcPts val="1000"/>
-              </a:spcAft>
-              <a:defRPr sz="2100">
-                <a:latin typeface="Calibri"/>
-              </a:defRPr>
-            </a:pPr>
-            <a:r>
-              <a:t>При validation и test обработката е детерминирана, за да се сравняват резултатите коректно.</a:t>
+            <a:off x="822960" y="1234440"/>
+            <a:ext cx="10607040" cy="5074920"/>
+          </a:xfrm>
+          <a:prstGeom prst="rect">
+            <a:avLst/>
+          </a:prstGeom>
+          <a:noFill/>
+        </p:spPr>
+        <p:txBody>
+          <a:bodyPr wrap="square" lIns="45720" rIns="45720">
+            <a:spAutoFit/>
+          </a:bodyPr>
+          <a:lstStyle/>
+          <a:p>
+            <a:pPr>
+              <a:spcAft>
+                <a:spcPts val="1000"/>
+              </a:spcAft>
+              <a:defRPr sz="2000">
+                <a:latin typeface="Calibri"/>
+              </a:defRPr>
+            </a:pPr>
+            <a:r>
+              <a:t>Използвах Flickr8k от Kaggle.</a:t>
+            </a:r>
+          </a:p>
+          <a:p>
+            <a:pPr>
+              <a:spcAft>
+                <a:spcPts val="1000"/>
+              </a:spcAft>
+              <a:defRPr sz="2000">
+                <a:latin typeface="Calibri"/>
+              </a:defRPr>
+            </a:pPr>
+            <a:r>
+              <a:t>Dataset-ът има 8091 изображения.</a:t>
+            </a:r>
+          </a:p>
+          <a:p>
+            <a:pPr>
+              <a:spcAft>
+                <a:spcPts val="1000"/>
+              </a:spcAft>
+              <a:defRPr sz="2000">
+                <a:latin typeface="Calibri"/>
+              </a:defRPr>
+            </a:pPr>
+            <a:r>
+              <a:t>За всяко изображение има около 5 човешки описания.</a:t>
+            </a:r>
+          </a:p>
+          <a:p>
+            <a:pPr>
+              <a:spcAft>
+                <a:spcPts val="1000"/>
+              </a:spcAft>
+              <a:defRPr sz="2000">
+                <a:latin typeface="Calibri"/>
+              </a:defRPr>
+            </a:pPr>
+            <a:r>
+              <a:t>Общо captions са 40455.</a:t>
+            </a:r>
+          </a:p>
+          <a:p>
+            <a:pPr>
+              <a:spcAft>
+                <a:spcPts val="1000"/>
+              </a:spcAft>
+              <a:defRPr sz="2000">
+                <a:latin typeface="Calibri"/>
+              </a:defRPr>
+            </a:pPr>
+            <a:r>
+              <a:t>Повечето снимки са ежедневни сцени — хора навън, кучета, деца, спорт и движение.</a:t>
             </a:r>
           </a:p>
         </p:txBody>
@@ -6149,8 +10108,8 @@
         </p:nvSpPr>
         <p:spPr>
           <a:xfrm>
-            <a:off x="548640" y="6473952"/>
-            <a:ext cx="5486400" cy="228600"/>
+            <a:off x="502920" y="6473952"/>
+            <a:ext cx="7772400" cy="228600"/>
           </a:xfrm>
           <a:prstGeom prst="rect">
             <a:avLst/>
@@ -6181,8 +10140,8 @@
         </p:nvSpPr>
         <p:spPr>
           <a:xfrm>
-            <a:off x="10972800" y="6473952"/>
-            <a:ext cx="640080" cy="228600"/>
+            <a:off x="10789920" y="6473952"/>
+            <a:ext cx="822960" cy="228600"/>
           </a:xfrm>
           <a:prstGeom prst="rect">
             <a:avLst/>
@@ -6200,7 +10159,7 @@
               <a:rPr sz="800" b="0" i="0">
                 <a:latin typeface="Calibri"/>
               </a:rPr>
-              <a:t>7/15</a:t>
+              <a:t>7/31</a:t>
             </a:r>
           </a:p>
         </p:txBody>
@@ -6231,8 +10190,8 @@
         </p:nvSpPr>
         <p:spPr>
           <a:xfrm>
-            <a:off x="640080" y="411480"/>
-            <a:ext cx="10972800" cy="502920"/>
+            <a:off x="594360" y="347472"/>
+            <a:ext cx="11064240" cy="457200"/>
           </a:xfrm>
           <a:prstGeom prst="rect">
             <a:avLst/>
@@ -6245,12 +10204,11 @@
           </a:bodyPr>
           <a:lstStyle/>
           <a:p>
-            <a:pPr algn="l"/>
-            <a:r>
-              <a:rPr sz="2600" b="1" i="0">
+            <a:r>
+              <a:rPr sz="2500" b="1" i="0">
                 <a:latin typeface="Calibri"/>
               </a:rPr>
-              <a:t>Текстова обработка</a:t>
+              <a:t>Как са организирани данните</a:t>
             </a:r>
           </a:p>
         </p:txBody>
@@ -6263,8 +10221,8 @@
         </p:nvSpPr>
         <p:spPr>
           <a:xfrm>
-            <a:off x="640080" y="1005840"/>
-            <a:ext cx="10881360" cy="9144"/>
+            <a:off x="594360" y="932688"/>
+            <a:ext cx="10972800" cy="18288"/>
           </a:xfrm>
           <a:prstGeom prst="rect">
             <a:avLst/>
@@ -6308,69 +10266,82 @@
         </p:nvSpPr>
         <p:spPr>
           <a:xfrm>
-            <a:off x="868680" y="1325880"/>
-            <a:ext cx="10424160" cy="4754880"/>
-          </a:xfrm>
-          <a:prstGeom prst="rect">
-            <a:avLst/>
-          </a:prstGeom>
-          <a:noFill/>
-        </p:spPr>
-        <p:txBody>
-          <a:bodyPr wrap="square">
-            <a:spAutoFit/>
-          </a:bodyPr>
-          <a:lstStyle/>
-          <a:p>
-            <a:pPr>
-              <a:spcAft>
-                <a:spcPts val="1000"/>
-              </a:spcAft>
-              <a:defRPr sz="2100">
-                <a:latin typeface="Calibri"/>
-              </a:defRPr>
-            </a:pPr>
-            <a:r>
-              <a:t>Описанията се почистват и токенизират.</a:t>
-            </a:r>
-          </a:p>
-          <a:p>
-            <a:pPr>
-              <a:spcAft>
-                <a:spcPts val="1000"/>
-              </a:spcAft>
-              <a:defRPr sz="2100">
-                <a:latin typeface="Calibri"/>
-              </a:defRPr>
-            </a:pPr>
-            <a:r>
-              <a:t>Изграден е речник от думите, които се срещат достатъчно често в training частта.</a:t>
-            </a:r>
-          </a:p>
-          <a:p>
-            <a:pPr>
-              <a:spcAft>
-                <a:spcPts val="1000"/>
-              </a:spcAft>
-              <a:defRPr sz="2100">
-                <a:latin typeface="Calibri"/>
-              </a:defRPr>
-            </a:pPr>
-            <a:r>
-              <a:t>Добавени са специални токени за начало, край, padding и непозната дума.</a:t>
-            </a:r>
-          </a:p>
-          <a:p>
-            <a:pPr>
-              <a:spcAft>
-                <a:spcPts val="1000"/>
-              </a:spcAft>
-              <a:defRPr sz="2100">
-                <a:latin typeface="Calibri"/>
-              </a:defRPr>
-            </a:pPr>
-            <a:r>
-              <a:t>Думите в основния модел се представят чрез обучаем Embedding слой.</a:t>
+            <a:off x="822960" y="1234440"/>
+            <a:ext cx="10607040" cy="5074920"/>
+          </a:xfrm>
+          <a:prstGeom prst="rect">
+            <a:avLst/>
+          </a:prstGeom>
+          <a:noFill/>
+        </p:spPr>
+        <p:txBody>
+          <a:bodyPr wrap="square" lIns="45720" rIns="45720">
+            <a:spAutoFit/>
+          </a:bodyPr>
+          <a:lstStyle/>
+          <a:p>
+            <a:pPr>
+              <a:spcAft>
+                <a:spcPts val="1000"/>
+              </a:spcAft>
+              <a:defRPr sz="2000">
+                <a:latin typeface="Calibri"/>
+              </a:defRPr>
+            </a:pPr>
+            <a:r>
+              <a:t>Изображенията са в `DATA/flickr8k/Images`.</a:t>
+            </a:r>
+          </a:p>
+          <a:p>
+            <a:pPr>
+              <a:spcAft>
+                <a:spcPts val="1000"/>
+              </a:spcAft>
+              <a:defRPr sz="2000">
+                <a:latin typeface="Calibri"/>
+              </a:defRPr>
+            </a:pPr>
+            <a:r>
+              <a:t>Описанията са в `DATA/flickr8k/captions.txt`.</a:t>
+            </a:r>
+          </a:p>
+          <a:p>
+            <a:pPr>
+              <a:spcAft>
+                <a:spcPts val="1000"/>
+              </a:spcAft>
+              <a:defRPr sz="2000">
+                <a:latin typeface="Calibri"/>
+              </a:defRPr>
+            </a:pPr>
+            <a:r>
+              <a:t>Един image файл има няколко реда с различни captions.</a:t>
+            </a:r>
+          </a:p>
+          <a:p>
+            <a:pPr>
+              <a:spcAft>
+                <a:spcPts val="1000"/>
+              </a:spcAft>
+              <a:defRPr sz="2000">
+                <a:latin typeface="Calibri"/>
+              </a:defRPr>
+            </a:pPr>
+            <a:r>
+              <a:t>Затова при split-а внимавах всички captions за една снимка да останат в една и съща част.</a:t>
+            </a:r>
+          </a:p>
+          <a:p>
+            <a:pPr>
+              <a:spcAft>
+                <a:spcPts val="1000"/>
+              </a:spcAft>
+              <a:defRPr sz="2000">
+                <a:latin typeface="Calibri"/>
+              </a:defRPr>
+            </a:pPr>
+            <a:r>
+              <a:t>Ако това не се направи, моделът може индиректно да вижда test изображения по време на training.</a:t>
             </a:r>
           </a:p>
         </p:txBody>
@@ -6383,8 +10354,8 @@
         </p:nvSpPr>
         <p:spPr>
           <a:xfrm>
-            <a:off x="548640" y="6473952"/>
-            <a:ext cx="5486400" cy="228600"/>
+            <a:off x="502920" y="6473952"/>
+            <a:ext cx="7772400" cy="228600"/>
           </a:xfrm>
           <a:prstGeom prst="rect">
             <a:avLst/>
@@ -6415,8 +10386,8 @@
         </p:nvSpPr>
         <p:spPr>
           <a:xfrm>
-            <a:off x="10972800" y="6473952"/>
-            <a:ext cx="640080" cy="228600"/>
+            <a:off x="10789920" y="6473952"/>
+            <a:ext cx="822960" cy="228600"/>
           </a:xfrm>
           <a:prstGeom prst="rect">
             <a:avLst/>
@@ -6434,7 +10405,7 @@
               <a:rPr sz="800" b="0" i="0">
                 <a:latin typeface="Calibri"/>
               </a:rPr>
-              <a:t>8/15</a:t>
+              <a:t>8/31</a:t>
             </a:r>
           </a:p>
         </p:txBody>
@@ -6465,8 +10436,8 @@
         </p:nvSpPr>
         <p:spPr>
           <a:xfrm>
-            <a:off x="640080" y="411480"/>
-            <a:ext cx="10972800" cy="502920"/>
+            <a:off x="594360" y="347472"/>
+            <a:ext cx="11064240" cy="457200"/>
           </a:xfrm>
           <a:prstGeom prst="rect">
             <a:avLst/>
@@ -6479,12 +10450,11 @@
           </a:bodyPr>
           <a:lstStyle/>
           <a:p>
-            <a:pPr algn="l"/>
-            <a:r>
-              <a:rPr sz="2600" b="1" i="0">
+            <a:r>
+              <a:rPr sz="2500" b="1" i="0">
                 <a:latin typeface="Calibri"/>
               </a:rPr>
-              <a:t>Архитектура на модела</a:t>
+              <a:t>Какво проверих в EDA</a:t>
             </a:r>
           </a:p>
         </p:txBody>
@@ -6497,8 +10467,8 @@
         </p:nvSpPr>
         <p:spPr>
           <a:xfrm>
-            <a:off x="640080" y="1005840"/>
-            <a:ext cx="10881360" cy="9144"/>
+            <a:off x="594360" y="932688"/>
+            <a:ext cx="10972800" cy="18288"/>
           </a:xfrm>
           <a:prstGeom prst="rect">
             <a:avLst/>
@@ -6542,69 +10512,69 @@
         </p:nvSpPr>
         <p:spPr>
           <a:xfrm>
-            <a:off x="868680" y="1325880"/>
-            <a:ext cx="10424160" cy="4754880"/>
-          </a:xfrm>
-          <a:prstGeom prst="rect">
-            <a:avLst/>
-          </a:prstGeom>
-          <a:noFill/>
-        </p:spPr>
-        <p:txBody>
-          <a:bodyPr wrap="square">
-            <a:spAutoFit/>
-          </a:bodyPr>
-          <a:lstStyle/>
-          <a:p>
-            <a:pPr>
-              <a:spcAft>
-                <a:spcPts val="1000"/>
-              </a:spcAft>
-              <a:defRPr sz="2100">
-                <a:latin typeface="Calibri"/>
-              </a:defRPr>
-            </a:pPr>
-            <a:r>
-              <a:t>Encoder: предварително обучен VGG16, използван за извличане на визуални характеристики.</a:t>
-            </a:r>
-          </a:p>
-          <a:p>
-            <a:pPr>
-              <a:spcAft>
-                <a:spcPts val="1000"/>
-              </a:spcAft>
-              <a:defRPr sz="2100">
-                <a:latin typeface="Calibri"/>
-              </a:defRPr>
-            </a:pPr>
-            <a:r>
-              <a:t>Decoder: LSTM, който получава image features и генерира последователност от думи.</a:t>
-            </a:r>
-          </a:p>
-          <a:p>
-            <a:pPr>
-              <a:spcAft>
-                <a:spcPts val="1000"/>
-              </a:spcAft>
-              <a:defRPr sz="2100">
-                <a:latin typeface="Calibri"/>
-              </a:defRPr>
-            </a:pPr>
-            <a:r>
-              <a:t>Loss функция: cross-entropy за предсказване на следващата дума.</a:t>
-            </a:r>
-          </a:p>
-          <a:p>
-            <a:pPr>
-              <a:spcAft>
-                <a:spcPts val="1000"/>
-              </a:spcAft>
-              <a:defRPr sz="2100">
-                <a:latin typeface="Calibri"/>
-              </a:defRPr>
-            </a:pPr>
-            <a:r>
-              <a:t>VGG features се кешират, за да се ускори обучението при повторни експерименти.</a:t>
+            <a:off x="822960" y="1234440"/>
+            <a:ext cx="10607040" cy="5074920"/>
+          </a:xfrm>
+          <a:prstGeom prst="rect">
+            <a:avLst/>
+          </a:prstGeom>
+          <a:noFill/>
+        </p:spPr>
+        <p:txBody>
+          <a:bodyPr wrap="square" lIns="45720" rIns="45720">
+            <a:spAutoFit/>
+          </a:bodyPr>
+          <a:lstStyle/>
+          <a:p>
+            <a:pPr>
+              <a:spcAft>
+                <a:spcPts val="1000"/>
+              </a:spcAft>
+              <a:defRPr sz="2000">
+                <a:latin typeface="Calibri"/>
+              </a:defRPr>
+            </a:pPr>
+            <a:r>
+              <a:t>Първо проверих дали има празни captions, липсващи стойности или липсващи image файлове.</a:t>
+            </a:r>
+          </a:p>
+          <a:p>
+            <a:pPr>
+              <a:spcAft>
+                <a:spcPts val="1000"/>
+              </a:spcAft>
+              <a:defRPr sz="2000">
+                <a:latin typeface="Calibri"/>
+              </a:defRPr>
+            </a:pPr>
+            <a:r>
+              <a:t>След това разгледах дължината на captions и най-често срещаните думи.</a:t>
+            </a:r>
+          </a:p>
+          <a:p>
+            <a:pPr>
+              <a:spcAft>
+                <a:spcPts val="1000"/>
+              </a:spcAft>
+              <a:defRPr sz="2000">
+                <a:latin typeface="Calibri"/>
+              </a:defRPr>
+            </a:pPr>
+            <a:r>
+              <a:t>Проверих и размерите на изображенията, защото моделът очаква фиксиран вход.</a:t>
+            </a:r>
+          </a:p>
+          <a:p>
+            <a:pPr>
+              <a:spcAft>
+                <a:spcPts val="1000"/>
+              </a:spcAft>
+              <a:defRPr sz="2000">
+                <a:latin typeface="Calibri"/>
+              </a:defRPr>
+            </a:pPr>
+            <a:r>
+              <a:t>Запазих таблици и графики в `reports/eda/`, за да мога да ги използвам в доклада и презентацията.</a:t>
             </a:r>
           </a:p>
         </p:txBody>
@@ -6617,8 +10587,8 @@
         </p:nvSpPr>
         <p:spPr>
           <a:xfrm>
-            <a:off x="548640" y="6473952"/>
-            <a:ext cx="5486400" cy="228600"/>
+            <a:off x="502920" y="6473952"/>
+            <a:ext cx="7772400" cy="228600"/>
           </a:xfrm>
           <a:prstGeom prst="rect">
             <a:avLst/>
@@ -6649,8 +10619,8 @@
         </p:nvSpPr>
         <p:spPr>
           <a:xfrm>
-            <a:off x="10972800" y="6473952"/>
-            <a:ext cx="640080" cy="228600"/>
+            <a:off x="10789920" y="6473952"/>
+            <a:ext cx="822960" cy="228600"/>
           </a:xfrm>
           <a:prstGeom prst="rect">
             <a:avLst/>
@@ -6668,7 +10638,7 @@
               <a:rPr sz="800" b="0" i="0">
                 <a:latin typeface="Calibri"/>
               </a:rPr>
-              <a:t>9/15</a:t>
+              <a:t>9/31</a:t>
             </a:r>
           </a:p>
         </p:txBody>
